--- a/Presentacion_entrega_2.pptx
+++ b/Presentacion_entrega_2.pptx
@@ -1,42 +1,42 @@
 
 <file path=ppt/presentation.xml><?xml version="1.0" encoding="utf-8"?>
-<p:presentation xmlns:a="http://schemas.openxmlformats.org/drawingml/2006/main" xmlns:r="http://schemas.openxmlformats.org/officeDocument/2006/relationships" xmlns:mc="http://schemas.openxmlformats.org/markup-compatibility/2006" xmlns:mv="urn:schemas-microsoft-com:mac:vml" xmlns:p="http://schemas.openxmlformats.org/presentationml/2006/main" xmlns:c="http://schemas.openxmlformats.org/drawingml/2006/chart" xmlns:dgm="http://schemas.openxmlformats.org/drawingml/2006/diagram" xmlns:o="urn:schemas-microsoft-com:office:office" xmlns:v="urn:schemas-microsoft-com:vml" xmlns:pvml="urn:schemas-microsoft-com:office:powerpoint" xmlns:com="http://schemas.openxmlformats.org/drawingml/2006/compatibility" xmlns:p14="http://schemas.microsoft.com/office/powerpoint/2010/main" xmlns:p15="http://schemas.microsoft.com/office/powerpoint/2012/main" xmlns:ahyp="http://schemas.microsoft.com/office/drawing/2018/hyperlinkcolor" autoCompressPictures="0" embedTrueTypeFonts="1" strictFirstAndLastChars="0" saveSubsetFonts="1">
+<p:presentation xmlns:a="http://schemas.openxmlformats.org/drawingml/2006/main" xmlns:r="http://schemas.openxmlformats.org/officeDocument/2006/relationships" xmlns:p="http://schemas.openxmlformats.org/presentationml/2006/main" strictFirstAndLastChars="0" embedTrueTypeFonts="1" saveSubsetFonts="1" autoCompressPictures="0">
   <p:sldMasterIdLst>
-    <p:sldMasterId id="2147483659" r:id="rId4"/>
+    <p:sldMasterId id="2147483659" r:id="rId1"/>
   </p:sldMasterIdLst>
   <p:notesMasterIdLst>
-    <p:notesMasterId r:id="rId5"/>
+    <p:notesMasterId r:id="rId10"/>
   </p:notesMasterIdLst>
   <p:sldIdLst>
-    <p:sldId id="256" r:id="rId6"/>
-    <p:sldId id="257" r:id="rId7"/>
-    <p:sldId id="258" r:id="rId8"/>
-    <p:sldId id="259" r:id="rId9"/>
-    <p:sldId id="260" r:id="rId10"/>
-    <p:sldId id="261" r:id="rId11"/>
-    <p:sldId id="262" r:id="rId12"/>
-    <p:sldId id="263" r:id="rId13"/>
+    <p:sldId id="256" r:id="rId2"/>
+    <p:sldId id="257" r:id="rId3"/>
+    <p:sldId id="258" r:id="rId4"/>
+    <p:sldId id="259" r:id="rId5"/>
+    <p:sldId id="260" r:id="rId6"/>
+    <p:sldId id="261" r:id="rId7"/>
+    <p:sldId id="262" r:id="rId8"/>
+    <p:sldId id="263" r:id="rId9"/>
   </p:sldIdLst>
-  <p:sldSz cy="5143500" cx="9144000"/>
+  <p:sldSz cx="9144000" cy="5143500" type="screen16x9"/>
   <p:notesSz cx="6858000" cy="9144000"/>
   <p:embeddedFontLst>
     <p:embeddedFont>
-      <p:font typeface="Economica"/>
-      <p:regular r:id="rId14"/>
-      <p:bold r:id="rId15"/>
-      <p:italic r:id="rId16"/>
-      <p:boldItalic r:id="rId17"/>
+      <p:font typeface="Economica" panose="020B0604020202020204" charset="0"/>
+      <p:regular r:id="rId11"/>
+      <p:bold r:id="rId12"/>
+      <p:italic r:id="rId13"/>
+      <p:boldItalic r:id="rId14"/>
     </p:embeddedFont>
     <p:embeddedFont>
-      <p:font typeface="Open Sans"/>
-      <p:regular r:id="rId18"/>
-      <p:bold r:id="rId19"/>
-      <p:italic r:id="rId20"/>
-      <p:boldItalic r:id="rId21"/>
+      <p:font typeface="Open Sans" panose="020B0606030504020204" pitchFamily="34" charset="0"/>
+      <p:regular r:id="rId15"/>
+      <p:bold r:id="rId16"/>
+      <p:italic r:id="rId17"/>
+      <p:boldItalic r:id="rId18"/>
     </p:embeddedFont>
   </p:embeddedFontLst>
   <p:defaultTextStyle>
-    <a:defPPr lvl="0" marR="0" rtl="0" algn="l">
+    <a:defPPr marR="0" lvl="0" algn="l" rtl="0">
       <a:lnSpc>
         <a:spcPct val="100000"/>
       </a:lnSpc>
@@ -47,7 +47,7 @@
         <a:spcPts val="0"/>
       </a:spcAft>
     </a:defPPr>
-    <a:lvl1pPr lvl="0" marR="0" rtl="0" algn="l">
+    <a:lvl1pPr marR="0" lvl="0" algn="l" rtl="0">
       <a:lnSpc>
         <a:spcPct val="100000"/>
       </a:lnSpc>
@@ -61,7 +61,7 @@
         <a:srgbClr val="000000"/>
       </a:buClr>
       <a:buFont typeface="Arial"/>
-      <a:defRPr b="0" i="0" sz="1400" u="none" cap="none" strike="noStrike">
+      <a:defRPr sz="1400" b="0" i="0" u="none" strike="noStrike" cap="none">
         <a:solidFill>
           <a:srgbClr val="000000"/>
         </a:solidFill>
@@ -71,7 +71,7 @@
         <a:sym typeface="Arial"/>
       </a:defRPr>
     </a:lvl1pPr>
-    <a:lvl2pPr lvl="1" marR="0" rtl="0" algn="l">
+    <a:lvl2pPr marR="0" lvl="1" algn="l" rtl="0">
       <a:lnSpc>
         <a:spcPct val="100000"/>
       </a:lnSpc>
@@ -85,7 +85,7 @@
         <a:srgbClr val="000000"/>
       </a:buClr>
       <a:buFont typeface="Arial"/>
-      <a:defRPr b="0" i="0" sz="1400" u="none" cap="none" strike="noStrike">
+      <a:defRPr sz="1400" b="0" i="0" u="none" strike="noStrike" cap="none">
         <a:solidFill>
           <a:srgbClr val="000000"/>
         </a:solidFill>
@@ -95,7 +95,7 @@
         <a:sym typeface="Arial"/>
       </a:defRPr>
     </a:lvl2pPr>
-    <a:lvl3pPr lvl="2" marR="0" rtl="0" algn="l">
+    <a:lvl3pPr marR="0" lvl="2" algn="l" rtl="0">
       <a:lnSpc>
         <a:spcPct val="100000"/>
       </a:lnSpc>
@@ -109,7 +109,7 @@
         <a:srgbClr val="000000"/>
       </a:buClr>
       <a:buFont typeface="Arial"/>
-      <a:defRPr b="0" i="0" sz="1400" u="none" cap="none" strike="noStrike">
+      <a:defRPr sz="1400" b="0" i="0" u="none" strike="noStrike" cap="none">
         <a:solidFill>
           <a:srgbClr val="000000"/>
         </a:solidFill>
@@ -119,7 +119,7 @@
         <a:sym typeface="Arial"/>
       </a:defRPr>
     </a:lvl3pPr>
-    <a:lvl4pPr lvl="3" marR="0" rtl="0" algn="l">
+    <a:lvl4pPr marR="0" lvl="3" algn="l" rtl="0">
       <a:lnSpc>
         <a:spcPct val="100000"/>
       </a:lnSpc>
@@ -133,7 +133,7 @@
         <a:srgbClr val="000000"/>
       </a:buClr>
       <a:buFont typeface="Arial"/>
-      <a:defRPr b="0" i="0" sz="1400" u="none" cap="none" strike="noStrike">
+      <a:defRPr sz="1400" b="0" i="0" u="none" strike="noStrike" cap="none">
         <a:solidFill>
           <a:srgbClr val="000000"/>
         </a:solidFill>
@@ -143,7 +143,7 @@
         <a:sym typeface="Arial"/>
       </a:defRPr>
     </a:lvl4pPr>
-    <a:lvl5pPr lvl="4" marR="0" rtl="0" algn="l">
+    <a:lvl5pPr marR="0" lvl="4" algn="l" rtl="0">
       <a:lnSpc>
         <a:spcPct val="100000"/>
       </a:lnSpc>
@@ -157,7 +157,7 @@
         <a:srgbClr val="000000"/>
       </a:buClr>
       <a:buFont typeface="Arial"/>
-      <a:defRPr b="0" i="0" sz="1400" u="none" cap="none" strike="noStrike">
+      <a:defRPr sz="1400" b="0" i="0" u="none" strike="noStrike" cap="none">
         <a:solidFill>
           <a:srgbClr val="000000"/>
         </a:solidFill>
@@ -167,7 +167,7 @@
         <a:sym typeface="Arial"/>
       </a:defRPr>
     </a:lvl5pPr>
-    <a:lvl6pPr lvl="5" marR="0" rtl="0" algn="l">
+    <a:lvl6pPr marR="0" lvl="5" algn="l" rtl="0">
       <a:lnSpc>
         <a:spcPct val="100000"/>
       </a:lnSpc>
@@ -181,7 +181,7 @@
         <a:srgbClr val="000000"/>
       </a:buClr>
       <a:buFont typeface="Arial"/>
-      <a:defRPr b="0" i="0" sz="1400" u="none" cap="none" strike="noStrike">
+      <a:defRPr sz="1400" b="0" i="0" u="none" strike="noStrike" cap="none">
         <a:solidFill>
           <a:srgbClr val="000000"/>
         </a:solidFill>
@@ -191,7 +191,7 @@
         <a:sym typeface="Arial"/>
       </a:defRPr>
     </a:lvl6pPr>
-    <a:lvl7pPr lvl="6" marR="0" rtl="0" algn="l">
+    <a:lvl7pPr marR="0" lvl="6" algn="l" rtl="0">
       <a:lnSpc>
         <a:spcPct val="100000"/>
       </a:lnSpc>
@@ -205,7 +205,7 @@
         <a:srgbClr val="000000"/>
       </a:buClr>
       <a:buFont typeface="Arial"/>
-      <a:defRPr b="0" i="0" sz="1400" u="none" cap="none" strike="noStrike">
+      <a:defRPr sz="1400" b="0" i="0" u="none" strike="noStrike" cap="none">
         <a:solidFill>
           <a:srgbClr val="000000"/>
         </a:solidFill>
@@ -215,7 +215,7 @@
         <a:sym typeface="Arial"/>
       </a:defRPr>
     </a:lvl7pPr>
-    <a:lvl8pPr lvl="7" marR="0" rtl="0" algn="l">
+    <a:lvl8pPr marR="0" lvl="7" algn="l" rtl="0">
       <a:lnSpc>
         <a:spcPct val="100000"/>
       </a:lnSpc>
@@ -229,7 +229,7 @@
         <a:srgbClr val="000000"/>
       </a:buClr>
       <a:buFont typeface="Arial"/>
-      <a:defRPr b="0" i="0" sz="1400" u="none" cap="none" strike="noStrike">
+      <a:defRPr sz="1400" b="0" i="0" u="none" strike="noStrike" cap="none">
         <a:solidFill>
           <a:srgbClr val="000000"/>
         </a:solidFill>
@@ -239,7 +239,7 @@
         <a:sym typeface="Arial"/>
       </a:defRPr>
     </a:lvl8pPr>
-    <a:lvl9pPr lvl="8" marR="0" rtl="0" algn="l">
+    <a:lvl9pPr marR="0" lvl="8" algn="l" rtl="0">
       <a:lnSpc>
         <a:spcPct val="100000"/>
       </a:lnSpc>
@@ -253,7 +253,7 @@
         <a:srgbClr val="000000"/>
       </a:buClr>
       <a:buFont typeface="Arial"/>
-      <a:defRPr b="0" i="0" sz="1400" u="none" cap="none" strike="noStrike">
+      <a:defRPr sz="1400" b="0" i="0" u="none" strike="noStrike" cap="none">
         <a:solidFill>
           <a:srgbClr val="000000"/>
         </a:solidFill>
@@ -266,7 +266,7 @@
   </p:defaultTextStyle>
   <p:extLst>
     <p:ext uri="{EFAFB233-063F-42B5-8137-9DF3F51BA10A}">
-      <p15:sldGuideLst>
+      <p15:sldGuideLst xmlns:p15="http://schemas.microsoft.com/office/powerpoint/2012/main">
         <p15:guide id="1" orient="horz" pos="1620">
           <p15:clr>
             <a:srgbClr val="747775"/>
@@ -284,11 +284,16 @@
 </file>
 
 <file path=ppt/notesMasters/notesMaster1.xml><?xml version="1.0" encoding="utf-8"?>
-<p:notesMaster xmlns:a="http://schemas.openxmlformats.org/drawingml/2006/main" xmlns:r="http://schemas.openxmlformats.org/officeDocument/2006/relationships" xmlns:mc="http://schemas.openxmlformats.org/markup-compatibility/2006" xmlns:mv="urn:schemas-microsoft-com:mac:vml" xmlns:p="http://schemas.openxmlformats.org/presentationml/2006/main" xmlns:c="http://schemas.openxmlformats.org/drawingml/2006/chart" xmlns:dgm="http://schemas.openxmlformats.org/drawingml/2006/diagram" xmlns:o="urn:schemas-microsoft-com:office:office" xmlns:v="urn:schemas-microsoft-com:vml" xmlns:pvml="urn:schemas-microsoft-com:office:powerpoint" xmlns:com="http://schemas.openxmlformats.org/drawingml/2006/compatibility" xmlns:p14="http://schemas.microsoft.com/office/powerpoint/2010/main" xmlns:p15="http://schemas.microsoft.com/office/powerpoint/2012/main" xmlns:ahyp="http://schemas.microsoft.com/office/drawing/2018/hyperlinkcolor">
+<p:notesMaster xmlns:a="http://schemas.openxmlformats.org/drawingml/2006/main" xmlns:r="http://schemas.openxmlformats.org/officeDocument/2006/relationships" xmlns:p="http://schemas.openxmlformats.org/presentationml/2006/main">
   <p:cSld>
+    <p:bg>
+      <p:bgRef idx="1001">
+        <a:schemeClr val="bg1"/>
+      </p:bgRef>
+    </p:bg>
     <p:spTree>
       <p:nvGrpSpPr>
-        <p:cNvPr id="2" name="Shape 2"/>
+        <p:cNvPr id="1" name="Shape 2"/>
         <p:cNvGrpSpPr/>
         <p:nvPr/>
       </p:nvGrpSpPr>
@@ -303,9 +308,11 @@
       <p:sp>
         <p:nvSpPr>
           <p:cNvPr id="3" name="Google Shape;3;n"/>
-          <p:cNvSpPr/>
+          <p:cNvSpPr>
+            <a:spLocks noGrp="1" noRot="1" noChangeAspect="1"/>
+          </p:cNvSpPr>
           <p:nvPr>
-            <p:ph idx="2" type="sldImg"/>
+            <p:ph type="sldImg" idx="2"/>
           </p:nvPr>
         </p:nvSpPr>
         <p:spPr>
@@ -314,9 +321,13 @@
             <a:ext cx="6096075" cy="3429000"/>
           </a:xfrm>
           <a:custGeom>
-            <a:rect b="b" l="l" r="r" t="t"/>
+            <a:avLst/>
+            <a:gdLst/>
+            <a:ahLst/>
+            <a:cxnLst/>
+            <a:rect l="l" t="t" r="r" b="b"/>
             <a:pathLst>
-              <a:path extrusionOk="0" h="120000" w="120000">
+              <a:path w="120000" h="120000" extrusionOk="0">
                 <a:moveTo>
                   <a:pt x="0" y="0"/>
                 </a:moveTo>
@@ -334,23 +345,25 @@
             </a:pathLst>
           </a:custGeom>
           <a:noFill/>
-          <a:ln cap="flat" cmpd="sng" w="9525">
+          <a:ln w="9525" cap="flat" cmpd="sng">
             <a:solidFill>
               <a:srgbClr val="000000"/>
             </a:solidFill>
             <a:prstDash val="solid"/>
             <a:round/>
-            <a:headEnd len="sm" w="sm" type="none"/>
-            <a:tailEnd len="sm" w="sm" type="none"/>
+            <a:headEnd type="none" w="sm" len="sm"/>
+            <a:tailEnd type="none" w="sm" len="sm"/>
           </a:ln>
         </p:spPr>
       </p:sp>
       <p:sp>
         <p:nvSpPr>
           <p:cNvPr id="4" name="Google Shape;4;n"/>
-          <p:cNvSpPr txBox="1"/>
+          <p:cNvSpPr txBox="1">
+            <a:spLocks noGrp="1"/>
+          </p:cNvSpPr>
           <p:nvPr>
-            <p:ph idx="1" type="body"/>
+            <p:ph type="body" idx="1"/>
           </p:nvPr>
         </p:nvSpPr>
         <p:spPr>
@@ -367,11 +380,11 @@
           </a:ln>
         </p:spPr>
         <p:txBody>
-          <a:bodyPr anchorCtr="0" anchor="t" bIns="91425" lIns="91425" spcFirstLastPara="1" rIns="91425" wrap="square" tIns="91425">
+          <a:bodyPr spcFirstLastPara="1" wrap="square" lIns="91425" tIns="91425" rIns="91425" bIns="91425" anchor="t" anchorCtr="0">
             <a:noAutofit/>
           </a:bodyPr>
           <a:lstStyle>
-            <a:lvl1pPr indent="-298450" lvl="0" marL="457200">
+            <a:lvl1pPr marL="457200" lvl="0" indent="-298450">
               <a:spcBef>
                 <a:spcPts val="0"/>
               </a:spcBef>
@@ -382,7 +395,7 @@
               <a:buChar char="●"/>
               <a:defRPr sz="1100"/>
             </a:lvl1pPr>
-            <a:lvl2pPr indent="-298450" lvl="1" marL="914400">
+            <a:lvl2pPr marL="914400" lvl="1" indent="-298450">
               <a:spcBef>
                 <a:spcPts val="0"/>
               </a:spcBef>
@@ -393,7 +406,7 @@
               <a:buChar char="○"/>
               <a:defRPr sz="1100"/>
             </a:lvl2pPr>
-            <a:lvl3pPr indent="-298450" lvl="2" marL="1371600">
+            <a:lvl3pPr marL="1371600" lvl="2" indent="-298450">
               <a:spcBef>
                 <a:spcPts val="0"/>
               </a:spcBef>
@@ -404,7 +417,7 @@
               <a:buChar char="■"/>
               <a:defRPr sz="1100"/>
             </a:lvl3pPr>
-            <a:lvl4pPr indent="-298450" lvl="3" marL="1828800">
+            <a:lvl4pPr marL="1828800" lvl="3" indent="-298450">
               <a:spcBef>
                 <a:spcPts val="0"/>
               </a:spcBef>
@@ -415,7 +428,7 @@
               <a:buChar char="●"/>
               <a:defRPr sz="1100"/>
             </a:lvl4pPr>
-            <a:lvl5pPr indent="-298450" lvl="4" marL="2286000">
+            <a:lvl5pPr marL="2286000" lvl="4" indent="-298450">
               <a:spcBef>
                 <a:spcPts val="0"/>
               </a:spcBef>
@@ -426,7 +439,7 @@
               <a:buChar char="○"/>
               <a:defRPr sz="1100"/>
             </a:lvl5pPr>
-            <a:lvl6pPr indent="-298450" lvl="5" marL="2743200">
+            <a:lvl6pPr marL="2743200" lvl="5" indent="-298450">
               <a:spcBef>
                 <a:spcPts val="0"/>
               </a:spcBef>
@@ -437,7 +450,7 @@
               <a:buChar char="■"/>
               <a:defRPr sz="1100"/>
             </a:lvl6pPr>
-            <a:lvl7pPr indent="-298450" lvl="6" marL="3200400">
+            <a:lvl7pPr marL="3200400" lvl="6" indent="-298450">
               <a:spcBef>
                 <a:spcPts val="0"/>
               </a:spcBef>
@@ -448,7 +461,7 @@
               <a:buChar char="●"/>
               <a:defRPr sz="1100"/>
             </a:lvl7pPr>
-            <a:lvl8pPr indent="-298450" lvl="7" marL="3657600">
+            <a:lvl8pPr marL="3657600" lvl="7" indent="-298450">
               <a:spcBef>
                 <a:spcPts val="0"/>
               </a:spcBef>
@@ -459,7 +472,7 @@
               <a:buChar char="○"/>
               <a:defRPr sz="1100"/>
             </a:lvl8pPr>
-            <a:lvl9pPr indent="-298450" lvl="8" marL="4114800">
+            <a:lvl9pPr marL="4114800" lvl="8" indent="-298450">
               <a:spcBef>
                 <a:spcPts val="0"/>
               </a:spcBef>
@@ -471,14 +484,16 @@
               <a:defRPr sz="1100"/>
             </a:lvl9pPr>
           </a:lstStyle>
-          <a:p/>
+          <a:p>
+            <a:endParaRPr/>
+          </a:p>
         </p:txBody>
       </p:sp>
     </p:spTree>
   </p:cSld>
-  <p:clrMap accent1="accent1" accent2="accent2" accent3="accent3" accent4="accent4" accent5="accent5" accent6="accent6" bg1="lt1" bg2="dk2" tx1="dk1" tx2="lt2" folHlink="folHlink" hlink="hlink"/>
+  <p:clrMap bg1="lt1" tx1="dk1" bg2="dk2" tx2="lt2" accent1="accent1" accent2="accent2" accent3="accent3" accent4="accent4" accent5="accent5" accent6="accent6" hlink="hlink" folHlink="folHlink"/>
   <p:notesStyle>
-    <a:defPPr lvl="0" marR="0" rtl="0" algn="l">
+    <a:defPPr marR="0" lvl="0" algn="l" rtl="0">
       <a:lnSpc>
         <a:spcPct val="100000"/>
       </a:lnSpc>
@@ -489,7 +504,7 @@
         <a:spcPts val="0"/>
       </a:spcAft>
     </a:defPPr>
-    <a:lvl1pPr lvl="0" marR="0" rtl="0" algn="l">
+    <a:lvl1pPr marR="0" lvl="0" algn="l" rtl="0">
       <a:lnSpc>
         <a:spcPct val="100000"/>
       </a:lnSpc>
@@ -503,7 +518,7 @@
         <a:srgbClr val="000000"/>
       </a:buClr>
       <a:buFont typeface="Arial"/>
-      <a:defRPr b="0" i="0" sz="1400" u="none" cap="none" strike="noStrike">
+      <a:defRPr sz="1400" b="0" i="0" u="none" strike="noStrike" cap="none">
         <a:solidFill>
           <a:srgbClr val="000000"/>
         </a:solidFill>
@@ -513,7 +528,7 @@
         <a:sym typeface="Arial"/>
       </a:defRPr>
     </a:lvl1pPr>
-    <a:lvl2pPr lvl="1" marR="0" rtl="0" algn="l">
+    <a:lvl2pPr marR="0" lvl="1" algn="l" rtl="0">
       <a:lnSpc>
         <a:spcPct val="100000"/>
       </a:lnSpc>
@@ -527,7 +542,7 @@
         <a:srgbClr val="000000"/>
       </a:buClr>
       <a:buFont typeface="Arial"/>
-      <a:defRPr b="0" i="0" sz="1400" u="none" cap="none" strike="noStrike">
+      <a:defRPr sz="1400" b="0" i="0" u="none" strike="noStrike" cap="none">
         <a:solidFill>
           <a:srgbClr val="000000"/>
         </a:solidFill>
@@ -537,7 +552,7 @@
         <a:sym typeface="Arial"/>
       </a:defRPr>
     </a:lvl2pPr>
-    <a:lvl3pPr lvl="2" marR="0" rtl="0" algn="l">
+    <a:lvl3pPr marR="0" lvl="2" algn="l" rtl="0">
       <a:lnSpc>
         <a:spcPct val="100000"/>
       </a:lnSpc>
@@ -551,7 +566,7 @@
         <a:srgbClr val="000000"/>
       </a:buClr>
       <a:buFont typeface="Arial"/>
-      <a:defRPr b="0" i="0" sz="1400" u="none" cap="none" strike="noStrike">
+      <a:defRPr sz="1400" b="0" i="0" u="none" strike="noStrike" cap="none">
         <a:solidFill>
           <a:srgbClr val="000000"/>
         </a:solidFill>
@@ -561,7 +576,7 @@
         <a:sym typeface="Arial"/>
       </a:defRPr>
     </a:lvl3pPr>
-    <a:lvl4pPr lvl="3" marR="0" rtl="0" algn="l">
+    <a:lvl4pPr marR="0" lvl="3" algn="l" rtl="0">
       <a:lnSpc>
         <a:spcPct val="100000"/>
       </a:lnSpc>
@@ -575,7 +590,7 @@
         <a:srgbClr val="000000"/>
       </a:buClr>
       <a:buFont typeface="Arial"/>
-      <a:defRPr b="0" i="0" sz="1400" u="none" cap="none" strike="noStrike">
+      <a:defRPr sz="1400" b="0" i="0" u="none" strike="noStrike" cap="none">
         <a:solidFill>
           <a:srgbClr val="000000"/>
         </a:solidFill>
@@ -585,7 +600,7 @@
         <a:sym typeface="Arial"/>
       </a:defRPr>
     </a:lvl4pPr>
-    <a:lvl5pPr lvl="4" marR="0" rtl="0" algn="l">
+    <a:lvl5pPr marR="0" lvl="4" algn="l" rtl="0">
       <a:lnSpc>
         <a:spcPct val="100000"/>
       </a:lnSpc>
@@ -599,7 +614,7 @@
         <a:srgbClr val="000000"/>
       </a:buClr>
       <a:buFont typeface="Arial"/>
-      <a:defRPr b="0" i="0" sz="1400" u="none" cap="none" strike="noStrike">
+      <a:defRPr sz="1400" b="0" i="0" u="none" strike="noStrike" cap="none">
         <a:solidFill>
           <a:srgbClr val="000000"/>
         </a:solidFill>
@@ -609,7 +624,7 @@
         <a:sym typeface="Arial"/>
       </a:defRPr>
     </a:lvl5pPr>
-    <a:lvl6pPr lvl="5" marR="0" rtl="0" algn="l">
+    <a:lvl6pPr marR="0" lvl="5" algn="l" rtl="0">
       <a:lnSpc>
         <a:spcPct val="100000"/>
       </a:lnSpc>
@@ -623,7 +638,7 @@
         <a:srgbClr val="000000"/>
       </a:buClr>
       <a:buFont typeface="Arial"/>
-      <a:defRPr b="0" i="0" sz="1400" u="none" cap="none" strike="noStrike">
+      <a:defRPr sz="1400" b="0" i="0" u="none" strike="noStrike" cap="none">
         <a:solidFill>
           <a:srgbClr val="000000"/>
         </a:solidFill>
@@ -633,7 +648,7 @@
         <a:sym typeface="Arial"/>
       </a:defRPr>
     </a:lvl6pPr>
-    <a:lvl7pPr lvl="6" marR="0" rtl="0" algn="l">
+    <a:lvl7pPr marR="0" lvl="6" algn="l" rtl="0">
       <a:lnSpc>
         <a:spcPct val="100000"/>
       </a:lnSpc>
@@ -647,7 +662,7 @@
         <a:srgbClr val="000000"/>
       </a:buClr>
       <a:buFont typeface="Arial"/>
-      <a:defRPr b="0" i="0" sz="1400" u="none" cap="none" strike="noStrike">
+      <a:defRPr sz="1400" b="0" i="0" u="none" strike="noStrike" cap="none">
         <a:solidFill>
           <a:srgbClr val="000000"/>
         </a:solidFill>
@@ -657,7 +672,7 @@
         <a:sym typeface="Arial"/>
       </a:defRPr>
     </a:lvl7pPr>
-    <a:lvl8pPr lvl="7" marR="0" rtl="0" algn="l">
+    <a:lvl8pPr marR="0" lvl="7" algn="l" rtl="0">
       <a:lnSpc>
         <a:spcPct val="100000"/>
       </a:lnSpc>
@@ -671,7 +686,7 @@
         <a:srgbClr val="000000"/>
       </a:buClr>
       <a:buFont typeface="Arial"/>
-      <a:defRPr b="0" i="0" sz="1400" u="none" cap="none" strike="noStrike">
+      <a:defRPr sz="1400" b="0" i="0" u="none" strike="noStrike" cap="none">
         <a:solidFill>
           <a:srgbClr val="000000"/>
         </a:solidFill>
@@ -681,7 +696,7 @@
         <a:sym typeface="Arial"/>
       </a:defRPr>
     </a:lvl8pPr>
-    <a:lvl9pPr lvl="8" marR="0" rtl="0" algn="l">
+    <a:lvl9pPr marR="0" lvl="8" algn="l" rtl="0">
       <a:lnSpc>
         <a:spcPct val="100000"/>
       </a:lnSpc>
@@ -695,7 +710,7 @@
         <a:srgbClr val="000000"/>
       </a:buClr>
       <a:buFont typeface="Arial"/>
-      <a:defRPr b="0" i="0" sz="1400" u="none" cap="none" strike="noStrike">
+      <a:defRPr sz="1400" b="0" i="0" u="none" strike="noStrike" cap="none">
         <a:solidFill>
           <a:srgbClr val="000000"/>
         </a:solidFill>
@@ -710,11 +725,11 @@
 </file>
 
 <file path=ppt/notesSlides/notesSlide1.xml><?xml version="1.0" encoding="utf-8"?>
-<p:notes xmlns:a="http://schemas.openxmlformats.org/drawingml/2006/main" xmlns:r="http://schemas.openxmlformats.org/officeDocument/2006/relationships" xmlns:mc="http://schemas.openxmlformats.org/markup-compatibility/2006" xmlns:mv="urn:schemas-microsoft-com:mac:vml" xmlns:p="http://schemas.openxmlformats.org/presentationml/2006/main" xmlns:c="http://schemas.openxmlformats.org/drawingml/2006/chart" xmlns:dgm="http://schemas.openxmlformats.org/drawingml/2006/diagram" xmlns:o="urn:schemas-microsoft-com:office:office" xmlns:v="urn:schemas-microsoft-com:vml" xmlns:pvml="urn:schemas-microsoft-com:office:powerpoint" xmlns:com="http://schemas.openxmlformats.org/drawingml/2006/compatibility" xmlns:p14="http://schemas.microsoft.com/office/powerpoint/2010/main" xmlns:p15="http://schemas.microsoft.com/office/powerpoint/2012/main" xmlns:ahyp="http://schemas.microsoft.com/office/drawing/2018/hyperlinkcolor" showMasterPhAnim="0" showMasterSp="0">
+<p:notes xmlns:a="http://schemas.openxmlformats.org/drawingml/2006/main" xmlns:r="http://schemas.openxmlformats.org/officeDocument/2006/relationships" xmlns:p="http://schemas.openxmlformats.org/presentationml/2006/main" showMasterSp="0" showMasterPhAnim="0">
   <p:cSld>
     <p:spTree>
       <p:nvGrpSpPr>
-        <p:cNvPr id="58" name="Shape 58"/>
+        <p:cNvPr id="1" name="Shape 58"/>
         <p:cNvGrpSpPr/>
         <p:nvPr/>
       </p:nvGrpSpPr>
@@ -729,9 +744,11 @@
       <p:sp>
         <p:nvSpPr>
           <p:cNvPr id="59" name="Google Shape;59;p:notes"/>
-          <p:cNvSpPr/>
+          <p:cNvSpPr>
+            <a:spLocks noGrp="1" noRot="1" noChangeAspect="1"/>
+          </p:cNvSpPr>
           <p:nvPr>
-            <p:ph idx="2" type="sldImg"/>
+            <p:ph type="sldImg" idx="2"/>
           </p:nvPr>
         </p:nvSpPr>
         <p:spPr>
@@ -740,9 +757,13 @@
             <a:ext cx="6096075" cy="3429000"/>
           </a:xfrm>
           <a:custGeom>
-            <a:rect b="b" l="l" r="r" t="t"/>
+            <a:avLst/>
+            <a:gdLst/>
+            <a:ahLst/>
+            <a:cxnLst/>
+            <a:rect l="l" t="t" r="r" b="b"/>
             <a:pathLst>
-              <a:path extrusionOk="0" h="120000" w="120000">
+              <a:path w="120000" h="120000" extrusionOk="0">
                 <a:moveTo>
                   <a:pt x="0" y="0"/>
                 </a:moveTo>
@@ -764,9 +785,11 @@
       <p:sp>
         <p:nvSpPr>
           <p:cNvPr id="60" name="Google Shape;60;p:notes"/>
-          <p:cNvSpPr txBox="1"/>
+          <p:cNvSpPr txBox="1">
+            <a:spLocks noGrp="1"/>
+          </p:cNvSpPr>
           <p:nvPr>
-            <p:ph idx="1" type="body"/>
+            <p:ph type="body" idx="1"/>
           </p:nvPr>
         </p:nvSpPr>
         <p:spPr>
@@ -779,12 +802,12 @@
           </a:prstGeom>
         </p:spPr>
         <p:txBody>
-          <a:bodyPr anchorCtr="0" anchor="t" bIns="91425" lIns="91425" spcFirstLastPara="1" rIns="91425" wrap="square" tIns="91425">
+          <a:bodyPr spcFirstLastPara="1" wrap="square" lIns="91425" tIns="91425" rIns="91425" bIns="91425" anchor="t" anchorCtr="0">
             <a:noAutofit/>
           </a:bodyPr>
           <a:lstStyle/>
           <a:p>
-            <a:pPr indent="0" lvl="0" marL="0" rtl="0" algn="l">
+            <a:pPr marL="0" lvl="0" indent="0" algn="l" rtl="0">
               <a:spcBef>
                 <a:spcPts val="0"/>
               </a:spcBef>
@@ -793,9 +816,6 @@
               </a:spcAft>
               <a:buNone/>
             </a:pPr>
-            <a:r>
-              <a:t/>
-            </a:r>
             <a:endParaRPr/>
           </a:p>
         </p:txBody>
@@ -809,11 +829,11 @@
 </file>
 
 <file path=ppt/notesSlides/notesSlide2.xml><?xml version="1.0" encoding="utf-8"?>
-<p:notes xmlns:a="http://schemas.openxmlformats.org/drawingml/2006/main" xmlns:r="http://schemas.openxmlformats.org/officeDocument/2006/relationships" xmlns:mc="http://schemas.openxmlformats.org/markup-compatibility/2006" xmlns:mv="urn:schemas-microsoft-com:mac:vml" xmlns:p="http://schemas.openxmlformats.org/presentationml/2006/main" xmlns:c="http://schemas.openxmlformats.org/drawingml/2006/chart" xmlns:dgm="http://schemas.openxmlformats.org/drawingml/2006/diagram" xmlns:o="urn:schemas-microsoft-com:office:office" xmlns:v="urn:schemas-microsoft-com:vml" xmlns:pvml="urn:schemas-microsoft-com:office:powerpoint" xmlns:com="http://schemas.openxmlformats.org/drawingml/2006/compatibility" xmlns:p14="http://schemas.microsoft.com/office/powerpoint/2010/main" xmlns:p15="http://schemas.microsoft.com/office/powerpoint/2012/main" xmlns:ahyp="http://schemas.microsoft.com/office/drawing/2018/hyperlinkcolor" showMasterPhAnim="0" showMasterSp="0">
+<p:notes xmlns:a="http://schemas.openxmlformats.org/drawingml/2006/main" xmlns:r="http://schemas.openxmlformats.org/officeDocument/2006/relationships" xmlns:p="http://schemas.openxmlformats.org/presentationml/2006/main" showMasterSp="0" showMasterPhAnim="0">
   <p:cSld>
     <p:spTree>
       <p:nvGrpSpPr>
-        <p:cNvPr id="66" name="Shape 66"/>
+        <p:cNvPr id="1" name="Shape 66"/>
         <p:cNvGrpSpPr/>
         <p:nvPr/>
       </p:nvGrpSpPr>
@@ -828,9 +848,11 @@
       <p:sp>
         <p:nvSpPr>
           <p:cNvPr id="67" name="Google Shape;67;g3dbbc547d7c_2_0:notes"/>
-          <p:cNvSpPr/>
+          <p:cNvSpPr>
+            <a:spLocks noGrp="1" noRot="1" noChangeAspect="1"/>
+          </p:cNvSpPr>
           <p:nvPr>
-            <p:ph idx="2" type="sldImg"/>
+            <p:ph type="sldImg" idx="2"/>
           </p:nvPr>
         </p:nvSpPr>
         <p:spPr>
@@ -839,9 +861,13 @@
             <a:ext cx="6096000" cy="3429000"/>
           </a:xfrm>
           <a:custGeom>
-            <a:rect b="b" l="l" r="r" t="t"/>
+            <a:avLst/>
+            <a:gdLst/>
+            <a:ahLst/>
+            <a:cxnLst/>
+            <a:rect l="l" t="t" r="r" b="b"/>
             <a:pathLst>
-              <a:path extrusionOk="0" h="120000" w="120000">
+              <a:path w="120000" h="120000" extrusionOk="0">
                 <a:moveTo>
                   <a:pt x="0" y="0"/>
                 </a:moveTo>
@@ -863,9 +889,11 @@
       <p:sp>
         <p:nvSpPr>
           <p:cNvPr id="68" name="Google Shape;68;g3dbbc547d7c_2_0:notes"/>
-          <p:cNvSpPr txBox="1"/>
+          <p:cNvSpPr txBox="1">
+            <a:spLocks noGrp="1"/>
+          </p:cNvSpPr>
           <p:nvPr>
-            <p:ph idx="1" type="body"/>
+            <p:ph type="body" idx="1"/>
           </p:nvPr>
         </p:nvSpPr>
         <p:spPr>
@@ -878,12 +906,12 @@
           </a:prstGeom>
         </p:spPr>
         <p:txBody>
-          <a:bodyPr anchorCtr="0" anchor="t" bIns="91425" lIns="91425" spcFirstLastPara="1" rIns="91425" wrap="square" tIns="91425">
+          <a:bodyPr spcFirstLastPara="1" wrap="square" lIns="91425" tIns="91425" rIns="91425" bIns="91425" anchor="t" anchorCtr="0">
             <a:noAutofit/>
           </a:bodyPr>
           <a:lstStyle/>
           <a:p>
-            <a:pPr indent="0" lvl="0" marL="0" rtl="0" algn="l">
+            <a:pPr marL="0" lvl="0" indent="0" algn="l" rtl="0">
               <a:spcBef>
                 <a:spcPts val="0"/>
               </a:spcBef>
@@ -892,9 +920,6 @@
               </a:spcAft>
               <a:buNone/>
             </a:pPr>
-            <a:r>
-              <a:t/>
-            </a:r>
             <a:endParaRPr/>
           </a:p>
         </p:txBody>
@@ -908,11 +933,11 @@
 </file>
 
 <file path=ppt/notesSlides/notesSlide3.xml><?xml version="1.0" encoding="utf-8"?>
-<p:notes xmlns:a="http://schemas.openxmlformats.org/drawingml/2006/main" xmlns:r="http://schemas.openxmlformats.org/officeDocument/2006/relationships" xmlns:mc="http://schemas.openxmlformats.org/markup-compatibility/2006" xmlns:mv="urn:schemas-microsoft-com:mac:vml" xmlns:p="http://schemas.openxmlformats.org/presentationml/2006/main" xmlns:c="http://schemas.openxmlformats.org/drawingml/2006/chart" xmlns:dgm="http://schemas.openxmlformats.org/drawingml/2006/diagram" xmlns:o="urn:schemas-microsoft-com:office:office" xmlns:v="urn:schemas-microsoft-com:vml" xmlns:pvml="urn:schemas-microsoft-com:office:powerpoint" xmlns:com="http://schemas.openxmlformats.org/drawingml/2006/compatibility" xmlns:p14="http://schemas.microsoft.com/office/powerpoint/2010/main" xmlns:p15="http://schemas.microsoft.com/office/powerpoint/2012/main" xmlns:ahyp="http://schemas.microsoft.com/office/drawing/2018/hyperlinkcolor" showMasterPhAnim="0" showMasterSp="0">
+<p:notes xmlns:a="http://schemas.openxmlformats.org/drawingml/2006/main" xmlns:r="http://schemas.openxmlformats.org/officeDocument/2006/relationships" xmlns:p="http://schemas.openxmlformats.org/presentationml/2006/main" showMasterSp="0" showMasterPhAnim="0">
   <p:cSld>
     <p:spTree>
       <p:nvGrpSpPr>
-        <p:cNvPr id="78" name="Shape 78"/>
+        <p:cNvPr id="1" name="Shape 78"/>
         <p:cNvGrpSpPr/>
         <p:nvPr/>
       </p:nvGrpSpPr>
@@ -927,9 +952,11 @@
       <p:sp>
         <p:nvSpPr>
           <p:cNvPr id="79" name="Google Shape;79;g3dbbc547d7c_2_5:notes"/>
-          <p:cNvSpPr/>
+          <p:cNvSpPr>
+            <a:spLocks noGrp="1" noRot="1" noChangeAspect="1"/>
+          </p:cNvSpPr>
           <p:nvPr>
-            <p:ph idx="2" type="sldImg"/>
+            <p:ph type="sldImg" idx="2"/>
           </p:nvPr>
         </p:nvSpPr>
         <p:spPr>
@@ -938,9 +965,13 @@
             <a:ext cx="6096000" cy="3429000"/>
           </a:xfrm>
           <a:custGeom>
-            <a:rect b="b" l="l" r="r" t="t"/>
+            <a:avLst/>
+            <a:gdLst/>
+            <a:ahLst/>
+            <a:cxnLst/>
+            <a:rect l="l" t="t" r="r" b="b"/>
             <a:pathLst>
-              <a:path extrusionOk="0" h="120000" w="120000">
+              <a:path w="120000" h="120000" extrusionOk="0">
                 <a:moveTo>
                   <a:pt x="0" y="0"/>
                 </a:moveTo>
@@ -962,9 +993,11 @@
       <p:sp>
         <p:nvSpPr>
           <p:cNvPr id="80" name="Google Shape;80;g3dbbc547d7c_2_5:notes"/>
-          <p:cNvSpPr txBox="1"/>
+          <p:cNvSpPr txBox="1">
+            <a:spLocks noGrp="1"/>
+          </p:cNvSpPr>
           <p:nvPr>
-            <p:ph idx="1" type="body"/>
+            <p:ph type="body" idx="1"/>
           </p:nvPr>
         </p:nvSpPr>
         <p:spPr>
@@ -977,12 +1010,12 @@
           </a:prstGeom>
         </p:spPr>
         <p:txBody>
-          <a:bodyPr anchorCtr="0" anchor="t" bIns="91425" lIns="91425" spcFirstLastPara="1" rIns="91425" wrap="square" tIns="91425">
+          <a:bodyPr spcFirstLastPara="1" wrap="square" lIns="91425" tIns="91425" rIns="91425" bIns="91425" anchor="t" anchorCtr="0">
             <a:noAutofit/>
           </a:bodyPr>
           <a:lstStyle/>
           <a:p>
-            <a:pPr indent="0" lvl="0" marL="0" rtl="0" algn="l">
+            <a:pPr marL="0" lvl="0" indent="0" algn="l" rtl="0">
               <a:spcBef>
                 <a:spcPts val="0"/>
               </a:spcBef>
@@ -991,9 +1024,6 @@
               </a:spcAft>
               <a:buNone/>
             </a:pPr>
-            <a:r>
-              <a:t/>
-            </a:r>
             <a:endParaRPr/>
           </a:p>
         </p:txBody>
@@ -1007,11 +1037,11 @@
 </file>
 
 <file path=ppt/notesSlides/notesSlide4.xml><?xml version="1.0" encoding="utf-8"?>
-<p:notes xmlns:a="http://schemas.openxmlformats.org/drawingml/2006/main" xmlns:r="http://schemas.openxmlformats.org/officeDocument/2006/relationships" xmlns:mc="http://schemas.openxmlformats.org/markup-compatibility/2006" xmlns:mv="urn:schemas-microsoft-com:mac:vml" xmlns:p="http://schemas.openxmlformats.org/presentationml/2006/main" xmlns:c="http://schemas.openxmlformats.org/drawingml/2006/chart" xmlns:dgm="http://schemas.openxmlformats.org/drawingml/2006/diagram" xmlns:o="urn:schemas-microsoft-com:office:office" xmlns:v="urn:schemas-microsoft-com:vml" xmlns:pvml="urn:schemas-microsoft-com:office:powerpoint" xmlns:com="http://schemas.openxmlformats.org/drawingml/2006/compatibility" xmlns:p14="http://schemas.microsoft.com/office/powerpoint/2010/main" xmlns:p15="http://schemas.microsoft.com/office/powerpoint/2012/main" xmlns:ahyp="http://schemas.microsoft.com/office/drawing/2018/hyperlinkcolor" showMasterPhAnim="0" showMasterSp="0">
+<p:notes xmlns:a="http://schemas.openxmlformats.org/drawingml/2006/main" xmlns:r="http://schemas.openxmlformats.org/officeDocument/2006/relationships" xmlns:p="http://schemas.openxmlformats.org/presentationml/2006/main" showMasterSp="0" showMasterPhAnim="0">
   <p:cSld>
     <p:spTree>
       <p:nvGrpSpPr>
-        <p:cNvPr id="89" name="Shape 89"/>
+        <p:cNvPr id="1" name="Shape 89"/>
         <p:cNvGrpSpPr/>
         <p:nvPr/>
       </p:nvGrpSpPr>
@@ -1026,9 +1056,11 @@
       <p:sp>
         <p:nvSpPr>
           <p:cNvPr id="90" name="Google Shape;90;g3dbbc547d7c_2_10:notes"/>
-          <p:cNvSpPr/>
+          <p:cNvSpPr>
+            <a:spLocks noGrp="1" noRot="1" noChangeAspect="1"/>
+          </p:cNvSpPr>
           <p:nvPr>
-            <p:ph idx="2" type="sldImg"/>
+            <p:ph type="sldImg" idx="2"/>
           </p:nvPr>
         </p:nvSpPr>
         <p:spPr>
@@ -1037,9 +1069,13 @@
             <a:ext cx="6096000" cy="3429000"/>
           </a:xfrm>
           <a:custGeom>
-            <a:rect b="b" l="l" r="r" t="t"/>
+            <a:avLst/>
+            <a:gdLst/>
+            <a:ahLst/>
+            <a:cxnLst/>
+            <a:rect l="l" t="t" r="r" b="b"/>
             <a:pathLst>
-              <a:path extrusionOk="0" h="120000" w="120000">
+              <a:path w="120000" h="120000" extrusionOk="0">
                 <a:moveTo>
                   <a:pt x="0" y="0"/>
                 </a:moveTo>
@@ -1061,9 +1097,11 @@
       <p:sp>
         <p:nvSpPr>
           <p:cNvPr id="91" name="Google Shape;91;g3dbbc547d7c_2_10:notes"/>
-          <p:cNvSpPr txBox="1"/>
+          <p:cNvSpPr txBox="1">
+            <a:spLocks noGrp="1"/>
+          </p:cNvSpPr>
           <p:nvPr>
-            <p:ph idx="1" type="body"/>
+            <p:ph type="body" idx="1"/>
           </p:nvPr>
         </p:nvSpPr>
         <p:spPr>
@@ -1076,12 +1114,12 @@
           </a:prstGeom>
         </p:spPr>
         <p:txBody>
-          <a:bodyPr anchorCtr="0" anchor="t" bIns="91425" lIns="91425" spcFirstLastPara="1" rIns="91425" wrap="square" tIns="91425">
+          <a:bodyPr spcFirstLastPara="1" wrap="square" lIns="91425" tIns="91425" rIns="91425" bIns="91425" anchor="t" anchorCtr="0">
             <a:noAutofit/>
           </a:bodyPr>
           <a:lstStyle/>
           <a:p>
-            <a:pPr indent="0" lvl="0" marL="0" rtl="0" algn="l">
+            <a:pPr marL="0" lvl="0" indent="0" algn="l" rtl="0">
               <a:spcBef>
                 <a:spcPts val="0"/>
               </a:spcBef>
@@ -1090,9 +1128,6 @@
               </a:spcAft>
               <a:buNone/>
             </a:pPr>
-            <a:r>
-              <a:t/>
-            </a:r>
             <a:endParaRPr/>
           </a:p>
         </p:txBody>
@@ -1106,11 +1141,11 @@
 </file>
 
 <file path=ppt/notesSlides/notesSlide5.xml><?xml version="1.0" encoding="utf-8"?>
-<p:notes xmlns:a="http://schemas.openxmlformats.org/drawingml/2006/main" xmlns:r="http://schemas.openxmlformats.org/officeDocument/2006/relationships" xmlns:mc="http://schemas.openxmlformats.org/markup-compatibility/2006" xmlns:mv="urn:schemas-microsoft-com:mac:vml" xmlns:p="http://schemas.openxmlformats.org/presentationml/2006/main" xmlns:c="http://schemas.openxmlformats.org/drawingml/2006/chart" xmlns:dgm="http://schemas.openxmlformats.org/drawingml/2006/diagram" xmlns:o="urn:schemas-microsoft-com:office:office" xmlns:v="urn:schemas-microsoft-com:vml" xmlns:pvml="urn:schemas-microsoft-com:office:powerpoint" xmlns:com="http://schemas.openxmlformats.org/drawingml/2006/compatibility" xmlns:p14="http://schemas.microsoft.com/office/powerpoint/2010/main" xmlns:p15="http://schemas.microsoft.com/office/powerpoint/2012/main" xmlns:ahyp="http://schemas.microsoft.com/office/drawing/2018/hyperlinkcolor" showMasterPhAnim="0" showMasterSp="0">
+<p:notes xmlns:a="http://schemas.openxmlformats.org/drawingml/2006/main" xmlns:r="http://schemas.openxmlformats.org/officeDocument/2006/relationships" xmlns:p="http://schemas.openxmlformats.org/presentationml/2006/main" showMasterSp="0" showMasterPhAnim="0">
   <p:cSld>
     <p:spTree>
       <p:nvGrpSpPr>
-        <p:cNvPr id="98" name="Shape 98"/>
+        <p:cNvPr id="1" name="Shape 98"/>
         <p:cNvGrpSpPr/>
         <p:nvPr/>
       </p:nvGrpSpPr>
@@ -1125,20 +1160,26 @@
       <p:sp>
         <p:nvSpPr>
           <p:cNvPr id="99" name="Google Shape;99;g3dbbc547d7c_2_15:notes"/>
-          <p:cNvSpPr/>
+          <p:cNvSpPr>
+            <a:spLocks noGrp="1" noRot="1" noChangeAspect="1"/>
+          </p:cNvSpPr>
           <p:nvPr>
-            <p:ph idx="2" type="sldImg"/>
+            <p:ph type="sldImg" idx="2"/>
           </p:nvPr>
         </p:nvSpPr>
         <p:spPr>
           <a:xfrm>
-            <a:off x="381300" y="685800"/>
+            <a:off x="381000" y="685800"/>
             <a:ext cx="6096000" cy="3429000"/>
           </a:xfrm>
           <a:custGeom>
-            <a:rect b="b" l="l" r="r" t="t"/>
+            <a:avLst/>
+            <a:gdLst/>
+            <a:ahLst/>
+            <a:cxnLst/>
+            <a:rect l="l" t="t" r="r" b="b"/>
             <a:pathLst>
-              <a:path extrusionOk="0" h="120000" w="120000">
+              <a:path w="120000" h="120000" extrusionOk="0">
                 <a:moveTo>
                   <a:pt x="0" y="0"/>
                 </a:moveTo>
@@ -1160,9 +1201,11 @@
       <p:sp>
         <p:nvSpPr>
           <p:cNvPr id="100" name="Google Shape;100;g3dbbc547d7c_2_15:notes"/>
-          <p:cNvSpPr txBox="1"/>
+          <p:cNvSpPr txBox="1">
+            <a:spLocks noGrp="1"/>
+          </p:cNvSpPr>
           <p:nvPr>
-            <p:ph idx="1" type="body"/>
+            <p:ph type="body" idx="1"/>
           </p:nvPr>
         </p:nvSpPr>
         <p:spPr>
@@ -1175,12 +1218,12 @@
           </a:prstGeom>
         </p:spPr>
         <p:txBody>
-          <a:bodyPr anchorCtr="0" anchor="t" bIns="91425" lIns="91425" spcFirstLastPara="1" rIns="91425" wrap="square" tIns="91425">
+          <a:bodyPr spcFirstLastPara="1" wrap="square" lIns="91425" tIns="91425" rIns="91425" bIns="91425" anchor="t" anchorCtr="0">
             <a:noAutofit/>
           </a:bodyPr>
           <a:lstStyle/>
           <a:p>
-            <a:pPr indent="0" lvl="0" marL="0" rtl="0" algn="l">
+            <a:pPr marL="0" lvl="0" indent="0" algn="l" rtl="0">
               <a:spcBef>
                 <a:spcPts val="0"/>
               </a:spcBef>
@@ -1189,9 +1232,6 @@
               </a:spcAft>
               <a:buNone/>
             </a:pPr>
-            <a:r>
-              <a:t/>
-            </a:r>
             <a:endParaRPr/>
           </a:p>
         </p:txBody>
@@ -1205,11 +1245,11 @@
 </file>
 
 <file path=ppt/notesSlides/notesSlide6.xml><?xml version="1.0" encoding="utf-8"?>
-<p:notes xmlns:a="http://schemas.openxmlformats.org/drawingml/2006/main" xmlns:r="http://schemas.openxmlformats.org/officeDocument/2006/relationships" xmlns:mc="http://schemas.openxmlformats.org/markup-compatibility/2006" xmlns:mv="urn:schemas-microsoft-com:mac:vml" xmlns:p="http://schemas.openxmlformats.org/presentationml/2006/main" xmlns:c="http://schemas.openxmlformats.org/drawingml/2006/chart" xmlns:dgm="http://schemas.openxmlformats.org/drawingml/2006/diagram" xmlns:o="urn:schemas-microsoft-com:office:office" xmlns:v="urn:schemas-microsoft-com:vml" xmlns:pvml="urn:schemas-microsoft-com:office:powerpoint" xmlns:com="http://schemas.openxmlformats.org/drawingml/2006/compatibility" xmlns:p14="http://schemas.microsoft.com/office/powerpoint/2010/main" xmlns:p15="http://schemas.microsoft.com/office/powerpoint/2012/main" xmlns:ahyp="http://schemas.microsoft.com/office/drawing/2018/hyperlinkcolor" showMasterPhAnim="0" showMasterSp="0">
+<p:notes xmlns:a="http://schemas.openxmlformats.org/drawingml/2006/main" xmlns:r="http://schemas.openxmlformats.org/officeDocument/2006/relationships" xmlns:p="http://schemas.openxmlformats.org/presentationml/2006/main" showMasterSp="0" showMasterPhAnim="0">
   <p:cSld>
     <p:spTree>
       <p:nvGrpSpPr>
-        <p:cNvPr id="106" name="Shape 106"/>
+        <p:cNvPr id="1" name="Shape 106"/>
         <p:cNvGrpSpPr/>
         <p:nvPr/>
       </p:nvGrpSpPr>
@@ -1224,20 +1264,26 @@
       <p:sp>
         <p:nvSpPr>
           <p:cNvPr id="107" name="Google Shape;107;g3dbbc547d7c_0_32:notes"/>
-          <p:cNvSpPr/>
+          <p:cNvSpPr>
+            <a:spLocks noGrp="1" noRot="1" noChangeAspect="1"/>
+          </p:cNvSpPr>
           <p:nvPr>
-            <p:ph idx="2" type="sldImg"/>
+            <p:ph type="sldImg" idx="2"/>
           </p:nvPr>
         </p:nvSpPr>
         <p:spPr>
           <a:xfrm>
-            <a:off x="381300" y="685800"/>
+            <a:off x="381000" y="685800"/>
             <a:ext cx="6096000" cy="3429000"/>
           </a:xfrm>
           <a:custGeom>
-            <a:rect b="b" l="l" r="r" t="t"/>
+            <a:avLst/>
+            <a:gdLst/>
+            <a:ahLst/>
+            <a:cxnLst/>
+            <a:rect l="l" t="t" r="r" b="b"/>
             <a:pathLst>
-              <a:path extrusionOk="0" h="120000" w="120000">
+              <a:path w="120000" h="120000" extrusionOk="0">
                 <a:moveTo>
                   <a:pt x="0" y="0"/>
                 </a:moveTo>
@@ -1259,9 +1305,11 @@
       <p:sp>
         <p:nvSpPr>
           <p:cNvPr id="108" name="Google Shape;108;g3dbbc547d7c_0_32:notes"/>
-          <p:cNvSpPr txBox="1"/>
+          <p:cNvSpPr txBox="1">
+            <a:spLocks noGrp="1"/>
+          </p:cNvSpPr>
           <p:nvPr>
-            <p:ph idx="1" type="body"/>
+            <p:ph type="body" idx="1"/>
           </p:nvPr>
         </p:nvSpPr>
         <p:spPr>
@@ -1274,12 +1322,12 @@
           </a:prstGeom>
         </p:spPr>
         <p:txBody>
-          <a:bodyPr anchorCtr="0" anchor="t" bIns="91425" lIns="91425" spcFirstLastPara="1" rIns="91425" wrap="square" tIns="91425">
+          <a:bodyPr spcFirstLastPara="1" wrap="square" lIns="91425" tIns="91425" rIns="91425" bIns="91425" anchor="t" anchorCtr="0">
             <a:noAutofit/>
           </a:bodyPr>
           <a:lstStyle/>
           <a:p>
-            <a:pPr indent="0" lvl="0" marL="0" rtl="0" algn="l">
+            <a:pPr marL="0" lvl="0" indent="0" algn="l" rtl="0">
               <a:spcBef>
                 <a:spcPts val="0"/>
               </a:spcBef>
@@ -1288,9 +1336,6 @@
               </a:spcAft>
               <a:buNone/>
             </a:pPr>
-            <a:r>
-              <a:t/>
-            </a:r>
             <a:endParaRPr/>
           </a:p>
         </p:txBody>
@@ -1304,11 +1349,11 @@
 </file>
 
 <file path=ppt/notesSlides/notesSlide7.xml><?xml version="1.0" encoding="utf-8"?>
-<p:notes xmlns:a="http://schemas.openxmlformats.org/drawingml/2006/main" xmlns:r="http://schemas.openxmlformats.org/officeDocument/2006/relationships" xmlns:mc="http://schemas.openxmlformats.org/markup-compatibility/2006" xmlns:mv="urn:schemas-microsoft-com:mac:vml" xmlns:p="http://schemas.openxmlformats.org/presentationml/2006/main" xmlns:c="http://schemas.openxmlformats.org/drawingml/2006/chart" xmlns:dgm="http://schemas.openxmlformats.org/drawingml/2006/diagram" xmlns:o="urn:schemas-microsoft-com:office:office" xmlns:v="urn:schemas-microsoft-com:vml" xmlns:pvml="urn:schemas-microsoft-com:office:powerpoint" xmlns:com="http://schemas.openxmlformats.org/drawingml/2006/compatibility" xmlns:p14="http://schemas.microsoft.com/office/powerpoint/2010/main" xmlns:p15="http://schemas.microsoft.com/office/powerpoint/2012/main" xmlns:ahyp="http://schemas.microsoft.com/office/drawing/2018/hyperlinkcolor" showMasterPhAnim="0" showMasterSp="0">
+<p:notes xmlns:a="http://schemas.openxmlformats.org/drawingml/2006/main" xmlns:r="http://schemas.openxmlformats.org/officeDocument/2006/relationships" xmlns:p="http://schemas.openxmlformats.org/presentationml/2006/main" showMasterSp="0" showMasterPhAnim="0">
   <p:cSld>
     <p:spTree>
       <p:nvGrpSpPr>
-        <p:cNvPr id="115" name="Shape 115"/>
+        <p:cNvPr id="1" name="Shape 115"/>
         <p:cNvGrpSpPr/>
         <p:nvPr/>
       </p:nvGrpSpPr>
@@ -1323,9 +1368,11 @@
       <p:sp>
         <p:nvSpPr>
           <p:cNvPr id="116" name="Google Shape;116;g3dbbc547d7c_0_26:notes"/>
-          <p:cNvSpPr/>
+          <p:cNvSpPr>
+            <a:spLocks noGrp="1" noRot="1" noChangeAspect="1"/>
+          </p:cNvSpPr>
           <p:nvPr>
-            <p:ph idx="2" type="sldImg"/>
+            <p:ph type="sldImg" idx="2"/>
           </p:nvPr>
         </p:nvSpPr>
         <p:spPr>
@@ -1334,9 +1381,13 @@
             <a:ext cx="6096000" cy="3429000"/>
           </a:xfrm>
           <a:custGeom>
-            <a:rect b="b" l="l" r="r" t="t"/>
+            <a:avLst/>
+            <a:gdLst/>
+            <a:ahLst/>
+            <a:cxnLst/>
+            <a:rect l="l" t="t" r="r" b="b"/>
             <a:pathLst>
-              <a:path extrusionOk="0" h="120000" w="120000">
+              <a:path w="120000" h="120000" extrusionOk="0">
                 <a:moveTo>
                   <a:pt x="0" y="0"/>
                 </a:moveTo>
@@ -1358,9 +1409,11 @@
       <p:sp>
         <p:nvSpPr>
           <p:cNvPr id="117" name="Google Shape;117;g3dbbc547d7c_0_26:notes"/>
-          <p:cNvSpPr txBox="1"/>
+          <p:cNvSpPr txBox="1">
+            <a:spLocks noGrp="1"/>
+          </p:cNvSpPr>
           <p:nvPr>
-            <p:ph idx="1" type="body"/>
+            <p:ph type="body" idx="1"/>
           </p:nvPr>
         </p:nvSpPr>
         <p:spPr>
@@ -1373,12 +1426,12 @@
           </a:prstGeom>
         </p:spPr>
         <p:txBody>
-          <a:bodyPr anchorCtr="0" anchor="t" bIns="91425" lIns="91425" spcFirstLastPara="1" rIns="91425" wrap="square" tIns="91425">
+          <a:bodyPr spcFirstLastPara="1" wrap="square" lIns="91425" tIns="91425" rIns="91425" bIns="91425" anchor="t" anchorCtr="0">
             <a:noAutofit/>
           </a:bodyPr>
           <a:lstStyle/>
           <a:p>
-            <a:pPr indent="0" lvl="0" marL="0" rtl="0" algn="l">
+            <a:pPr marL="0" lvl="0" indent="0" algn="l" rtl="0">
               <a:spcBef>
                 <a:spcPts val="0"/>
               </a:spcBef>
@@ -1387,9 +1440,6 @@
               </a:spcAft>
               <a:buNone/>
             </a:pPr>
-            <a:r>
-              <a:t/>
-            </a:r>
             <a:endParaRPr/>
           </a:p>
         </p:txBody>
@@ -1403,11 +1453,11 @@
 </file>
 
 <file path=ppt/notesSlides/notesSlide8.xml><?xml version="1.0" encoding="utf-8"?>
-<p:notes xmlns:a="http://schemas.openxmlformats.org/drawingml/2006/main" xmlns:r="http://schemas.openxmlformats.org/officeDocument/2006/relationships" xmlns:mc="http://schemas.openxmlformats.org/markup-compatibility/2006" xmlns:mv="urn:schemas-microsoft-com:mac:vml" xmlns:p="http://schemas.openxmlformats.org/presentationml/2006/main" xmlns:c="http://schemas.openxmlformats.org/drawingml/2006/chart" xmlns:dgm="http://schemas.openxmlformats.org/drawingml/2006/diagram" xmlns:o="urn:schemas-microsoft-com:office:office" xmlns:v="urn:schemas-microsoft-com:vml" xmlns:pvml="urn:schemas-microsoft-com:office:powerpoint" xmlns:com="http://schemas.openxmlformats.org/drawingml/2006/compatibility" xmlns:p14="http://schemas.microsoft.com/office/powerpoint/2010/main" xmlns:p15="http://schemas.microsoft.com/office/powerpoint/2012/main" xmlns:ahyp="http://schemas.microsoft.com/office/drawing/2018/hyperlinkcolor" showMasterPhAnim="0" showMasterSp="0">
+<p:notes xmlns:a="http://schemas.openxmlformats.org/drawingml/2006/main" xmlns:r="http://schemas.openxmlformats.org/officeDocument/2006/relationships" xmlns:p="http://schemas.openxmlformats.org/presentationml/2006/main" showMasterSp="0" showMasterPhAnim="0">
   <p:cSld>
     <p:spTree>
       <p:nvGrpSpPr>
-        <p:cNvPr id="122" name="Shape 122"/>
+        <p:cNvPr id="1" name="Shape 122"/>
         <p:cNvGrpSpPr/>
         <p:nvPr/>
       </p:nvGrpSpPr>
@@ -1422,9 +1472,11 @@
       <p:sp>
         <p:nvSpPr>
           <p:cNvPr id="123" name="Google Shape;123;g3dbbc547d7c_0_39:notes"/>
-          <p:cNvSpPr/>
+          <p:cNvSpPr>
+            <a:spLocks noGrp="1" noRot="1" noChangeAspect="1"/>
+          </p:cNvSpPr>
           <p:nvPr>
-            <p:ph idx="2" type="sldImg"/>
+            <p:ph type="sldImg" idx="2"/>
           </p:nvPr>
         </p:nvSpPr>
         <p:spPr>
@@ -1433,9 +1485,13 @@
             <a:ext cx="6096000" cy="3429000"/>
           </a:xfrm>
           <a:custGeom>
-            <a:rect b="b" l="l" r="r" t="t"/>
+            <a:avLst/>
+            <a:gdLst/>
+            <a:ahLst/>
+            <a:cxnLst/>
+            <a:rect l="l" t="t" r="r" b="b"/>
             <a:pathLst>
-              <a:path extrusionOk="0" h="120000" w="120000">
+              <a:path w="120000" h="120000" extrusionOk="0">
                 <a:moveTo>
                   <a:pt x="0" y="0"/>
                 </a:moveTo>
@@ -1457,9 +1513,11 @@
       <p:sp>
         <p:nvSpPr>
           <p:cNvPr id="124" name="Google Shape;124;g3dbbc547d7c_0_39:notes"/>
-          <p:cNvSpPr txBox="1"/>
+          <p:cNvSpPr txBox="1">
+            <a:spLocks noGrp="1"/>
+          </p:cNvSpPr>
           <p:nvPr>
-            <p:ph idx="1" type="body"/>
+            <p:ph type="body" idx="1"/>
           </p:nvPr>
         </p:nvSpPr>
         <p:spPr>
@@ -1472,12 +1530,12 @@
           </a:prstGeom>
         </p:spPr>
         <p:txBody>
-          <a:bodyPr anchorCtr="0" anchor="t" bIns="91425" lIns="91425" spcFirstLastPara="1" rIns="91425" wrap="square" tIns="91425">
+          <a:bodyPr spcFirstLastPara="1" wrap="square" lIns="91425" tIns="91425" rIns="91425" bIns="91425" anchor="t" anchorCtr="0">
             <a:noAutofit/>
           </a:bodyPr>
           <a:lstStyle/>
           <a:p>
-            <a:pPr indent="0" lvl="0" marL="0" rtl="0" algn="l">
+            <a:pPr marL="0" lvl="0" indent="0" algn="l" rtl="0">
               <a:spcBef>
                 <a:spcPts val="0"/>
               </a:spcBef>
@@ -1486,9 +1544,6 @@
               </a:spcAft>
               <a:buNone/>
             </a:pPr>
-            <a:r>
-              <a:t/>
-            </a:r>
             <a:endParaRPr/>
           </a:p>
         </p:txBody>
@@ -1502,11 +1557,11 @@
 </file>
 
 <file path=ppt/slideLayouts/slideLayout1.xml><?xml version="1.0" encoding="utf-8"?>
-<p:sldLayout xmlns:a="http://schemas.openxmlformats.org/drawingml/2006/main" xmlns:r="http://schemas.openxmlformats.org/officeDocument/2006/relationships" xmlns:mc="http://schemas.openxmlformats.org/markup-compatibility/2006" xmlns:mv="urn:schemas-microsoft-com:mac:vml" xmlns:p="http://schemas.openxmlformats.org/presentationml/2006/main" xmlns:c="http://schemas.openxmlformats.org/drawingml/2006/chart" xmlns:dgm="http://schemas.openxmlformats.org/drawingml/2006/diagram" xmlns:o="urn:schemas-microsoft-com:office:office" xmlns:v="urn:schemas-microsoft-com:vml" xmlns:pvml="urn:schemas-microsoft-com:office:powerpoint" xmlns:com="http://schemas.openxmlformats.org/drawingml/2006/compatibility" xmlns:p14="http://schemas.microsoft.com/office/powerpoint/2010/main" xmlns:p15="http://schemas.microsoft.com/office/powerpoint/2012/main" xmlns:ahyp="http://schemas.microsoft.com/office/drawing/2018/hyperlinkcolor" matchingName="Title slide" type="title">
+<p:sldLayout xmlns:a="http://schemas.openxmlformats.org/drawingml/2006/main" xmlns:r="http://schemas.openxmlformats.org/officeDocument/2006/relationships" xmlns:p="http://schemas.openxmlformats.org/presentationml/2006/main" matchingName="Title slide" type="title">
   <p:cSld name="TITLE">
     <p:spTree>
       <p:nvGrpSpPr>
-        <p:cNvPr id="9" name="Shape 9"/>
+        <p:cNvPr id="1" name="Shape 9"/>
         <p:cNvGrpSpPr/>
         <p:nvPr/>
       </p:nvGrpSpPr>
@@ -1530,9 +1585,13 @@
             <a:ext cx="1081625" cy="1124950"/>
           </a:xfrm>
           <a:custGeom>
-            <a:rect b="b" l="l" r="r" t="t"/>
+            <a:avLst/>
+            <a:gdLst/>
+            <a:ahLst/>
+            <a:cxnLst/>
+            <a:rect l="l" t="t" r="r" b="b"/>
             <a:pathLst>
-              <a:path extrusionOk="0" h="44998" w="43265">
+              <a:path w="43265" h="44998" extrusionOk="0">
                 <a:moveTo>
                   <a:pt x="0" y="44998"/>
                 </a:moveTo>
@@ -1546,16 +1605,23 @@
             </a:pathLst>
           </a:custGeom>
           <a:noFill/>
-          <a:ln cap="flat" cmpd="sng" w="28575">
+          <a:ln w="28575" cap="flat" cmpd="sng">
             <a:solidFill>
               <a:schemeClr val="lt2"/>
             </a:solidFill>
             <a:prstDash val="solid"/>
             <a:miter lim="8000"/>
-            <a:headEnd len="sm" w="sm" type="none"/>
-            <a:tailEnd len="sm" w="sm" type="none"/>
+            <a:headEnd type="none" w="sm" len="sm"/>
+            <a:tailEnd type="none" w="sm" len="sm"/>
           </a:ln>
         </p:spPr>
+        <p:txBody>
+          <a:bodyPr/>
+          <a:lstStyle/>
+          <a:p>
+            <a:endParaRPr lang="es-CL"/>
+          </a:p>
+        </p:txBody>
       </p:sp>
       <p:sp>
         <p:nvSpPr>
@@ -1569,9 +1635,13 @@
             <a:ext cx="1081625" cy="1124950"/>
           </a:xfrm>
           <a:custGeom>
-            <a:rect b="b" l="l" r="r" t="t"/>
+            <a:avLst/>
+            <a:gdLst/>
+            <a:ahLst/>
+            <a:cxnLst/>
+            <a:rect l="l" t="t" r="r" b="b"/>
             <a:pathLst>
-              <a:path extrusionOk="0" h="44998" w="43265">
+              <a:path w="43265" h="44998" extrusionOk="0">
                 <a:moveTo>
                   <a:pt x="0" y="44998"/>
                 </a:moveTo>
@@ -1585,21 +1655,30 @@
             </a:pathLst>
           </a:custGeom>
           <a:noFill/>
-          <a:ln cap="flat" cmpd="sng" w="28575">
+          <a:ln w="28575" cap="flat" cmpd="sng">
             <a:solidFill>
               <a:schemeClr val="lt2"/>
             </a:solidFill>
             <a:prstDash val="solid"/>
             <a:miter lim="8000"/>
-            <a:headEnd len="sm" w="sm" type="none"/>
-            <a:tailEnd len="sm" w="sm" type="none"/>
+            <a:headEnd type="none" w="sm" len="sm"/>
+            <a:tailEnd type="none" w="sm" len="sm"/>
           </a:ln>
         </p:spPr>
+        <p:txBody>
+          <a:bodyPr/>
+          <a:lstStyle/>
+          <a:p>
+            <a:endParaRPr lang="es-CL"/>
+          </a:p>
+        </p:txBody>
       </p:sp>
       <p:sp>
         <p:nvSpPr>
           <p:cNvPr id="12" name="Google Shape;12;p2"/>
-          <p:cNvSpPr txBox="1"/>
+          <p:cNvSpPr txBox="1">
+            <a:spLocks noGrp="1"/>
+          </p:cNvSpPr>
           <p:nvPr>
             <p:ph type="ctrTitle"/>
           </p:nvPr>
@@ -1614,7 +1693,7 @@
           </a:prstGeom>
         </p:spPr>
         <p:txBody>
-          <a:bodyPr anchorCtr="0" anchor="b" bIns="91425" lIns="91425" spcFirstLastPara="1" rIns="91425" wrap="square" tIns="91425">
+          <a:bodyPr spcFirstLastPara="1" wrap="square" lIns="91425" tIns="91425" rIns="91425" bIns="91425" anchor="b" anchorCtr="0">
             <a:normAutofit/>
           </a:bodyPr>
           <a:lstStyle>
@@ -1718,15 +1797,19 @@
               <a:defRPr/>
             </a:lvl9pPr>
           </a:lstStyle>
-          <a:p/>
+          <a:p>
+            <a:endParaRPr/>
+          </a:p>
         </p:txBody>
       </p:sp>
       <p:sp>
         <p:nvSpPr>
           <p:cNvPr id="13" name="Google Shape;13;p2"/>
-          <p:cNvSpPr txBox="1"/>
+          <p:cNvSpPr txBox="1">
+            <a:spLocks noGrp="1"/>
+          </p:cNvSpPr>
           <p:nvPr>
-            <p:ph idx="1" type="subTitle"/>
+            <p:ph type="subTitle" idx="1"/>
           </p:nvPr>
         </p:nvSpPr>
         <p:spPr>
@@ -1739,7 +1822,7 @@
           </a:prstGeom>
         </p:spPr>
         <p:txBody>
-          <a:bodyPr anchorCtr="0" anchor="t" bIns="91425" lIns="91425" spcFirstLastPara="1" rIns="91425" wrap="square" tIns="91425">
+          <a:bodyPr spcFirstLastPara="1" wrap="square" lIns="91425" tIns="91425" rIns="91425" bIns="91425" anchor="t" anchorCtr="0">
             <a:normAutofit/>
           </a:bodyPr>
           <a:lstStyle>
@@ -1924,15 +2007,19 @@
               </a:defRPr>
             </a:lvl9pPr>
           </a:lstStyle>
-          <a:p/>
+          <a:p>
+            <a:endParaRPr/>
+          </a:p>
         </p:txBody>
       </p:sp>
       <p:sp>
         <p:nvSpPr>
           <p:cNvPr id="14" name="Google Shape;14;p2"/>
-          <p:cNvSpPr txBox="1"/>
+          <p:cNvSpPr txBox="1">
+            <a:spLocks noGrp="1"/>
+          </p:cNvSpPr>
           <p:nvPr>
-            <p:ph idx="12" type="sldNum"/>
+            <p:ph type="sldNum" idx="12"/>
           </p:nvPr>
         </p:nvSpPr>
         <p:spPr>
@@ -1945,7 +2032,7 @@
           </a:prstGeom>
         </p:spPr>
         <p:txBody>
-          <a:bodyPr anchorCtr="0" anchor="ctr" bIns="91425" lIns="91425" spcFirstLastPara="1" rIns="91425" wrap="square" tIns="91425">
+          <a:bodyPr spcFirstLastPara="1" wrap="square" lIns="91425" tIns="91425" rIns="91425" bIns="91425" anchor="ctr" anchorCtr="0">
             <a:normAutofit/>
           </a:bodyPr>
           <a:lstStyle>
@@ -1987,7 +2074,7 @@
             </a:lvl9pPr>
           </a:lstStyle>
           <a:p>
-            <a:pPr indent="0" lvl="0" marL="0" rtl="0" algn="r">
+            <a:pPr marL="0" lvl="0" indent="0" algn="r" rtl="0">
               <a:spcBef>
                 <a:spcPts val="0"/>
               </a:spcBef>
@@ -1998,7 +2085,7 @@
             </a:pPr>
             <a:fld id="{00000000-1234-1234-1234-123412341234}" type="slidenum">
               <a:rPr lang="es"/>
-              <a:t>‹#›</a:t>
+              <a:t>‹Nº›</a:t>
             </a:fld>
             <a:endParaRPr/>
           </a:p>
@@ -2013,11 +2100,11 @@
 </file>
 
 <file path=ppt/slideLayouts/slideLayout10.xml><?xml version="1.0" encoding="utf-8"?>
-<p:sldLayout xmlns:a="http://schemas.openxmlformats.org/drawingml/2006/main" xmlns:r="http://schemas.openxmlformats.org/officeDocument/2006/relationships" xmlns:mc="http://schemas.openxmlformats.org/markup-compatibility/2006" xmlns:mv="urn:schemas-microsoft-com:mac:vml" xmlns:p="http://schemas.openxmlformats.org/presentationml/2006/main" xmlns:c="http://schemas.openxmlformats.org/drawingml/2006/chart" xmlns:dgm="http://schemas.openxmlformats.org/drawingml/2006/diagram" xmlns:o="urn:schemas-microsoft-com:office:office" xmlns:v="urn:schemas-microsoft-com:vml" xmlns:pvml="urn:schemas-microsoft-com:office:powerpoint" xmlns:com="http://schemas.openxmlformats.org/drawingml/2006/compatibility" xmlns:p14="http://schemas.microsoft.com/office/powerpoint/2010/main" xmlns:p15="http://schemas.microsoft.com/office/powerpoint/2012/main" xmlns:ahyp="http://schemas.microsoft.com/office/drawing/2018/hyperlinkcolor" matchingName="Big number">
+<p:sldLayout xmlns:a="http://schemas.openxmlformats.org/drawingml/2006/main" xmlns:r="http://schemas.openxmlformats.org/officeDocument/2006/relationships" xmlns:p="http://schemas.openxmlformats.org/presentationml/2006/main" matchingName="Big number">
   <p:cSld name="BIG_NUMBER">
     <p:spTree>
       <p:nvGrpSpPr>
-        <p:cNvPr id="51" name="Shape 51"/>
+        <p:cNvPr id="1" name="Shape 51"/>
         <p:cNvGrpSpPr/>
         <p:nvPr/>
       </p:nvGrpSpPr>
@@ -2051,12 +2138,12 @@
           </a:ln>
         </p:spPr>
         <p:txBody>
-          <a:bodyPr anchorCtr="0" anchor="ctr" bIns="91425" lIns="91425" spcFirstLastPara="1" rIns="91425" wrap="square" tIns="91425">
+          <a:bodyPr spcFirstLastPara="1" wrap="square" lIns="91425" tIns="91425" rIns="91425" bIns="91425" anchor="ctr" anchorCtr="0">
             <a:noAutofit/>
           </a:bodyPr>
           <a:lstStyle/>
           <a:p>
-            <a:pPr indent="0" lvl="0" marL="0" rtl="0" algn="l">
+            <a:pPr marL="0" lvl="0" indent="0" algn="l" rtl="0">
               <a:spcBef>
                 <a:spcPts val="0"/>
               </a:spcBef>
@@ -2065,9 +2152,6 @@
               </a:spcAft>
               <a:buNone/>
             </a:pPr>
-            <a:r>
-              <a:t/>
-            </a:r>
             <a:endParaRPr/>
           </a:p>
         </p:txBody>
@@ -2075,9 +2159,11 @@
       <p:sp>
         <p:nvSpPr>
           <p:cNvPr id="53" name="Google Shape;53;p11"/>
-          <p:cNvSpPr txBox="1"/>
+          <p:cNvSpPr txBox="1">
+            <a:spLocks noGrp="1"/>
+          </p:cNvSpPr>
           <p:nvPr>
-            <p:ph hasCustomPrompt="1" type="title"/>
+            <p:ph type="title" hasCustomPrompt="1"/>
           </p:nvPr>
         </p:nvSpPr>
         <p:spPr>
@@ -2090,7 +2176,7 @@
           </a:prstGeom>
         </p:spPr>
         <p:txBody>
-          <a:bodyPr anchorCtr="0" anchor="ctr" bIns="91425" lIns="91425" spcFirstLastPara="1" rIns="91425" wrap="square" tIns="91425">
+          <a:bodyPr spcFirstLastPara="1" wrap="square" lIns="91425" tIns="91425" rIns="91425" bIns="91425" anchor="ctr" anchorCtr="0">
             <a:normAutofit/>
           </a:bodyPr>
           <a:lstStyle>
@@ -2267,9 +2353,11 @@
       <p:sp>
         <p:nvSpPr>
           <p:cNvPr id="54" name="Google Shape;54;p11"/>
-          <p:cNvSpPr txBox="1"/>
+          <p:cNvSpPr txBox="1">
+            <a:spLocks noGrp="1"/>
+          </p:cNvSpPr>
           <p:nvPr>
-            <p:ph idx="1" type="body"/>
+            <p:ph type="body" idx="1"/>
           </p:nvPr>
         </p:nvSpPr>
         <p:spPr>
@@ -2282,11 +2370,11 @@
           </a:prstGeom>
         </p:spPr>
         <p:txBody>
-          <a:bodyPr anchorCtr="0" anchor="t" bIns="91425" lIns="91425" spcFirstLastPara="1" rIns="91425" wrap="square" tIns="91425">
+          <a:bodyPr spcFirstLastPara="1" wrap="square" lIns="91425" tIns="91425" rIns="91425" bIns="91425" anchor="t" anchorCtr="0">
             <a:normAutofit/>
           </a:bodyPr>
           <a:lstStyle>
-            <a:lvl1pPr indent="-342900" lvl="0" marL="457200" algn="ctr">
+            <a:lvl1pPr marL="457200" lvl="0" indent="-342900" algn="ctr">
               <a:spcBef>
                 <a:spcPts val="0"/>
               </a:spcBef>
@@ -2297,7 +2385,7 @@
               <a:buChar char="●"/>
               <a:defRPr/>
             </a:lvl1pPr>
-            <a:lvl2pPr indent="-317500" lvl="1" marL="914400" algn="ctr">
+            <a:lvl2pPr marL="914400" lvl="1" indent="-317500" algn="ctr">
               <a:spcBef>
                 <a:spcPts val="0"/>
               </a:spcBef>
@@ -2308,7 +2396,7 @@
               <a:buChar char="○"/>
               <a:defRPr/>
             </a:lvl2pPr>
-            <a:lvl3pPr indent="-317500" lvl="2" marL="1371600" algn="ctr">
+            <a:lvl3pPr marL="1371600" lvl="2" indent="-317500" algn="ctr">
               <a:spcBef>
                 <a:spcPts val="0"/>
               </a:spcBef>
@@ -2319,7 +2407,7 @@
               <a:buChar char="■"/>
               <a:defRPr/>
             </a:lvl3pPr>
-            <a:lvl4pPr indent="-317500" lvl="3" marL="1828800" algn="ctr">
+            <a:lvl4pPr marL="1828800" lvl="3" indent="-317500" algn="ctr">
               <a:spcBef>
                 <a:spcPts val="0"/>
               </a:spcBef>
@@ -2330,7 +2418,7 @@
               <a:buChar char="●"/>
               <a:defRPr/>
             </a:lvl4pPr>
-            <a:lvl5pPr indent="-317500" lvl="4" marL="2286000" algn="ctr">
+            <a:lvl5pPr marL="2286000" lvl="4" indent="-317500" algn="ctr">
               <a:spcBef>
                 <a:spcPts val="0"/>
               </a:spcBef>
@@ -2341,7 +2429,7 @@
               <a:buChar char="○"/>
               <a:defRPr/>
             </a:lvl5pPr>
-            <a:lvl6pPr indent="-317500" lvl="5" marL="2743200" algn="ctr">
+            <a:lvl6pPr marL="2743200" lvl="5" indent="-317500" algn="ctr">
               <a:spcBef>
                 <a:spcPts val="0"/>
               </a:spcBef>
@@ -2352,7 +2440,7 @@
               <a:buChar char="■"/>
               <a:defRPr/>
             </a:lvl6pPr>
-            <a:lvl7pPr indent="-317500" lvl="6" marL="3200400" algn="ctr">
+            <a:lvl7pPr marL="3200400" lvl="6" indent="-317500" algn="ctr">
               <a:spcBef>
                 <a:spcPts val="0"/>
               </a:spcBef>
@@ -2363,7 +2451,7 @@
               <a:buChar char="●"/>
               <a:defRPr/>
             </a:lvl7pPr>
-            <a:lvl8pPr indent="-317500" lvl="7" marL="3657600" algn="ctr">
+            <a:lvl8pPr marL="3657600" lvl="7" indent="-317500" algn="ctr">
               <a:spcBef>
                 <a:spcPts val="0"/>
               </a:spcBef>
@@ -2374,7 +2462,7 @@
               <a:buChar char="○"/>
               <a:defRPr/>
             </a:lvl8pPr>
-            <a:lvl9pPr indent="-317500" lvl="8" marL="4114800" algn="ctr">
+            <a:lvl9pPr marL="4114800" lvl="8" indent="-317500" algn="ctr">
               <a:spcBef>
                 <a:spcPts val="0"/>
               </a:spcBef>
@@ -2386,15 +2474,19 @@
               <a:defRPr/>
             </a:lvl9pPr>
           </a:lstStyle>
-          <a:p/>
+          <a:p>
+            <a:endParaRPr/>
+          </a:p>
         </p:txBody>
       </p:sp>
       <p:sp>
         <p:nvSpPr>
           <p:cNvPr id="55" name="Google Shape;55;p11"/>
-          <p:cNvSpPr txBox="1"/>
+          <p:cNvSpPr txBox="1">
+            <a:spLocks noGrp="1"/>
+          </p:cNvSpPr>
           <p:nvPr>
-            <p:ph idx="12" type="sldNum"/>
+            <p:ph type="sldNum" idx="12"/>
           </p:nvPr>
         </p:nvSpPr>
         <p:spPr>
@@ -2407,7 +2499,7 @@
           </a:prstGeom>
         </p:spPr>
         <p:txBody>
-          <a:bodyPr anchorCtr="0" anchor="ctr" bIns="91425" lIns="91425" spcFirstLastPara="1" rIns="91425" wrap="square" tIns="91425">
+          <a:bodyPr spcFirstLastPara="1" wrap="square" lIns="91425" tIns="91425" rIns="91425" bIns="91425" anchor="ctr" anchorCtr="0">
             <a:normAutofit/>
           </a:bodyPr>
           <a:lstStyle>
@@ -2449,7 +2541,7 @@
             </a:lvl9pPr>
           </a:lstStyle>
           <a:p>
-            <a:pPr indent="0" lvl="0" marL="0" rtl="0" algn="r">
+            <a:pPr marL="0" lvl="0" indent="0" algn="r" rtl="0">
               <a:spcBef>
                 <a:spcPts val="0"/>
               </a:spcBef>
@@ -2460,7 +2552,7 @@
             </a:pPr>
             <a:fld id="{00000000-1234-1234-1234-123412341234}" type="slidenum">
               <a:rPr lang="es"/>
-              <a:t>‹#›</a:t>
+              <a:t>‹Nº›</a:t>
             </a:fld>
             <a:endParaRPr/>
           </a:p>
@@ -2475,11 +2567,11 @@
 </file>
 
 <file path=ppt/slideLayouts/slideLayout11.xml><?xml version="1.0" encoding="utf-8"?>
-<p:sldLayout xmlns:a="http://schemas.openxmlformats.org/drawingml/2006/main" xmlns:r="http://schemas.openxmlformats.org/officeDocument/2006/relationships" xmlns:mc="http://schemas.openxmlformats.org/markup-compatibility/2006" xmlns:mv="urn:schemas-microsoft-com:mac:vml" xmlns:p="http://schemas.openxmlformats.org/presentationml/2006/main" xmlns:c="http://schemas.openxmlformats.org/drawingml/2006/chart" xmlns:dgm="http://schemas.openxmlformats.org/drawingml/2006/diagram" xmlns:o="urn:schemas-microsoft-com:office:office" xmlns:v="urn:schemas-microsoft-com:vml" xmlns:pvml="urn:schemas-microsoft-com:office:powerpoint" xmlns:com="http://schemas.openxmlformats.org/drawingml/2006/compatibility" xmlns:p14="http://schemas.microsoft.com/office/powerpoint/2010/main" xmlns:p15="http://schemas.microsoft.com/office/powerpoint/2012/main" xmlns:ahyp="http://schemas.microsoft.com/office/drawing/2018/hyperlinkcolor" matchingName="Blank" type="blank">
+<p:sldLayout xmlns:a="http://schemas.openxmlformats.org/drawingml/2006/main" xmlns:r="http://schemas.openxmlformats.org/officeDocument/2006/relationships" xmlns:p="http://schemas.openxmlformats.org/presentationml/2006/main" matchingName="Blank" type="blank">
   <p:cSld name="BLANK">
     <p:spTree>
       <p:nvGrpSpPr>
-        <p:cNvPr id="56" name="Shape 56"/>
+        <p:cNvPr id="1" name="Shape 56"/>
         <p:cNvGrpSpPr/>
         <p:nvPr/>
       </p:nvGrpSpPr>
@@ -2494,9 +2586,11 @@
       <p:sp>
         <p:nvSpPr>
           <p:cNvPr id="57" name="Google Shape;57;p12"/>
-          <p:cNvSpPr txBox="1"/>
+          <p:cNvSpPr txBox="1">
+            <a:spLocks noGrp="1"/>
+          </p:cNvSpPr>
           <p:nvPr>
-            <p:ph idx="12" type="sldNum"/>
+            <p:ph type="sldNum" idx="12"/>
           </p:nvPr>
         </p:nvSpPr>
         <p:spPr>
@@ -2509,7 +2603,7 @@
           </a:prstGeom>
         </p:spPr>
         <p:txBody>
-          <a:bodyPr anchorCtr="0" anchor="ctr" bIns="91425" lIns="91425" spcFirstLastPara="1" rIns="91425" wrap="square" tIns="91425">
+          <a:bodyPr spcFirstLastPara="1" wrap="square" lIns="91425" tIns="91425" rIns="91425" bIns="91425" anchor="ctr" anchorCtr="0">
             <a:normAutofit/>
           </a:bodyPr>
           <a:lstStyle>
@@ -2551,7 +2645,7 @@
             </a:lvl9pPr>
           </a:lstStyle>
           <a:p>
-            <a:pPr indent="0" lvl="0" marL="0" rtl="0" algn="r">
+            <a:pPr marL="0" lvl="0" indent="0" algn="r" rtl="0">
               <a:spcBef>
                 <a:spcPts val="0"/>
               </a:spcBef>
@@ -2562,7 +2656,7 @@
             </a:pPr>
             <a:fld id="{00000000-1234-1234-1234-123412341234}" type="slidenum">
               <a:rPr lang="es"/>
-              <a:t>‹#›</a:t>
+              <a:t>‹Nº›</a:t>
             </a:fld>
             <a:endParaRPr/>
           </a:p>
@@ -2577,11 +2671,11 @@
 </file>
 
 <file path=ppt/slideLayouts/slideLayout2.xml><?xml version="1.0" encoding="utf-8"?>
-<p:sldLayout xmlns:a="http://schemas.openxmlformats.org/drawingml/2006/main" xmlns:r="http://schemas.openxmlformats.org/officeDocument/2006/relationships" xmlns:mc="http://schemas.openxmlformats.org/markup-compatibility/2006" xmlns:mv="urn:schemas-microsoft-com:mac:vml" xmlns:p="http://schemas.openxmlformats.org/presentationml/2006/main" xmlns:c="http://schemas.openxmlformats.org/drawingml/2006/chart" xmlns:dgm="http://schemas.openxmlformats.org/drawingml/2006/diagram" xmlns:o="urn:schemas-microsoft-com:office:office" xmlns:v="urn:schemas-microsoft-com:vml" xmlns:pvml="urn:schemas-microsoft-com:office:powerpoint" xmlns:com="http://schemas.openxmlformats.org/drawingml/2006/compatibility" xmlns:p14="http://schemas.microsoft.com/office/powerpoint/2010/main" xmlns:p15="http://schemas.microsoft.com/office/powerpoint/2012/main" xmlns:ahyp="http://schemas.microsoft.com/office/drawing/2018/hyperlinkcolor" matchingName="Section header" type="secHead">
+<p:sldLayout xmlns:a="http://schemas.openxmlformats.org/drawingml/2006/main" xmlns:r="http://schemas.openxmlformats.org/officeDocument/2006/relationships" xmlns:p="http://schemas.openxmlformats.org/presentationml/2006/main" matchingName="Section header" type="secHead">
   <p:cSld name="SECTION_HEADER">
     <p:spTree>
       <p:nvGrpSpPr>
-        <p:cNvPr id="15" name="Shape 15"/>
+        <p:cNvPr id="1" name="Shape 15"/>
         <p:cNvGrpSpPr/>
         <p:nvPr/>
       </p:nvGrpSpPr>
@@ -2605,9 +2699,13 @@
             <a:ext cx="1081625" cy="1124950"/>
           </a:xfrm>
           <a:custGeom>
-            <a:rect b="b" l="l" r="r" t="t"/>
+            <a:avLst/>
+            <a:gdLst/>
+            <a:ahLst/>
+            <a:cxnLst/>
+            <a:rect l="l" t="t" r="r" b="b"/>
             <a:pathLst>
-              <a:path extrusionOk="0" h="44998" w="43265">
+              <a:path w="43265" h="44998" extrusionOk="0">
                 <a:moveTo>
                   <a:pt x="0" y="44998"/>
                 </a:moveTo>
@@ -2621,14 +2719,14 @@
             </a:pathLst>
           </a:custGeom>
           <a:noFill/>
-          <a:ln cap="flat" cmpd="sng" w="28575">
+          <a:ln w="28575" cap="flat" cmpd="sng">
             <a:solidFill>
               <a:schemeClr val="lt2"/>
             </a:solidFill>
             <a:prstDash val="solid"/>
             <a:miter lim="8000"/>
-            <a:headEnd len="sm" w="sm" type="none"/>
-            <a:tailEnd len="sm" w="sm" type="none"/>
+            <a:headEnd type="none" w="sm" len="sm"/>
+            <a:tailEnd type="none" w="sm" len="sm"/>
           </a:ln>
         </p:spPr>
       </p:sp>
@@ -2639,14 +2737,18 @@
           <p:nvPr/>
         </p:nvSpPr>
         <p:spPr>
-          <a:xfrm flipH="1" rot="10800000">
+          <a:xfrm rot="10800000" flipH="1">
             <a:off x="466425" y="3558325"/>
             <a:ext cx="1081625" cy="1124950"/>
           </a:xfrm>
           <a:custGeom>
-            <a:rect b="b" l="l" r="r" t="t"/>
+            <a:avLst/>
+            <a:gdLst/>
+            <a:ahLst/>
+            <a:cxnLst/>
+            <a:rect l="l" t="t" r="r" b="b"/>
             <a:pathLst>
-              <a:path extrusionOk="0" h="44998" w="43265">
+              <a:path w="43265" h="44998" extrusionOk="0">
                 <a:moveTo>
                   <a:pt x="0" y="44998"/>
                 </a:moveTo>
@@ -2660,21 +2762,23 @@
             </a:pathLst>
           </a:custGeom>
           <a:noFill/>
-          <a:ln cap="flat" cmpd="sng" w="28575">
+          <a:ln w="28575" cap="flat" cmpd="sng">
             <a:solidFill>
               <a:schemeClr val="lt2"/>
             </a:solidFill>
             <a:prstDash val="solid"/>
             <a:miter lim="8000"/>
-            <a:headEnd len="sm" w="sm" type="none"/>
-            <a:tailEnd len="sm" w="sm" type="none"/>
+            <a:headEnd type="none" w="sm" len="sm"/>
+            <a:tailEnd type="none" w="sm" len="sm"/>
           </a:ln>
         </p:spPr>
       </p:sp>
       <p:sp>
         <p:nvSpPr>
           <p:cNvPr id="18" name="Google Shape;18;p3"/>
-          <p:cNvSpPr txBox="1"/>
+          <p:cNvSpPr txBox="1">
+            <a:spLocks noGrp="1"/>
+          </p:cNvSpPr>
           <p:nvPr>
             <p:ph type="title"/>
           </p:nvPr>
@@ -2689,7 +2793,7 @@
           </a:prstGeom>
         </p:spPr>
         <p:txBody>
-          <a:bodyPr anchorCtr="0" anchor="ctr" bIns="91425" lIns="91425" spcFirstLastPara="1" rIns="91425" wrap="square" tIns="91425">
+          <a:bodyPr spcFirstLastPara="1" wrap="square" lIns="91425" tIns="91425" rIns="91425" bIns="91425" anchor="ctr" anchorCtr="0">
             <a:normAutofit/>
           </a:bodyPr>
           <a:lstStyle>
@@ -2793,15 +2897,19 @@
               <a:defRPr/>
             </a:lvl9pPr>
           </a:lstStyle>
-          <a:p/>
+          <a:p>
+            <a:endParaRPr/>
+          </a:p>
         </p:txBody>
       </p:sp>
       <p:sp>
         <p:nvSpPr>
           <p:cNvPr id="19" name="Google Shape;19;p3"/>
-          <p:cNvSpPr txBox="1"/>
+          <p:cNvSpPr txBox="1">
+            <a:spLocks noGrp="1"/>
+          </p:cNvSpPr>
           <p:nvPr>
-            <p:ph idx="12" type="sldNum"/>
+            <p:ph type="sldNum" idx="12"/>
           </p:nvPr>
         </p:nvSpPr>
         <p:spPr>
@@ -2814,7 +2922,7 @@
           </a:prstGeom>
         </p:spPr>
         <p:txBody>
-          <a:bodyPr anchorCtr="0" anchor="ctr" bIns="91425" lIns="91425" spcFirstLastPara="1" rIns="91425" wrap="square" tIns="91425">
+          <a:bodyPr spcFirstLastPara="1" wrap="square" lIns="91425" tIns="91425" rIns="91425" bIns="91425" anchor="ctr" anchorCtr="0">
             <a:normAutofit/>
           </a:bodyPr>
           <a:lstStyle>
@@ -2856,7 +2964,7 @@
             </a:lvl9pPr>
           </a:lstStyle>
           <a:p>
-            <a:pPr indent="0" lvl="0" marL="0" rtl="0" algn="r">
+            <a:pPr marL="0" lvl="0" indent="0" algn="r" rtl="0">
               <a:spcBef>
                 <a:spcPts val="0"/>
               </a:spcBef>
@@ -2867,7 +2975,7 @@
             </a:pPr>
             <a:fld id="{00000000-1234-1234-1234-123412341234}" type="slidenum">
               <a:rPr lang="es"/>
-              <a:t>‹#›</a:t>
+              <a:t>‹Nº›</a:t>
             </a:fld>
             <a:endParaRPr/>
           </a:p>
@@ -2882,11 +2990,11 @@
 </file>
 
 <file path=ppt/slideLayouts/slideLayout3.xml><?xml version="1.0" encoding="utf-8"?>
-<p:sldLayout xmlns:a="http://schemas.openxmlformats.org/drawingml/2006/main" xmlns:r="http://schemas.openxmlformats.org/officeDocument/2006/relationships" xmlns:mc="http://schemas.openxmlformats.org/markup-compatibility/2006" xmlns:mv="urn:schemas-microsoft-com:mac:vml" xmlns:p="http://schemas.openxmlformats.org/presentationml/2006/main" xmlns:c="http://schemas.openxmlformats.org/drawingml/2006/chart" xmlns:dgm="http://schemas.openxmlformats.org/drawingml/2006/diagram" xmlns:o="urn:schemas-microsoft-com:office:office" xmlns:v="urn:schemas-microsoft-com:vml" xmlns:pvml="urn:schemas-microsoft-com:office:powerpoint" xmlns:com="http://schemas.openxmlformats.org/drawingml/2006/compatibility" xmlns:p14="http://schemas.microsoft.com/office/powerpoint/2010/main" xmlns:p15="http://schemas.microsoft.com/office/powerpoint/2012/main" xmlns:ahyp="http://schemas.microsoft.com/office/drawing/2018/hyperlinkcolor" matchingName="Title and body" type="tx">
+<p:sldLayout xmlns:a="http://schemas.openxmlformats.org/drawingml/2006/main" xmlns:r="http://schemas.openxmlformats.org/officeDocument/2006/relationships" xmlns:p="http://schemas.openxmlformats.org/presentationml/2006/main" matchingName="Title and body" type="tx">
   <p:cSld name="TITLE_AND_BODY">
     <p:spTree>
       <p:nvGrpSpPr>
-        <p:cNvPr id="20" name="Shape 20"/>
+        <p:cNvPr id="1" name="Shape 20"/>
         <p:cNvGrpSpPr/>
         <p:nvPr/>
       </p:nvGrpSpPr>
@@ -2920,12 +3028,12 @@
           </a:ln>
         </p:spPr>
         <p:txBody>
-          <a:bodyPr anchorCtr="0" anchor="ctr" bIns="91425" lIns="91425" spcFirstLastPara="1" rIns="91425" wrap="square" tIns="91425">
+          <a:bodyPr spcFirstLastPara="1" wrap="square" lIns="91425" tIns="91425" rIns="91425" bIns="91425" anchor="ctr" anchorCtr="0">
             <a:noAutofit/>
           </a:bodyPr>
           <a:lstStyle/>
           <a:p>
-            <a:pPr indent="0" lvl="0" marL="0" rtl="0" algn="l">
+            <a:pPr marL="0" lvl="0" indent="0" algn="l" rtl="0">
               <a:spcBef>
                 <a:spcPts val="0"/>
               </a:spcBef>
@@ -2934,9 +3042,6 @@
               </a:spcAft>
               <a:buNone/>
             </a:pPr>
-            <a:r>
-              <a:t/>
-            </a:r>
             <a:endParaRPr/>
           </a:p>
         </p:txBody>
@@ -2944,7 +3049,9 @@
       <p:sp>
         <p:nvSpPr>
           <p:cNvPr id="22" name="Google Shape;22;p4"/>
-          <p:cNvSpPr txBox="1"/>
+          <p:cNvSpPr txBox="1">
+            <a:spLocks noGrp="1"/>
+          </p:cNvSpPr>
           <p:nvPr>
             <p:ph type="title"/>
           </p:nvPr>
@@ -2959,7 +3066,7 @@
           </a:prstGeom>
         </p:spPr>
         <p:txBody>
-          <a:bodyPr anchorCtr="0" anchor="b" bIns="91425" lIns="91425" spcFirstLastPara="1" rIns="91425" wrap="square" tIns="91425">
+          <a:bodyPr spcFirstLastPara="1" wrap="square" lIns="91425" tIns="91425" rIns="91425" bIns="91425" anchor="b" anchorCtr="0">
             <a:normAutofit/>
           </a:bodyPr>
           <a:lstStyle>
@@ -3063,15 +3170,19 @@
               <a:defRPr/>
             </a:lvl9pPr>
           </a:lstStyle>
-          <a:p/>
+          <a:p>
+            <a:endParaRPr/>
+          </a:p>
         </p:txBody>
       </p:sp>
       <p:sp>
         <p:nvSpPr>
           <p:cNvPr id="23" name="Google Shape;23;p4"/>
-          <p:cNvSpPr txBox="1"/>
+          <p:cNvSpPr txBox="1">
+            <a:spLocks noGrp="1"/>
+          </p:cNvSpPr>
           <p:nvPr>
-            <p:ph idx="1" type="body"/>
+            <p:ph type="body" idx="1"/>
           </p:nvPr>
         </p:nvSpPr>
         <p:spPr>
@@ -3084,11 +3195,11 @@
           </a:prstGeom>
         </p:spPr>
         <p:txBody>
-          <a:bodyPr anchorCtr="0" anchor="t" bIns="91425" lIns="91425" spcFirstLastPara="1" rIns="91425" wrap="square" tIns="91425">
+          <a:bodyPr spcFirstLastPara="1" wrap="square" lIns="91425" tIns="91425" rIns="91425" bIns="91425" anchor="t" anchorCtr="0">
             <a:normAutofit/>
           </a:bodyPr>
           <a:lstStyle>
-            <a:lvl1pPr indent="-342900" lvl="0" marL="457200">
+            <a:lvl1pPr marL="457200" lvl="0" indent="-342900">
               <a:spcBef>
                 <a:spcPts val="0"/>
               </a:spcBef>
@@ -3099,7 +3210,7 @@
               <a:buChar char="●"/>
               <a:defRPr/>
             </a:lvl1pPr>
-            <a:lvl2pPr indent="-317500" lvl="1" marL="914400">
+            <a:lvl2pPr marL="914400" lvl="1" indent="-317500">
               <a:spcBef>
                 <a:spcPts val="0"/>
               </a:spcBef>
@@ -3110,7 +3221,7 @@
               <a:buChar char="○"/>
               <a:defRPr/>
             </a:lvl2pPr>
-            <a:lvl3pPr indent="-317500" lvl="2" marL="1371600">
+            <a:lvl3pPr marL="1371600" lvl="2" indent="-317500">
               <a:spcBef>
                 <a:spcPts val="0"/>
               </a:spcBef>
@@ -3121,7 +3232,7 @@
               <a:buChar char="■"/>
               <a:defRPr/>
             </a:lvl3pPr>
-            <a:lvl4pPr indent="-317500" lvl="3" marL="1828800">
+            <a:lvl4pPr marL="1828800" lvl="3" indent="-317500">
               <a:spcBef>
                 <a:spcPts val="0"/>
               </a:spcBef>
@@ -3132,7 +3243,7 @@
               <a:buChar char="●"/>
               <a:defRPr/>
             </a:lvl4pPr>
-            <a:lvl5pPr indent="-317500" lvl="4" marL="2286000">
+            <a:lvl5pPr marL="2286000" lvl="4" indent="-317500">
               <a:spcBef>
                 <a:spcPts val="0"/>
               </a:spcBef>
@@ -3143,7 +3254,7 @@
               <a:buChar char="○"/>
               <a:defRPr/>
             </a:lvl5pPr>
-            <a:lvl6pPr indent="-317500" lvl="5" marL="2743200">
+            <a:lvl6pPr marL="2743200" lvl="5" indent="-317500">
               <a:spcBef>
                 <a:spcPts val="0"/>
               </a:spcBef>
@@ -3154,7 +3265,7 @@
               <a:buChar char="■"/>
               <a:defRPr/>
             </a:lvl6pPr>
-            <a:lvl7pPr indent="-317500" lvl="6" marL="3200400">
+            <a:lvl7pPr marL="3200400" lvl="6" indent="-317500">
               <a:spcBef>
                 <a:spcPts val="0"/>
               </a:spcBef>
@@ -3165,7 +3276,7 @@
               <a:buChar char="●"/>
               <a:defRPr/>
             </a:lvl7pPr>
-            <a:lvl8pPr indent="-317500" lvl="7" marL="3657600">
+            <a:lvl8pPr marL="3657600" lvl="7" indent="-317500">
               <a:spcBef>
                 <a:spcPts val="0"/>
               </a:spcBef>
@@ -3176,7 +3287,7 @@
               <a:buChar char="○"/>
               <a:defRPr/>
             </a:lvl8pPr>
-            <a:lvl9pPr indent="-317500" lvl="8" marL="4114800">
+            <a:lvl9pPr marL="4114800" lvl="8" indent="-317500">
               <a:spcBef>
                 <a:spcPts val="0"/>
               </a:spcBef>
@@ -3188,15 +3299,19 @@
               <a:defRPr/>
             </a:lvl9pPr>
           </a:lstStyle>
-          <a:p/>
+          <a:p>
+            <a:endParaRPr/>
+          </a:p>
         </p:txBody>
       </p:sp>
       <p:sp>
         <p:nvSpPr>
           <p:cNvPr id="24" name="Google Shape;24;p4"/>
-          <p:cNvSpPr txBox="1"/>
+          <p:cNvSpPr txBox="1">
+            <a:spLocks noGrp="1"/>
+          </p:cNvSpPr>
           <p:nvPr>
-            <p:ph idx="12" type="sldNum"/>
+            <p:ph type="sldNum" idx="12"/>
           </p:nvPr>
         </p:nvSpPr>
         <p:spPr>
@@ -3209,7 +3324,7 @@
           </a:prstGeom>
         </p:spPr>
         <p:txBody>
-          <a:bodyPr anchorCtr="0" anchor="ctr" bIns="91425" lIns="91425" spcFirstLastPara="1" rIns="91425" wrap="square" tIns="91425">
+          <a:bodyPr spcFirstLastPara="1" wrap="square" lIns="91425" tIns="91425" rIns="91425" bIns="91425" anchor="ctr" anchorCtr="0">
             <a:normAutofit/>
           </a:bodyPr>
           <a:lstStyle>
@@ -3251,7 +3366,7 @@
             </a:lvl9pPr>
           </a:lstStyle>
           <a:p>
-            <a:pPr indent="0" lvl="0" marL="0" rtl="0" algn="r">
+            <a:pPr marL="0" lvl="0" indent="0" algn="r" rtl="0">
               <a:spcBef>
                 <a:spcPts val="0"/>
               </a:spcBef>
@@ -3262,7 +3377,7 @@
             </a:pPr>
             <a:fld id="{00000000-1234-1234-1234-123412341234}" type="slidenum">
               <a:rPr lang="es"/>
-              <a:t>‹#›</a:t>
+              <a:t>‹Nº›</a:t>
             </a:fld>
             <a:endParaRPr/>
           </a:p>
@@ -3277,11 +3392,11 @@
 </file>
 
 <file path=ppt/slideLayouts/slideLayout4.xml><?xml version="1.0" encoding="utf-8"?>
-<p:sldLayout xmlns:a="http://schemas.openxmlformats.org/drawingml/2006/main" xmlns:r="http://schemas.openxmlformats.org/officeDocument/2006/relationships" xmlns:mc="http://schemas.openxmlformats.org/markup-compatibility/2006" xmlns:mv="urn:schemas-microsoft-com:mac:vml" xmlns:p="http://schemas.openxmlformats.org/presentationml/2006/main" xmlns:c="http://schemas.openxmlformats.org/drawingml/2006/chart" xmlns:dgm="http://schemas.openxmlformats.org/drawingml/2006/diagram" xmlns:o="urn:schemas-microsoft-com:office:office" xmlns:v="urn:schemas-microsoft-com:vml" xmlns:pvml="urn:schemas-microsoft-com:office:powerpoint" xmlns:com="http://schemas.openxmlformats.org/drawingml/2006/compatibility" xmlns:p14="http://schemas.microsoft.com/office/powerpoint/2010/main" xmlns:p15="http://schemas.microsoft.com/office/powerpoint/2012/main" xmlns:ahyp="http://schemas.microsoft.com/office/drawing/2018/hyperlinkcolor" matchingName="Title and two columns" type="twoColTx">
+<p:sldLayout xmlns:a="http://schemas.openxmlformats.org/drawingml/2006/main" xmlns:r="http://schemas.openxmlformats.org/officeDocument/2006/relationships" xmlns:p="http://schemas.openxmlformats.org/presentationml/2006/main" matchingName="Title and two columns" type="twoColTx">
   <p:cSld name="TITLE_AND_TWO_COLUMNS">
     <p:spTree>
       <p:nvGrpSpPr>
-        <p:cNvPr id="25" name="Shape 25"/>
+        <p:cNvPr id="1" name="Shape 25"/>
         <p:cNvGrpSpPr/>
         <p:nvPr/>
       </p:nvGrpSpPr>
@@ -3296,7 +3411,9 @@
       <p:sp>
         <p:nvSpPr>
           <p:cNvPr id="26" name="Google Shape;26;p5"/>
-          <p:cNvSpPr txBox="1"/>
+          <p:cNvSpPr txBox="1">
+            <a:spLocks noGrp="1"/>
+          </p:cNvSpPr>
           <p:nvPr>
             <p:ph type="title"/>
           </p:nvPr>
@@ -3311,7 +3428,7 @@
           </a:prstGeom>
         </p:spPr>
         <p:txBody>
-          <a:bodyPr anchorCtr="0" anchor="b" bIns="91425" lIns="91425" spcFirstLastPara="1" rIns="91425" wrap="square" tIns="91425">
+          <a:bodyPr spcFirstLastPara="1" wrap="square" lIns="91425" tIns="91425" rIns="91425" bIns="91425" anchor="b" anchorCtr="0">
             <a:normAutofit/>
           </a:bodyPr>
           <a:lstStyle>
@@ -3415,15 +3532,19 @@
               <a:defRPr/>
             </a:lvl9pPr>
           </a:lstStyle>
-          <a:p/>
+          <a:p>
+            <a:endParaRPr/>
+          </a:p>
         </p:txBody>
       </p:sp>
       <p:sp>
         <p:nvSpPr>
           <p:cNvPr id="27" name="Google Shape;27;p5"/>
-          <p:cNvSpPr txBox="1"/>
+          <p:cNvSpPr txBox="1">
+            <a:spLocks noGrp="1"/>
+          </p:cNvSpPr>
           <p:nvPr>
-            <p:ph idx="1" type="body"/>
+            <p:ph type="body" idx="1"/>
           </p:nvPr>
         </p:nvSpPr>
         <p:spPr>
@@ -3436,11 +3557,11 @@
           </a:prstGeom>
         </p:spPr>
         <p:txBody>
-          <a:bodyPr anchorCtr="0" anchor="t" bIns="91425" lIns="91425" spcFirstLastPara="1" rIns="91425" wrap="square" tIns="91425">
+          <a:bodyPr spcFirstLastPara="1" wrap="square" lIns="91425" tIns="91425" rIns="91425" bIns="91425" anchor="t" anchorCtr="0">
             <a:normAutofit/>
           </a:bodyPr>
           <a:lstStyle>
-            <a:lvl1pPr indent="-317500" lvl="0" marL="457200">
+            <a:lvl1pPr marL="457200" lvl="0" indent="-317500">
               <a:spcBef>
                 <a:spcPts val="0"/>
               </a:spcBef>
@@ -3451,7 +3572,7 @@
               <a:buChar char="●"/>
               <a:defRPr sz="1400"/>
             </a:lvl1pPr>
-            <a:lvl2pPr indent="-304800" lvl="1" marL="914400">
+            <a:lvl2pPr marL="914400" lvl="1" indent="-304800">
               <a:spcBef>
                 <a:spcPts val="0"/>
               </a:spcBef>
@@ -3462,7 +3583,7 @@
               <a:buChar char="○"/>
               <a:defRPr sz="1200"/>
             </a:lvl2pPr>
-            <a:lvl3pPr indent="-304800" lvl="2" marL="1371600">
+            <a:lvl3pPr marL="1371600" lvl="2" indent="-304800">
               <a:spcBef>
                 <a:spcPts val="0"/>
               </a:spcBef>
@@ -3473,7 +3594,7 @@
               <a:buChar char="■"/>
               <a:defRPr sz="1200"/>
             </a:lvl3pPr>
-            <a:lvl4pPr indent="-304800" lvl="3" marL="1828800">
+            <a:lvl4pPr marL="1828800" lvl="3" indent="-304800">
               <a:spcBef>
                 <a:spcPts val="0"/>
               </a:spcBef>
@@ -3484,7 +3605,7 @@
               <a:buChar char="●"/>
               <a:defRPr sz="1200"/>
             </a:lvl4pPr>
-            <a:lvl5pPr indent="-304800" lvl="4" marL="2286000">
+            <a:lvl5pPr marL="2286000" lvl="4" indent="-304800">
               <a:spcBef>
                 <a:spcPts val="0"/>
               </a:spcBef>
@@ -3495,7 +3616,7 @@
               <a:buChar char="○"/>
               <a:defRPr sz="1200"/>
             </a:lvl5pPr>
-            <a:lvl6pPr indent="-304800" lvl="5" marL="2743200">
+            <a:lvl6pPr marL="2743200" lvl="5" indent="-304800">
               <a:spcBef>
                 <a:spcPts val="0"/>
               </a:spcBef>
@@ -3506,7 +3627,7 @@
               <a:buChar char="■"/>
               <a:defRPr sz="1200"/>
             </a:lvl6pPr>
-            <a:lvl7pPr indent="-304800" lvl="6" marL="3200400">
+            <a:lvl7pPr marL="3200400" lvl="6" indent="-304800">
               <a:spcBef>
                 <a:spcPts val="0"/>
               </a:spcBef>
@@ -3517,7 +3638,7 @@
               <a:buChar char="●"/>
               <a:defRPr sz="1200"/>
             </a:lvl7pPr>
-            <a:lvl8pPr indent="-304800" lvl="7" marL="3657600">
+            <a:lvl8pPr marL="3657600" lvl="7" indent="-304800">
               <a:spcBef>
                 <a:spcPts val="0"/>
               </a:spcBef>
@@ -3528,7 +3649,7 @@
               <a:buChar char="○"/>
               <a:defRPr sz="1200"/>
             </a:lvl8pPr>
-            <a:lvl9pPr indent="-304800" lvl="8" marL="4114800">
+            <a:lvl9pPr marL="4114800" lvl="8" indent="-304800">
               <a:spcBef>
                 <a:spcPts val="0"/>
               </a:spcBef>
@@ -3540,15 +3661,19 @@
               <a:defRPr sz="1200"/>
             </a:lvl9pPr>
           </a:lstStyle>
-          <a:p/>
+          <a:p>
+            <a:endParaRPr/>
+          </a:p>
         </p:txBody>
       </p:sp>
       <p:sp>
         <p:nvSpPr>
           <p:cNvPr id="28" name="Google Shape;28;p5"/>
-          <p:cNvSpPr txBox="1"/>
+          <p:cNvSpPr txBox="1">
+            <a:spLocks noGrp="1"/>
+          </p:cNvSpPr>
           <p:nvPr>
-            <p:ph idx="2" type="body"/>
+            <p:ph type="body" idx="2"/>
           </p:nvPr>
         </p:nvSpPr>
         <p:spPr>
@@ -3561,11 +3686,11 @@
           </a:prstGeom>
         </p:spPr>
         <p:txBody>
-          <a:bodyPr anchorCtr="0" anchor="t" bIns="91425" lIns="91425" spcFirstLastPara="1" rIns="91425" wrap="square" tIns="91425">
+          <a:bodyPr spcFirstLastPara="1" wrap="square" lIns="91425" tIns="91425" rIns="91425" bIns="91425" anchor="t" anchorCtr="0">
             <a:normAutofit/>
           </a:bodyPr>
           <a:lstStyle>
-            <a:lvl1pPr indent="-317500" lvl="0" marL="457200">
+            <a:lvl1pPr marL="457200" lvl="0" indent="-317500">
               <a:spcBef>
                 <a:spcPts val="0"/>
               </a:spcBef>
@@ -3576,7 +3701,7 @@
               <a:buChar char="●"/>
               <a:defRPr sz="1400"/>
             </a:lvl1pPr>
-            <a:lvl2pPr indent="-304800" lvl="1" marL="914400">
+            <a:lvl2pPr marL="914400" lvl="1" indent="-304800">
               <a:spcBef>
                 <a:spcPts val="0"/>
               </a:spcBef>
@@ -3587,7 +3712,7 @@
               <a:buChar char="○"/>
               <a:defRPr sz="1200"/>
             </a:lvl2pPr>
-            <a:lvl3pPr indent="-304800" lvl="2" marL="1371600">
+            <a:lvl3pPr marL="1371600" lvl="2" indent="-304800">
               <a:spcBef>
                 <a:spcPts val="0"/>
               </a:spcBef>
@@ -3598,7 +3723,7 @@
               <a:buChar char="■"/>
               <a:defRPr sz="1200"/>
             </a:lvl3pPr>
-            <a:lvl4pPr indent="-304800" lvl="3" marL="1828800">
+            <a:lvl4pPr marL="1828800" lvl="3" indent="-304800">
               <a:spcBef>
                 <a:spcPts val="0"/>
               </a:spcBef>
@@ -3609,7 +3734,7 @@
               <a:buChar char="●"/>
               <a:defRPr sz="1200"/>
             </a:lvl4pPr>
-            <a:lvl5pPr indent="-304800" lvl="4" marL="2286000">
+            <a:lvl5pPr marL="2286000" lvl="4" indent="-304800">
               <a:spcBef>
                 <a:spcPts val="0"/>
               </a:spcBef>
@@ -3620,7 +3745,7 @@
               <a:buChar char="○"/>
               <a:defRPr sz="1200"/>
             </a:lvl5pPr>
-            <a:lvl6pPr indent="-304800" lvl="5" marL="2743200">
+            <a:lvl6pPr marL="2743200" lvl="5" indent="-304800">
               <a:spcBef>
                 <a:spcPts val="0"/>
               </a:spcBef>
@@ -3631,7 +3756,7 @@
               <a:buChar char="■"/>
               <a:defRPr sz="1200"/>
             </a:lvl6pPr>
-            <a:lvl7pPr indent="-304800" lvl="6" marL="3200400">
+            <a:lvl7pPr marL="3200400" lvl="6" indent="-304800">
               <a:spcBef>
                 <a:spcPts val="0"/>
               </a:spcBef>
@@ -3642,7 +3767,7 @@
               <a:buChar char="●"/>
               <a:defRPr sz="1200"/>
             </a:lvl7pPr>
-            <a:lvl8pPr indent="-304800" lvl="7" marL="3657600">
+            <a:lvl8pPr marL="3657600" lvl="7" indent="-304800">
               <a:spcBef>
                 <a:spcPts val="0"/>
               </a:spcBef>
@@ -3653,7 +3778,7 @@
               <a:buChar char="○"/>
               <a:defRPr sz="1200"/>
             </a:lvl8pPr>
-            <a:lvl9pPr indent="-304800" lvl="8" marL="4114800">
+            <a:lvl9pPr marL="4114800" lvl="8" indent="-304800">
               <a:spcBef>
                 <a:spcPts val="0"/>
               </a:spcBef>
@@ -3665,15 +3790,19 @@
               <a:defRPr sz="1200"/>
             </a:lvl9pPr>
           </a:lstStyle>
-          <a:p/>
+          <a:p>
+            <a:endParaRPr/>
+          </a:p>
         </p:txBody>
       </p:sp>
       <p:sp>
         <p:nvSpPr>
           <p:cNvPr id="29" name="Google Shape;29;p5"/>
-          <p:cNvSpPr txBox="1"/>
+          <p:cNvSpPr txBox="1">
+            <a:spLocks noGrp="1"/>
+          </p:cNvSpPr>
           <p:nvPr>
-            <p:ph idx="12" type="sldNum"/>
+            <p:ph type="sldNum" idx="12"/>
           </p:nvPr>
         </p:nvSpPr>
         <p:spPr>
@@ -3686,7 +3815,7 @@
           </a:prstGeom>
         </p:spPr>
         <p:txBody>
-          <a:bodyPr anchorCtr="0" anchor="ctr" bIns="91425" lIns="91425" spcFirstLastPara="1" rIns="91425" wrap="square" tIns="91425">
+          <a:bodyPr spcFirstLastPara="1" wrap="square" lIns="91425" tIns="91425" rIns="91425" bIns="91425" anchor="ctr" anchorCtr="0">
             <a:normAutofit/>
           </a:bodyPr>
           <a:lstStyle>
@@ -3728,7 +3857,7 @@
             </a:lvl9pPr>
           </a:lstStyle>
           <a:p>
-            <a:pPr indent="0" lvl="0" marL="0" rtl="0" algn="r">
+            <a:pPr marL="0" lvl="0" indent="0" algn="r" rtl="0">
               <a:spcBef>
                 <a:spcPts val="0"/>
               </a:spcBef>
@@ -3739,7 +3868,7 @@
             </a:pPr>
             <a:fld id="{00000000-1234-1234-1234-123412341234}" type="slidenum">
               <a:rPr lang="es"/>
-              <a:t>‹#›</a:t>
+              <a:t>‹Nº›</a:t>
             </a:fld>
             <a:endParaRPr/>
           </a:p>
@@ -3754,11 +3883,11 @@
 </file>
 
 <file path=ppt/slideLayouts/slideLayout5.xml><?xml version="1.0" encoding="utf-8"?>
-<p:sldLayout xmlns:a="http://schemas.openxmlformats.org/drawingml/2006/main" xmlns:r="http://schemas.openxmlformats.org/officeDocument/2006/relationships" xmlns:mc="http://schemas.openxmlformats.org/markup-compatibility/2006" xmlns:mv="urn:schemas-microsoft-com:mac:vml" xmlns:p="http://schemas.openxmlformats.org/presentationml/2006/main" xmlns:c="http://schemas.openxmlformats.org/drawingml/2006/chart" xmlns:dgm="http://schemas.openxmlformats.org/drawingml/2006/diagram" xmlns:o="urn:schemas-microsoft-com:office:office" xmlns:v="urn:schemas-microsoft-com:vml" xmlns:pvml="urn:schemas-microsoft-com:office:powerpoint" xmlns:com="http://schemas.openxmlformats.org/drawingml/2006/compatibility" xmlns:p14="http://schemas.microsoft.com/office/powerpoint/2010/main" xmlns:p15="http://schemas.microsoft.com/office/powerpoint/2012/main" xmlns:ahyp="http://schemas.microsoft.com/office/drawing/2018/hyperlinkcolor" matchingName="Title only" type="titleOnly">
+<p:sldLayout xmlns:a="http://schemas.openxmlformats.org/drawingml/2006/main" xmlns:r="http://schemas.openxmlformats.org/officeDocument/2006/relationships" xmlns:p="http://schemas.openxmlformats.org/presentationml/2006/main" matchingName="Title only" type="titleOnly">
   <p:cSld name="TITLE_ONLY">
     <p:spTree>
       <p:nvGrpSpPr>
-        <p:cNvPr id="30" name="Shape 30"/>
+        <p:cNvPr id="1" name="Shape 30"/>
         <p:cNvGrpSpPr/>
         <p:nvPr/>
       </p:nvGrpSpPr>
@@ -3773,7 +3902,9 @@
       <p:sp>
         <p:nvSpPr>
           <p:cNvPr id="31" name="Google Shape;31;p6"/>
-          <p:cNvSpPr txBox="1"/>
+          <p:cNvSpPr txBox="1">
+            <a:spLocks noGrp="1"/>
+          </p:cNvSpPr>
           <p:nvPr>
             <p:ph type="title"/>
           </p:nvPr>
@@ -3788,7 +3919,7 @@
           </a:prstGeom>
         </p:spPr>
         <p:txBody>
-          <a:bodyPr anchorCtr="0" anchor="b" bIns="91425" lIns="91425" spcFirstLastPara="1" rIns="91425" wrap="square" tIns="91425">
+          <a:bodyPr spcFirstLastPara="1" wrap="square" lIns="91425" tIns="91425" rIns="91425" bIns="91425" anchor="b" anchorCtr="0">
             <a:normAutofit/>
           </a:bodyPr>
           <a:lstStyle>
@@ -3892,15 +4023,19 @@
               <a:defRPr/>
             </a:lvl9pPr>
           </a:lstStyle>
-          <a:p/>
+          <a:p>
+            <a:endParaRPr/>
+          </a:p>
         </p:txBody>
       </p:sp>
       <p:sp>
         <p:nvSpPr>
           <p:cNvPr id="32" name="Google Shape;32;p6"/>
-          <p:cNvSpPr txBox="1"/>
+          <p:cNvSpPr txBox="1">
+            <a:spLocks noGrp="1"/>
+          </p:cNvSpPr>
           <p:nvPr>
-            <p:ph idx="12" type="sldNum"/>
+            <p:ph type="sldNum" idx="12"/>
           </p:nvPr>
         </p:nvSpPr>
         <p:spPr>
@@ -3913,7 +4048,7 @@
           </a:prstGeom>
         </p:spPr>
         <p:txBody>
-          <a:bodyPr anchorCtr="0" anchor="ctr" bIns="91425" lIns="91425" spcFirstLastPara="1" rIns="91425" wrap="square" tIns="91425">
+          <a:bodyPr spcFirstLastPara="1" wrap="square" lIns="91425" tIns="91425" rIns="91425" bIns="91425" anchor="ctr" anchorCtr="0">
             <a:normAutofit/>
           </a:bodyPr>
           <a:lstStyle>
@@ -3955,7 +4090,7 @@
             </a:lvl9pPr>
           </a:lstStyle>
           <a:p>
-            <a:pPr indent="0" lvl="0" marL="0" rtl="0" algn="r">
+            <a:pPr marL="0" lvl="0" indent="0" algn="r" rtl="0">
               <a:spcBef>
                 <a:spcPts val="0"/>
               </a:spcBef>
@@ -3966,7 +4101,7 @@
             </a:pPr>
             <a:fld id="{00000000-1234-1234-1234-123412341234}" type="slidenum">
               <a:rPr lang="es"/>
-              <a:t>‹#›</a:t>
+              <a:t>‹Nº›</a:t>
             </a:fld>
             <a:endParaRPr/>
           </a:p>
@@ -3981,11 +4116,11 @@
 </file>
 
 <file path=ppt/slideLayouts/slideLayout6.xml><?xml version="1.0" encoding="utf-8"?>
-<p:sldLayout xmlns:a="http://schemas.openxmlformats.org/drawingml/2006/main" xmlns:r="http://schemas.openxmlformats.org/officeDocument/2006/relationships" xmlns:mc="http://schemas.openxmlformats.org/markup-compatibility/2006" xmlns:mv="urn:schemas-microsoft-com:mac:vml" xmlns:p="http://schemas.openxmlformats.org/presentationml/2006/main" xmlns:c="http://schemas.openxmlformats.org/drawingml/2006/chart" xmlns:dgm="http://schemas.openxmlformats.org/drawingml/2006/diagram" xmlns:o="urn:schemas-microsoft-com:office:office" xmlns:v="urn:schemas-microsoft-com:vml" xmlns:pvml="urn:schemas-microsoft-com:office:powerpoint" xmlns:com="http://schemas.openxmlformats.org/drawingml/2006/compatibility" xmlns:p14="http://schemas.microsoft.com/office/powerpoint/2010/main" xmlns:p15="http://schemas.microsoft.com/office/powerpoint/2012/main" xmlns:ahyp="http://schemas.microsoft.com/office/drawing/2018/hyperlinkcolor" matchingName="One column text">
+<p:sldLayout xmlns:a="http://schemas.openxmlformats.org/drawingml/2006/main" xmlns:r="http://schemas.openxmlformats.org/officeDocument/2006/relationships" xmlns:p="http://schemas.openxmlformats.org/presentationml/2006/main" matchingName="One column text">
   <p:cSld name="ONE_COLUMN_TEXT">
     <p:spTree>
       <p:nvGrpSpPr>
-        <p:cNvPr id="33" name="Shape 33"/>
+        <p:cNvPr id="1" name="Shape 33"/>
         <p:cNvGrpSpPr/>
         <p:nvPr/>
       </p:nvGrpSpPr>
@@ -4000,7 +4135,9 @@
       <p:sp>
         <p:nvSpPr>
           <p:cNvPr id="34" name="Google Shape;34;p7"/>
-          <p:cNvSpPr txBox="1"/>
+          <p:cNvSpPr txBox="1">
+            <a:spLocks noGrp="1"/>
+          </p:cNvSpPr>
           <p:nvPr>
             <p:ph type="title"/>
           </p:nvPr>
@@ -4015,7 +4152,7 @@
           </a:prstGeom>
         </p:spPr>
         <p:txBody>
-          <a:bodyPr anchorCtr="0" anchor="b" bIns="91425" lIns="91425" spcFirstLastPara="1" rIns="91425" wrap="square" tIns="91425">
+          <a:bodyPr spcFirstLastPara="1" wrap="square" lIns="91425" tIns="91425" rIns="91425" bIns="91425" anchor="b" anchorCtr="0">
             <a:normAutofit/>
           </a:bodyPr>
           <a:lstStyle>
@@ -4119,15 +4256,19 @@
               <a:defRPr sz="3000"/>
             </a:lvl9pPr>
           </a:lstStyle>
-          <a:p/>
+          <a:p>
+            <a:endParaRPr/>
+          </a:p>
         </p:txBody>
       </p:sp>
       <p:sp>
         <p:nvSpPr>
           <p:cNvPr id="35" name="Google Shape;35;p7"/>
-          <p:cNvSpPr txBox="1"/>
+          <p:cNvSpPr txBox="1">
+            <a:spLocks noGrp="1"/>
+          </p:cNvSpPr>
           <p:nvPr>
-            <p:ph idx="1" type="body"/>
+            <p:ph type="body" idx="1"/>
           </p:nvPr>
         </p:nvSpPr>
         <p:spPr>
@@ -4140,11 +4281,11 @@
           </a:prstGeom>
         </p:spPr>
         <p:txBody>
-          <a:bodyPr anchorCtr="0" anchor="t" bIns="91425" lIns="91425" spcFirstLastPara="1" rIns="91425" wrap="square" tIns="91425">
+          <a:bodyPr spcFirstLastPara="1" wrap="square" lIns="91425" tIns="91425" rIns="91425" bIns="91425" anchor="t" anchorCtr="0">
             <a:normAutofit/>
           </a:bodyPr>
           <a:lstStyle>
-            <a:lvl1pPr indent="-304800" lvl="0" marL="457200">
+            <a:lvl1pPr marL="457200" lvl="0" indent="-304800">
               <a:spcBef>
                 <a:spcPts val="0"/>
               </a:spcBef>
@@ -4155,7 +4296,7 @@
               <a:buChar char="●"/>
               <a:defRPr sz="1200"/>
             </a:lvl1pPr>
-            <a:lvl2pPr indent="-304800" lvl="1" marL="914400">
+            <a:lvl2pPr marL="914400" lvl="1" indent="-304800">
               <a:spcBef>
                 <a:spcPts val="0"/>
               </a:spcBef>
@@ -4166,7 +4307,7 @@
               <a:buChar char="○"/>
               <a:defRPr sz="1200"/>
             </a:lvl2pPr>
-            <a:lvl3pPr indent="-304800" lvl="2" marL="1371600">
+            <a:lvl3pPr marL="1371600" lvl="2" indent="-304800">
               <a:spcBef>
                 <a:spcPts val="0"/>
               </a:spcBef>
@@ -4177,7 +4318,7 @@
               <a:buChar char="■"/>
               <a:defRPr sz="1200"/>
             </a:lvl3pPr>
-            <a:lvl4pPr indent="-304800" lvl="3" marL="1828800">
+            <a:lvl4pPr marL="1828800" lvl="3" indent="-304800">
               <a:spcBef>
                 <a:spcPts val="0"/>
               </a:spcBef>
@@ -4188,7 +4329,7 @@
               <a:buChar char="●"/>
               <a:defRPr sz="1200"/>
             </a:lvl4pPr>
-            <a:lvl5pPr indent="-304800" lvl="4" marL="2286000">
+            <a:lvl5pPr marL="2286000" lvl="4" indent="-304800">
               <a:spcBef>
                 <a:spcPts val="0"/>
               </a:spcBef>
@@ -4199,7 +4340,7 @@
               <a:buChar char="○"/>
               <a:defRPr sz="1200"/>
             </a:lvl5pPr>
-            <a:lvl6pPr indent="-304800" lvl="5" marL="2743200">
+            <a:lvl6pPr marL="2743200" lvl="5" indent="-304800">
               <a:spcBef>
                 <a:spcPts val="0"/>
               </a:spcBef>
@@ -4210,7 +4351,7 @@
               <a:buChar char="■"/>
               <a:defRPr sz="1200"/>
             </a:lvl6pPr>
-            <a:lvl7pPr indent="-304800" lvl="6" marL="3200400">
+            <a:lvl7pPr marL="3200400" lvl="6" indent="-304800">
               <a:spcBef>
                 <a:spcPts val="0"/>
               </a:spcBef>
@@ -4221,7 +4362,7 @@
               <a:buChar char="●"/>
               <a:defRPr sz="1200"/>
             </a:lvl7pPr>
-            <a:lvl8pPr indent="-304800" lvl="7" marL="3657600">
+            <a:lvl8pPr marL="3657600" lvl="7" indent="-304800">
               <a:spcBef>
                 <a:spcPts val="0"/>
               </a:spcBef>
@@ -4232,7 +4373,7 @@
               <a:buChar char="○"/>
               <a:defRPr sz="1200"/>
             </a:lvl8pPr>
-            <a:lvl9pPr indent="-304800" lvl="8" marL="4114800">
+            <a:lvl9pPr marL="4114800" lvl="8" indent="-304800">
               <a:spcBef>
                 <a:spcPts val="0"/>
               </a:spcBef>
@@ -4244,15 +4385,19 @@
               <a:defRPr sz="1200"/>
             </a:lvl9pPr>
           </a:lstStyle>
-          <a:p/>
+          <a:p>
+            <a:endParaRPr/>
+          </a:p>
         </p:txBody>
       </p:sp>
       <p:sp>
         <p:nvSpPr>
           <p:cNvPr id="36" name="Google Shape;36;p7"/>
-          <p:cNvSpPr txBox="1"/>
+          <p:cNvSpPr txBox="1">
+            <a:spLocks noGrp="1"/>
+          </p:cNvSpPr>
           <p:nvPr>
-            <p:ph idx="12" type="sldNum"/>
+            <p:ph type="sldNum" idx="12"/>
           </p:nvPr>
         </p:nvSpPr>
         <p:spPr>
@@ -4265,7 +4410,7 @@
           </a:prstGeom>
         </p:spPr>
         <p:txBody>
-          <a:bodyPr anchorCtr="0" anchor="ctr" bIns="91425" lIns="91425" spcFirstLastPara="1" rIns="91425" wrap="square" tIns="91425">
+          <a:bodyPr spcFirstLastPara="1" wrap="square" lIns="91425" tIns="91425" rIns="91425" bIns="91425" anchor="ctr" anchorCtr="0">
             <a:normAutofit/>
           </a:bodyPr>
           <a:lstStyle>
@@ -4307,7 +4452,7 @@
             </a:lvl9pPr>
           </a:lstStyle>
           <a:p>
-            <a:pPr indent="0" lvl="0" marL="0" rtl="0" algn="r">
+            <a:pPr marL="0" lvl="0" indent="0" algn="r" rtl="0">
               <a:spcBef>
                 <a:spcPts val="0"/>
               </a:spcBef>
@@ -4318,7 +4463,7 @@
             </a:pPr>
             <a:fld id="{00000000-1234-1234-1234-123412341234}" type="slidenum">
               <a:rPr lang="es"/>
-              <a:t>‹#›</a:t>
+              <a:t>‹Nº›</a:t>
             </a:fld>
             <a:endParaRPr/>
           </a:p>
@@ -4333,11 +4478,11 @@
 </file>
 
 <file path=ppt/slideLayouts/slideLayout7.xml><?xml version="1.0" encoding="utf-8"?>
-<p:sldLayout xmlns:a="http://schemas.openxmlformats.org/drawingml/2006/main" xmlns:r="http://schemas.openxmlformats.org/officeDocument/2006/relationships" xmlns:mc="http://schemas.openxmlformats.org/markup-compatibility/2006" xmlns:mv="urn:schemas-microsoft-com:mac:vml" xmlns:p="http://schemas.openxmlformats.org/presentationml/2006/main" xmlns:c="http://schemas.openxmlformats.org/drawingml/2006/chart" xmlns:dgm="http://schemas.openxmlformats.org/drawingml/2006/diagram" xmlns:o="urn:schemas-microsoft-com:office:office" xmlns:v="urn:schemas-microsoft-com:vml" xmlns:pvml="urn:schemas-microsoft-com:office:powerpoint" xmlns:com="http://schemas.openxmlformats.org/drawingml/2006/compatibility" xmlns:p14="http://schemas.microsoft.com/office/powerpoint/2010/main" xmlns:p15="http://schemas.microsoft.com/office/powerpoint/2012/main" xmlns:ahyp="http://schemas.microsoft.com/office/drawing/2018/hyperlinkcolor" matchingName="Main point">
+<p:sldLayout xmlns:a="http://schemas.openxmlformats.org/drawingml/2006/main" xmlns:r="http://schemas.openxmlformats.org/officeDocument/2006/relationships" xmlns:p="http://schemas.openxmlformats.org/presentationml/2006/main" matchingName="Main point">
   <p:cSld name="MAIN_POINT">
     <p:spTree>
       <p:nvGrpSpPr>
-        <p:cNvPr id="37" name="Shape 37"/>
+        <p:cNvPr id="1" name="Shape 37"/>
         <p:cNvGrpSpPr/>
         <p:nvPr/>
       </p:nvGrpSpPr>
@@ -4371,12 +4516,12 @@
           </a:ln>
         </p:spPr>
         <p:txBody>
-          <a:bodyPr anchorCtr="0" anchor="ctr" bIns="91425" lIns="91425" spcFirstLastPara="1" rIns="91425" wrap="square" tIns="91425">
+          <a:bodyPr spcFirstLastPara="1" wrap="square" lIns="91425" tIns="91425" rIns="91425" bIns="91425" anchor="ctr" anchorCtr="0">
             <a:noAutofit/>
           </a:bodyPr>
           <a:lstStyle/>
           <a:p>
-            <a:pPr indent="0" lvl="0" marL="0" rtl="0" algn="l">
+            <a:pPr marL="0" lvl="0" indent="0" algn="l" rtl="0">
               <a:spcBef>
                 <a:spcPts val="0"/>
               </a:spcBef>
@@ -4385,9 +4530,6 @@
               </a:spcAft>
               <a:buNone/>
             </a:pPr>
-            <a:r>
-              <a:t/>
-            </a:r>
             <a:endParaRPr/>
           </a:p>
         </p:txBody>
@@ -4395,7 +4537,9 @@
       <p:sp>
         <p:nvSpPr>
           <p:cNvPr id="39" name="Google Shape;39;p8"/>
-          <p:cNvSpPr txBox="1"/>
+          <p:cNvSpPr txBox="1">
+            <a:spLocks noGrp="1"/>
+          </p:cNvSpPr>
           <p:nvPr>
             <p:ph type="title"/>
           </p:nvPr>
@@ -4410,7 +4554,7 @@
           </a:prstGeom>
         </p:spPr>
         <p:txBody>
-          <a:bodyPr anchorCtr="0" anchor="ctr" bIns="91425" lIns="91425" spcFirstLastPara="1" rIns="91425" wrap="square" tIns="91425">
+          <a:bodyPr spcFirstLastPara="1" wrap="square" lIns="91425" tIns="91425" rIns="91425" bIns="91425" anchor="ctr" anchorCtr="0">
             <a:normAutofit/>
           </a:bodyPr>
           <a:lstStyle>
@@ -4514,15 +4658,19 @@
               <a:defRPr sz="4800"/>
             </a:lvl9pPr>
           </a:lstStyle>
-          <a:p/>
+          <a:p>
+            <a:endParaRPr/>
+          </a:p>
         </p:txBody>
       </p:sp>
       <p:sp>
         <p:nvSpPr>
           <p:cNvPr id="40" name="Google Shape;40;p8"/>
-          <p:cNvSpPr txBox="1"/>
+          <p:cNvSpPr txBox="1">
+            <a:spLocks noGrp="1"/>
+          </p:cNvSpPr>
           <p:nvPr>
-            <p:ph idx="12" type="sldNum"/>
+            <p:ph type="sldNum" idx="12"/>
           </p:nvPr>
         </p:nvSpPr>
         <p:spPr>
@@ -4535,7 +4683,7 @@
           </a:prstGeom>
         </p:spPr>
         <p:txBody>
-          <a:bodyPr anchorCtr="0" anchor="ctr" bIns="91425" lIns="91425" spcFirstLastPara="1" rIns="91425" wrap="square" tIns="91425">
+          <a:bodyPr spcFirstLastPara="1" wrap="square" lIns="91425" tIns="91425" rIns="91425" bIns="91425" anchor="ctr" anchorCtr="0">
             <a:normAutofit/>
           </a:bodyPr>
           <a:lstStyle>
@@ -4577,7 +4725,7 @@
             </a:lvl9pPr>
           </a:lstStyle>
           <a:p>
-            <a:pPr indent="0" lvl="0" marL="0" rtl="0" algn="r">
+            <a:pPr marL="0" lvl="0" indent="0" algn="r" rtl="0">
               <a:spcBef>
                 <a:spcPts val="0"/>
               </a:spcBef>
@@ -4588,7 +4736,7 @@
             </a:pPr>
             <a:fld id="{00000000-1234-1234-1234-123412341234}" type="slidenum">
               <a:rPr lang="es"/>
-              <a:t>‹#›</a:t>
+              <a:t>‹Nº›</a:t>
             </a:fld>
             <a:endParaRPr/>
           </a:p>
@@ -4603,11 +4751,11 @@
 </file>
 
 <file path=ppt/slideLayouts/slideLayout8.xml><?xml version="1.0" encoding="utf-8"?>
-<p:sldLayout xmlns:a="http://schemas.openxmlformats.org/drawingml/2006/main" xmlns:r="http://schemas.openxmlformats.org/officeDocument/2006/relationships" xmlns:mc="http://schemas.openxmlformats.org/markup-compatibility/2006" xmlns:mv="urn:schemas-microsoft-com:mac:vml" xmlns:p="http://schemas.openxmlformats.org/presentationml/2006/main" xmlns:c="http://schemas.openxmlformats.org/drawingml/2006/chart" xmlns:dgm="http://schemas.openxmlformats.org/drawingml/2006/diagram" xmlns:o="urn:schemas-microsoft-com:office:office" xmlns:v="urn:schemas-microsoft-com:vml" xmlns:pvml="urn:schemas-microsoft-com:office:powerpoint" xmlns:com="http://schemas.openxmlformats.org/drawingml/2006/compatibility" xmlns:p14="http://schemas.microsoft.com/office/powerpoint/2010/main" xmlns:p15="http://schemas.microsoft.com/office/powerpoint/2012/main" xmlns:ahyp="http://schemas.microsoft.com/office/drawing/2018/hyperlinkcolor" matchingName="Section title and description">
+<p:sldLayout xmlns:a="http://schemas.openxmlformats.org/drawingml/2006/main" xmlns:r="http://schemas.openxmlformats.org/officeDocument/2006/relationships" xmlns:p="http://schemas.openxmlformats.org/presentationml/2006/main" matchingName="Section title and description">
   <p:cSld name="SECTION_TITLE_AND_DESCRIPTION">
     <p:spTree>
       <p:nvGrpSpPr>
-        <p:cNvPr id="41" name="Shape 41"/>
+        <p:cNvPr id="1" name="Shape 41"/>
         <p:cNvGrpSpPr/>
         <p:nvPr/>
       </p:nvGrpSpPr>
@@ -4641,12 +4789,12 @@
           </a:ln>
         </p:spPr>
         <p:txBody>
-          <a:bodyPr anchorCtr="0" anchor="ctr" bIns="91425" lIns="91425" spcFirstLastPara="1" rIns="91425" wrap="square" tIns="91425">
+          <a:bodyPr spcFirstLastPara="1" wrap="square" lIns="91425" tIns="91425" rIns="91425" bIns="91425" anchor="ctr" anchorCtr="0">
             <a:noAutofit/>
           </a:bodyPr>
           <a:lstStyle/>
           <a:p>
-            <a:pPr indent="0" lvl="0" marL="0" rtl="0" algn="l">
+            <a:pPr marL="0" lvl="0" indent="0" algn="l" rtl="0">
               <a:spcBef>
                 <a:spcPts val="0"/>
               </a:spcBef>
@@ -4655,9 +4803,6 @@
               </a:spcAft>
               <a:buNone/>
             </a:pPr>
-            <a:r>
-              <a:t/>
-            </a:r>
             <a:endParaRPr/>
           </a:p>
         </p:txBody>
@@ -4677,21 +4822,23 @@
             <a:avLst/>
           </a:prstGeom>
           <a:noFill/>
-          <a:ln cap="flat" cmpd="sng" w="19050">
+          <a:ln w="19050" cap="flat" cmpd="sng">
             <a:solidFill>
               <a:schemeClr val="lt1"/>
             </a:solidFill>
             <a:prstDash val="solid"/>
             <a:round/>
-            <a:headEnd len="sm" w="sm" type="none"/>
-            <a:tailEnd len="sm" w="sm" type="none"/>
+            <a:headEnd type="none" w="sm" len="sm"/>
+            <a:tailEnd type="none" w="sm" len="sm"/>
           </a:ln>
         </p:spPr>
       </p:cxnSp>
       <p:sp>
         <p:nvSpPr>
           <p:cNvPr id="44" name="Google Shape;44;p9"/>
-          <p:cNvSpPr txBox="1"/>
+          <p:cNvSpPr txBox="1">
+            <a:spLocks noGrp="1"/>
+          </p:cNvSpPr>
           <p:nvPr>
             <p:ph type="title"/>
           </p:nvPr>
@@ -4706,7 +4853,7 @@
           </a:prstGeom>
         </p:spPr>
         <p:txBody>
-          <a:bodyPr anchorCtr="0" anchor="b" bIns="91425" lIns="91425" spcFirstLastPara="1" rIns="91425" wrap="square" tIns="91425">
+          <a:bodyPr spcFirstLastPara="1" wrap="square" lIns="91425" tIns="91425" rIns="91425" bIns="91425" anchor="b" anchorCtr="0">
             <a:normAutofit/>
           </a:bodyPr>
           <a:lstStyle>
@@ -4873,15 +5020,19 @@
               </a:defRPr>
             </a:lvl9pPr>
           </a:lstStyle>
-          <a:p/>
+          <a:p>
+            <a:endParaRPr/>
+          </a:p>
         </p:txBody>
       </p:sp>
       <p:sp>
         <p:nvSpPr>
           <p:cNvPr id="45" name="Google Shape;45;p9"/>
-          <p:cNvSpPr txBox="1"/>
+          <p:cNvSpPr txBox="1">
+            <a:spLocks noGrp="1"/>
+          </p:cNvSpPr>
           <p:nvPr>
-            <p:ph idx="1" type="subTitle"/>
+            <p:ph type="subTitle" idx="1"/>
           </p:nvPr>
         </p:nvSpPr>
         <p:spPr>
@@ -4894,7 +5045,7 @@
           </a:prstGeom>
         </p:spPr>
         <p:txBody>
-          <a:bodyPr anchorCtr="0" anchor="t" bIns="91425" lIns="91425" spcFirstLastPara="1" rIns="91425" wrap="square" tIns="91425">
+          <a:bodyPr spcFirstLastPara="1" wrap="square" lIns="91425" tIns="91425" rIns="91425" bIns="91425" anchor="t" anchorCtr="0">
             <a:normAutofit/>
           </a:bodyPr>
           <a:lstStyle>
@@ -5079,15 +5230,19 @@
               </a:defRPr>
             </a:lvl9pPr>
           </a:lstStyle>
-          <a:p/>
+          <a:p>
+            <a:endParaRPr/>
+          </a:p>
         </p:txBody>
       </p:sp>
       <p:sp>
         <p:nvSpPr>
           <p:cNvPr id="46" name="Google Shape;46;p9"/>
-          <p:cNvSpPr txBox="1"/>
+          <p:cNvSpPr txBox="1">
+            <a:spLocks noGrp="1"/>
+          </p:cNvSpPr>
           <p:nvPr>
-            <p:ph idx="2" type="body"/>
+            <p:ph type="body" idx="2"/>
           </p:nvPr>
         </p:nvSpPr>
         <p:spPr>
@@ -5100,11 +5255,11 @@
           </a:prstGeom>
         </p:spPr>
         <p:txBody>
-          <a:bodyPr anchorCtr="0" anchor="ctr" bIns="91425" lIns="91425" spcFirstLastPara="1" rIns="91425" wrap="square" tIns="91425">
+          <a:bodyPr spcFirstLastPara="1" wrap="square" lIns="91425" tIns="91425" rIns="91425" bIns="91425" anchor="ctr" anchorCtr="0">
             <a:normAutofit/>
           </a:bodyPr>
           <a:lstStyle>
-            <a:lvl1pPr indent="-342900" lvl="0" marL="457200">
+            <a:lvl1pPr marL="457200" lvl="0" indent="-342900">
               <a:spcBef>
                 <a:spcPts val="0"/>
               </a:spcBef>
@@ -5122,7 +5277,7 @@
                 </a:solidFill>
               </a:defRPr>
             </a:lvl1pPr>
-            <a:lvl2pPr indent="-317500" lvl="1" marL="914400">
+            <a:lvl2pPr marL="914400" lvl="1" indent="-317500">
               <a:spcBef>
                 <a:spcPts val="0"/>
               </a:spcBef>
@@ -5140,7 +5295,7 @@
                 </a:solidFill>
               </a:defRPr>
             </a:lvl2pPr>
-            <a:lvl3pPr indent="-317500" lvl="2" marL="1371600">
+            <a:lvl3pPr marL="1371600" lvl="2" indent="-317500">
               <a:spcBef>
                 <a:spcPts val="0"/>
               </a:spcBef>
@@ -5158,7 +5313,7 @@
                 </a:solidFill>
               </a:defRPr>
             </a:lvl3pPr>
-            <a:lvl4pPr indent="-317500" lvl="3" marL="1828800">
+            <a:lvl4pPr marL="1828800" lvl="3" indent="-317500">
               <a:spcBef>
                 <a:spcPts val="0"/>
               </a:spcBef>
@@ -5176,7 +5331,7 @@
                 </a:solidFill>
               </a:defRPr>
             </a:lvl4pPr>
-            <a:lvl5pPr indent="-317500" lvl="4" marL="2286000">
+            <a:lvl5pPr marL="2286000" lvl="4" indent="-317500">
               <a:spcBef>
                 <a:spcPts val="0"/>
               </a:spcBef>
@@ -5194,7 +5349,7 @@
                 </a:solidFill>
               </a:defRPr>
             </a:lvl5pPr>
-            <a:lvl6pPr indent="-317500" lvl="5" marL="2743200">
+            <a:lvl6pPr marL="2743200" lvl="5" indent="-317500">
               <a:spcBef>
                 <a:spcPts val="0"/>
               </a:spcBef>
@@ -5212,7 +5367,7 @@
                 </a:solidFill>
               </a:defRPr>
             </a:lvl6pPr>
-            <a:lvl7pPr indent="-317500" lvl="6" marL="3200400">
+            <a:lvl7pPr marL="3200400" lvl="6" indent="-317500">
               <a:spcBef>
                 <a:spcPts val="0"/>
               </a:spcBef>
@@ -5230,7 +5385,7 @@
                 </a:solidFill>
               </a:defRPr>
             </a:lvl7pPr>
-            <a:lvl8pPr indent="-317500" lvl="7" marL="3657600">
+            <a:lvl8pPr marL="3657600" lvl="7" indent="-317500">
               <a:spcBef>
                 <a:spcPts val="0"/>
               </a:spcBef>
@@ -5248,7 +5403,7 @@
                 </a:solidFill>
               </a:defRPr>
             </a:lvl8pPr>
-            <a:lvl9pPr indent="-317500" lvl="8" marL="4114800">
+            <a:lvl9pPr marL="4114800" lvl="8" indent="-317500">
               <a:spcBef>
                 <a:spcPts val="0"/>
               </a:spcBef>
@@ -5267,15 +5422,19 @@
               </a:defRPr>
             </a:lvl9pPr>
           </a:lstStyle>
-          <a:p/>
+          <a:p>
+            <a:endParaRPr/>
+          </a:p>
         </p:txBody>
       </p:sp>
       <p:sp>
         <p:nvSpPr>
           <p:cNvPr id="47" name="Google Shape;47;p9"/>
-          <p:cNvSpPr txBox="1"/>
+          <p:cNvSpPr txBox="1">
+            <a:spLocks noGrp="1"/>
+          </p:cNvSpPr>
           <p:nvPr>
-            <p:ph idx="12" type="sldNum"/>
+            <p:ph type="sldNum" idx="12"/>
           </p:nvPr>
         </p:nvSpPr>
         <p:spPr>
@@ -5288,7 +5447,7 @@
           </a:prstGeom>
         </p:spPr>
         <p:txBody>
-          <a:bodyPr anchorCtr="0" anchor="ctr" bIns="91425" lIns="91425" spcFirstLastPara="1" rIns="91425" wrap="square" tIns="91425">
+          <a:bodyPr spcFirstLastPara="1" wrap="square" lIns="91425" tIns="91425" rIns="91425" bIns="91425" anchor="ctr" anchorCtr="0">
             <a:normAutofit/>
           </a:bodyPr>
           <a:lstStyle>
@@ -5366,7 +5525,7 @@
             </a:lvl9pPr>
           </a:lstStyle>
           <a:p>
-            <a:pPr indent="0" lvl="0" marL="0" rtl="0" algn="r">
+            <a:pPr marL="0" lvl="0" indent="0" algn="r" rtl="0">
               <a:spcBef>
                 <a:spcPts val="0"/>
               </a:spcBef>
@@ -5377,7 +5536,7 @@
             </a:pPr>
             <a:fld id="{00000000-1234-1234-1234-123412341234}" type="slidenum">
               <a:rPr lang="es"/>
-              <a:t>‹#›</a:t>
+              <a:t>‹Nº›</a:t>
             </a:fld>
             <a:endParaRPr/>
           </a:p>
@@ -5392,11 +5551,11 @@
 </file>
 
 <file path=ppt/slideLayouts/slideLayout9.xml><?xml version="1.0" encoding="utf-8"?>
-<p:sldLayout xmlns:a="http://schemas.openxmlformats.org/drawingml/2006/main" xmlns:r="http://schemas.openxmlformats.org/officeDocument/2006/relationships" xmlns:mc="http://schemas.openxmlformats.org/markup-compatibility/2006" xmlns:mv="urn:schemas-microsoft-com:mac:vml" xmlns:p="http://schemas.openxmlformats.org/presentationml/2006/main" xmlns:c="http://schemas.openxmlformats.org/drawingml/2006/chart" xmlns:dgm="http://schemas.openxmlformats.org/drawingml/2006/diagram" xmlns:o="urn:schemas-microsoft-com:office:office" xmlns:v="urn:schemas-microsoft-com:vml" xmlns:pvml="urn:schemas-microsoft-com:office:powerpoint" xmlns:com="http://schemas.openxmlformats.org/drawingml/2006/compatibility" xmlns:p14="http://schemas.microsoft.com/office/powerpoint/2010/main" xmlns:p15="http://schemas.microsoft.com/office/powerpoint/2012/main" xmlns:ahyp="http://schemas.microsoft.com/office/drawing/2018/hyperlinkcolor" matchingName="Caption">
+<p:sldLayout xmlns:a="http://schemas.openxmlformats.org/drawingml/2006/main" xmlns:r="http://schemas.openxmlformats.org/officeDocument/2006/relationships" xmlns:p="http://schemas.openxmlformats.org/presentationml/2006/main" matchingName="Caption">
   <p:cSld name="CAPTION_ONLY">
     <p:spTree>
       <p:nvGrpSpPr>
-        <p:cNvPr id="48" name="Shape 48"/>
+        <p:cNvPr id="1" name="Shape 48"/>
         <p:cNvGrpSpPr/>
         <p:nvPr/>
       </p:nvGrpSpPr>
@@ -5411,9 +5570,11 @@
       <p:sp>
         <p:nvSpPr>
           <p:cNvPr id="49" name="Google Shape;49;p10"/>
-          <p:cNvSpPr txBox="1"/>
+          <p:cNvSpPr txBox="1">
+            <a:spLocks noGrp="1"/>
+          </p:cNvSpPr>
           <p:nvPr>
-            <p:ph idx="1" type="body"/>
+            <p:ph type="body" idx="1"/>
           </p:nvPr>
         </p:nvSpPr>
         <p:spPr>
@@ -5426,11 +5587,11 @@
           </a:prstGeom>
         </p:spPr>
         <p:txBody>
-          <a:bodyPr anchorCtr="0" anchor="ctr" bIns="91425" lIns="91425" spcFirstLastPara="1" rIns="91425" wrap="square" tIns="91425">
+          <a:bodyPr spcFirstLastPara="1" wrap="square" lIns="91425" tIns="91425" rIns="91425" bIns="91425" anchor="ctr" anchorCtr="0">
             <a:normAutofit/>
           </a:bodyPr>
           <a:lstStyle>
-            <a:lvl1pPr indent="-228600" lvl="0" marL="457200">
+            <a:lvl1pPr marL="457200" lvl="0" indent="-228600">
               <a:lnSpc>
                 <a:spcPct val="100000"/>
               </a:lnSpc>
@@ -5451,15 +5612,19 @@
               </a:defRPr>
             </a:lvl1pPr>
           </a:lstStyle>
-          <a:p/>
+          <a:p>
+            <a:endParaRPr/>
+          </a:p>
         </p:txBody>
       </p:sp>
       <p:sp>
         <p:nvSpPr>
           <p:cNvPr id="50" name="Google Shape;50;p10"/>
-          <p:cNvSpPr txBox="1"/>
+          <p:cNvSpPr txBox="1">
+            <a:spLocks noGrp="1"/>
+          </p:cNvSpPr>
           <p:nvPr>
-            <p:ph idx="12" type="sldNum"/>
+            <p:ph type="sldNum" idx="12"/>
           </p:nvPr>
         </p:nvSpPr>
         <p:spPr>
@@ -5472,7 +5637,7 @@
           </a:prstGeom>
         </p:spPr>
         <p:txBody>
-          <a:bodyPr anchorCtr="0" anchor="ctr" bIns="91425" lIns="91425" spcFirstLastPara="1" rIns="91425" wrap="square" tIns="91425">
+          <a:bodyPr spcFirstLastPara="1" wrap="square" lIns="91425" tIns="91425" rIns="91425" bIns="91425" anchor="ctr" anchorCtr="0">
             <a:normAutofit/>
           </a:bodyPr>
           <a:lstStyle>
@@ -5514,7 +5679,7 @@
             </a:lvl9pPr>
           </a:lstStyle>
           <a:p>
-            <a:pPr indent="0" lvl="0" marL="0" rtl="0" algn="r">
+            <a:pPr marL="0" lvl="0" indent="0" algn="r" rtl="0">
               <a:spcBef>
                 <a:spcPts val="0"/>
               </a:spcBef>
@@ -5525,7 +5690,7 @@
             </a:pPr>
             <a:fld id="{00000000-1234-1234-1234-123412341234}" type="slidenum">
               <a:rPr lang="es"/>
-              <a:t>‹#›</a:t>
+              <a:t>‹Nº›</a:t>
             </a:fld>
             <a:endParaRPr/>
           </a:p>
@@ -5540,18 +5705,19 @@
 </file>
 
 <file path=ppt/slideMasters/slideMaster1.xml><?xml version="1.0" encoding="utf-8"?>
-<p:sldMaster xmlns:a="http://schemas.openxmlformats.org/drawingml/2006/main" xmlns:r="http://schemas.openxmlformats.org/officeDocument/2006/relationships" xmlns:mc="http://schemas.openxmlformats.org/markup-compatibility/2006" xmlns:mv="urn:schemas-microsoft-com:mac:vml" xmlns:p="http://schemas.openxmlformats.org/presentationml/2006/main" xmlns:c="http://schemas.openxmlformats.org/drawingml/2006/chart" xmlns:dgm="http://schemas.openxmlformats.org/drawingml/2006/diagram" xmlns:o="urn:schemas-microsoft-com:office:office" xmlns:v="urn:schemas-microsoft-com:vml" xmlns:pvml="urn:schemas-microsoft-com:office:powerpoint" xmlns:com="http://schemas.openxmlformats.org/drawingml/2006/compatibility" xmlns:p14="http://schemas.microsoft.com/office/powerpoint/2010/main" xmlns:p15="http://schemas.microsoft.com/office/powerpoint/2012/main" xmlns:ahyp="http://schemas.microsoft.com/office/drawing/2018/hyperlinkcolor">
+<p:sldMaster xmlns:a="http://schemas.openxmlformats.org/drawingml/2006/main" xmlns:r="http://schemas.openxmlformats.org/officeDocument/2006/relationships" xmlns:p="http://schemas.openxmlformats.org/presentationml/2006/main">
   <p:cSld name="luxe">
     <p:bg>
       <p:bgPr>
         <a:solidFill>
           <a:schemeClr val="lt1"/>
         </a:solidFill>
+        <a:effectLst/>
       </p:bgPr>
     </p:bg>
     <p:spTree>
       <p:nvGrpSpPr>
-        <p:cNvPr id="5" name="Shape 5"/>
+        <p:cNvPr id="1" name="Shape 5"/>
         <p:cNvGrpSpPr/>
         <p:nvPr/>
       </p:nvGrpSpPr>
@@ -5566,7 +5732,9 @@
       <p:sp>
         <p:nvSpPr>
           <p:cNvPr id="6" name="Google Shape;6;p1"/>
-          <p:cNvSpPr txBox="1"/>
+          <p:cNvSpPr txBox="1">
+            <a:spLocks noGrp="1"/>
+          </p:cNvSpPr>
           <p:nvPr>
             <p:ph type="title"/>
           </p:nvPr>
@@ -5585,7 +5753,7 @@
           </a:ln>
         </p:spPr>
         <p:txBody>
-          <a:bodyPr anchorCtr="0" anchor="b" bIns="91425" lIns="91425" spcFirstLastPara="1" rIns="91425" wrap="square" tIns="91425">
+          <a:bodyPr spcFirstLastPara="1" wrap="square" lIns="91425" tIns="91425" rIns="91425" bIns="91425" anchor="b" anchorCtr="0">
             <a:normAutofit/>
           </a:bodyPr>
           <a:lstStyle>
@@ -5797,15 +5965,19 @@
               </a:defRPr>
             </a:lvl9pPr>
           </a:lstStyle>
-          <a:p/>
+          <a:p>
+            <a:endParaRPr/>
+          </a:p>
         </p:txBody>
       </p:sp>
       <p:sp>
         <p:nvSpPr>
           <p:cNvPr id="7" name="Google Shape;7;p1"/>
-          <p:cNvSpPr txBox="1"/>
+          <p:cNvSpPr txBox="1">
+            <a:spLocks noGrp="1"/>
+          </p:cNvSpPr>
           <p:nvPr>
-            <p:ph idx="1" type="body"/>
+            <p:ph type="body" idx="1"/>
           </p:nvPr>
         </p:nvSpPr>
         <p:spPr>
@@ -5822,11 +5994,11 @@
           </a:ln>
         </p:spPr>
         <p:txBody>
-          <a:bodyPr anchorCtr="0" anchor="t" bIns="91425" lIns="91425" spcFirstLastPara="1" rIns="91425" wrap="square" tIns="91425">
+          <a:bodyPr spcFirstLastPara="1" wrap="square" lIns="91425" tIns="91425" rIns="91425" bIns="91425" anchor="t" anchorCtr="0">
             <a:normAutofit/>
           </a:bodyPr>
           <a:lstStyle>
-            <a:lvl1pPr indent="-342900" lvl="0" marL="457200">
+            <a:lvl1pPr marL="457200" lvl="0" indent="-342900">
               <a:lnSpc>
                 <a:spcPct val="115000"/>
               </a:lnSpc>
@@ -5852,7 +6024,7 @@
                 <a:sym typeface="Open Sans"/>
               </a:defRPr>
             </a:lvl1pPr>
-            <a:lvl2pPr indent="-317500" lvl="1" marL="914400">
+            <a:lvl2pPr marL="914400" lvl="1" indent="-317500">
               <a:lnSpc>
                 <a:spcPct val="115000"/>
               </a:lnSpc>
@@ -5878,7 +6050,7 @@
                 <a:sym typeface="Open Sans"/>
               </a:defRPr>
             </a:lvl2pPr>
-            <a:lvl3pPr indent="-317500" lvl="2" marL="1371600">
+            <a:lvl3pPr marL="1371600" lvl="2" indent="-317500">
               <a:lnSpc>
                 <a:spcPct val="115000"/>
               </a:lnSpc>
@@ -5904,7 +6076,7 @@
                 <a:sym typeface="Open Sans"/>
               </a:defRPr>
             </a:lvl3pPr>
-            <a:lvl4pPr indent="-317500" lvl="3" marL="1828800">
+            <a:lvl4pPr marL="1828800" lvl="3" indent="-317500">
               <a:lnSpc>
                 <a:spcPct val="115000"/>
               </a:lnSpc>
@@ -5930,7 +6102,7 @@
                 <a:sym typeface="Open Sans"/>
               </a:defRPr>
             </a:lvl4pPr>
-            <a:lvl5pPr indent="-317500" lvl="4" marL="2286000">
+            <a:lvl5pPr marL="2286000" lvl="4" indent="-317500">
               <a:lnSpc>
                 <a:spcPct val="115000"/>
               </a:lnSpc>
@@ -5956,7 +6128,7 @@
                 <a:sym typeface="Open Sans"/>
               </a:defRPr>
             </a:lvl5pPr>
-            <a:lvl6pPr indent="-317500" lvl="5" marL="2743200">
+            <a:lvl6pPr marL="2743200" lvl="5" indent="-317500">
               <a:lnSpc>
                 <a:spcPct val="115000"/>
               </a:lnSpc>
@@ -5982,7 +6154,7 @@
                 <a:sym typeface="Open Sans"/>
               </a:defRPr>
             </a:lvl6pPr>
-            <a:lvl7pPr indent="-317500" lvl="6" marL="3200400">
+            <a:lvl7pPr marL="3200400" lvl="6" indent="-317500">
               <a:lnSpc>
                 <a:spcPct val="115000"/>
               </a:lnSpc>
@@ -6008,7 +6180,7 @@
                 <a:sym typeface="Open Sans"/>
               </a:defRPr>
             </a:lvl7pPr>
-            <a:lvl8pPr indent="-317500" lvl="7" marL="3657600">
+            <a:lvl8pPr marL="3657600" lvl="7" indent="-317500">
               <a:lnSpc>
                 <a:spcPct val="115000"/>
               </a:lnSpc>
@@ -6034,7 +6206,7 @@
                 <a:sym typeface="Open Sans"/>
               </a:defRPr>
             </a:lvl8pPr>
-            <a:lvl9pPr indent="-317500" lvl="8" marL="4114800">
+            <a:lvl9pPr marL="4114800" lvl="8" indent="-317500">
               <a:lnSpc>
                 <a:spcPct val="115000"/>
               </a:lnSpc>
@@ -6061,15 +6233,19 @@
               </a:defRPr>
             </a:lvl9pPr>
           </a:lstStyle>
-          <a:p/>
+          <a:p>
+            <a:endParaRPr/>
+          </a:p>
         </p:txBody>
       </p:sp>
       <p:sp>
         <p:nvSpPr>
           <p:cNvPr id="8" name="Google Shape;8;p1"/>
-          <p:cNvSpPr txBox="1"/>
+          <p:cNvSpPr txBox="1">
+            <a:spLocks noGrp="1"/>
+          </p:cNvSpPr>
           <p:nvPr>
-            <p:ph idx="12" type="sldNum"/>
+            <p:ph type="sldNum" idx="12"/>
           </p:nvPr>
         </p:nvSpPr>
         <p:spPr>
@@ -6086,7 +6262,7 @@
           </a:ln>
         </p:spPr>
         <p:txBody>
-          <a:bodyPr anchorCtr="0" anchor="ctr" bIns="91425" lIns="91425" spcFirstLastPara="1" rIns="91425" wrap="square" tIns="91425">
+          <a:bodyPr spcFirstLastPara="1" wrap="square" lIns="91425" tIns="91425" rIns="91425" bIns="91425" anchor="ctr" anchorCtr="0">
             <a:normAutofit/>
           </a:bodyPr>
           <a:lstStyle>
@@ -6200,7 +6376,7 @@
             </a:lvl9pPr>
           </a:lstStyle>
           <a:p>
-            <a:pPr indent="0" lvl="0" marL="0" rtl="0" algn="r">
+            <a:pPr marL="0" lvl="0" indent="0" algn="r" rtl="0">
               <a:spcBef>
                 <a:spcPts val="0"/>
               </a:spcBef>
@@ -6211,7 +6387,7 @@
             </a:pPr>
             <a:fld id="{00000000-1234-1234-1234-123412341234}" type="slidenum">
               <a:rPr lang="es"/>
-              <a:t>‹#›</a:t>
+              <a:t>‹Nº›</a:t>
             </a:fld>
             <a:endParaRPr/>
           </a:p>
@@ -6219,7 +6395,7 @@
       </p:sp>
     </p:spTree>
   </p:cSld>
-  <p:clrMap accent1="accent1" accent2="accent2" accent3="accent3" accent4="accent4" accent5="accent5" accent6="accent6" bg1="lt1" bg2="dk2" tx1="dk1" tx2="lt2" folHlink="folHlink" hlink="hlink"/>
+  <p:clrMap bg1="lt1" tx1="dk1" bg2="dk2" tx2="lt2" accent1="accent1" accent2="accent2" accent3="accent3" accent4="accent4" accent5="accent5" accent6="accent6" hlink="hlink" folHlink="folHlink"/>
   <p:sldLayoutIdLst>
     <p:sldLayoutId id="2147483648" r:id="rId1"/>
     <p:sldLayoutId id="2147483649" r:id="rId2"/>
@@ -6233,10 +6409,10 @@
     <p:sldLayoutId id="2147483657" r:id="rId10"/>
     <p:sldLayoutId id="2147483658" r:id="rId11"/>
   </p:sldLayoutIdLst>
-  <p:hf dt="0" ftr="0" hdr="0"/>
+  <p:hf hdr="0" ftr="0" dt="0"/>
   <p:txStyles>
     <p:titleStyle>
-      <a:defPPr lvl="0" marR="0" rtl="0" algn="l">
+      <a:defPPr marR="0" lvl="0" algn="l" rtl="0">
         <a:lnSpc>
           <a:spcPct val="100000"/>
         </a:lnSpc>
@@ -6247,7 +6423,7 @@
           <a:spcPts val="0"/>
         </a:spcAft>
       </a:defPPr>
-      <a:lvl1pPr lvl="0" marR="0" rtl="0" algn="l">
+      <a:lvl1pPr marR="0" lvl="0" algn="l" rtl="0">
         <a:lnSpc>
           <a:spcPct val="100000"/>
         </a:lnSpc>
@@ -6261,7 +6437,7 @@
           <a:srgbClr val="000000"/>
         </a:buClr>
         <a:buFont typeface="Arial"/>
-        <a:defRPr b="0" i="0" sz="1400" u="none" cap="none" strike="noStrike">
+        <a:defRPr sz="1400" b="0" i="0" u="none" strike="noStrike" cap="none">
           <a:solidFill>
             <a:srgbClr val="000000"/>
           </a:solidFill>
@@ -6271,7 +6447,7 @@
           <a:sym typeface="Arial"/>
         </a:defRPr>
       </a:lvl1pPr>
-      <a:lvl2pPr lvl="1" marR="0" rtl="0" algn="l">
+      <a:lvl2pPr marR="0" lvl="1" algn="l" rtl="0">
         <a:lnSpc>
           <a:spcPct val="100000"/>
         </a:lnSpc>
@@ -6285,7 +6461,7 @@
           <a:srgbClr val="000000"/>
         </a:buClr>
         <a:buFont typeface="Arial"/>
-        <a:defRPr b="0" i="0" sz="1400" u="none" cap="none" strike="noStrike">
+        <a:defRPr sz="1400" b="0" i="0" u="none" strike="noStrike" cap="none">
           <a:solidFill>
             <a:srgbClr val="000000"/>
           </a:solidFill>
@@ -6295,7 +6471,7 @@
           <a:sym typeface="Arial"/>
         </a:defRPr>
       </a:lvl2pPr>
-      <a:lvl3pPr lvl="2" marR="0" rtl="0" algn="l">
+      <a:lvl3pPr marR="0" lvl="2" algn="l" rtl="0">
         <a:lnSpc>
           <a:spcPct val="100000"/>
         </a:lnSpc>
@@ -6309,7 +6485,7 @@
           <a:srgbClr val="000000"/>
         </a:buClr>
         <a:buFont typeface="Arial"/>
-        <a:defRPr b="0" i="0" sz="1400" u="none" cap="none" strike="noStrike">
+        <a:defRPr sz="1400" b="0" i="0" u="none" strike="noStrike" cap="none">
           <a:solidFill>
             <a:srgbClr val="000000"/>
           </a:solidFill>
@@ -6319,7 +6495,7 @@
           <a:sym typeface="Arial"/>
         </a:defRPr>
       </a:lvl3pPr>
-      <a:lvl4pPr lvl="3" marR="0" rtl="0" algn="l">
+      <a:lvl4pPr marR="0" lvl="3" algn="l" rtl="0">
         <a:lnSpc>
           <a:spcPct val="100000"/>
         </a:lnSpc>
@@ -6333,7 +6509,7 @@
           <a:srgbClr val="000000"/>
         </a:buClr>
         <a:buFont typeface="Arial"/>
-        <a:defRPr b="0" i="0" sz="1400" u="none" cap="none" strike="noStrike">
+        <a:defRPr sz="1400" b="0" i="0" u="none" strike="noStrike" cap="none">
           <a:solidFill>
             <a:srgbClr val="000000"/>
           </a:solidFill>
@@ -6343,7 +6519,7 @@
           <a:sym typeface="Arial"/>
         </a:defRPr>
       </a:lvl4pPr>
-      <a:lvl5pPr lvl="4" marR="0" rtl="0" algn="l">
+      <a:lvl5pPr marR="0" lvl="4" algn="l" rtl="0">
         <a:lnSpc>
           <a:spcPct val="100000"/>
         </a:lnSpc>
@@ -6357,7 +6533,7 @@
           <a:srgbClr val="000000"/>
         </a:buClr>
         <a:buFont typeface="Arial"/>
-        <a:defRPr b="0" i="0" sz="1400" u="none" cap="none" strike="noStrike">
+        <a:defRPr sz="1400" b="0" i="0" u="none" strike="noStrike" cap="none">
           <a:solidFill>
             <a:srgbClr val="000000"/>
           </a:solidFill>
@@ -6367,7 +6543,7 @@
           <a:sym typeface="Arial"/>
         </a:defRPr>
       </a:lvl5pPr>
-      <a:lvl6pPr lvl="5" marR="0" rtl="0" algn="l">
+      <a:lvl6pPr marR="0" lvl="5" algn="l" rtl="0">
         <a:lnSpc>
           <a:spcPct val="100000"/>
         </a:lnSpc>
@@ -6381,7 +6557,7 @@
           <a:srgbClr val="000000"/>
         </a:buClr>
         <a:buFont typeface="Arial"/>
-        <a:defRPr b="0" i="0" sz="1400" u="none" cap="none" strike="noStrike">
+        <a:defRPr sz="1400" b="0" i="0" u="none" strike="noStrike" cap="none">
           <a:solidFill>
             <a:srgbClr val="000000"/>
           </a:solidFill>
@@ -6391,7 +6567,7 @@
           <a:sym typeface="Arial"/>
         </a:defRPr>
       </a:lvl6pPr>
-      <a:lvl7pPr lvl="6" marR="0" rtl="0" algn="l">
+      <a:lvl7pPr marR="0" lvl="6" algn="l" rtl="0">
         <a:lnSpc>
           <a:spcPct val="100000"/>
         </a:lnSpc>
@@ -6405,7 +6581,7 @@
           <a:srgbClr val="000000"/>
         </a:buClr>
         <a:buFont typeface="Arial"/>
-        <a:defRPr b="0" i="0" sz="1400" u="none" cap="none" strike="noStrike">
+        <a:defRPr sz="1400" b="0" i="0" u="none" strike="noStrike" cap="none">
           <a:solidFill>
             <a:srgbClr val="000000"/>
           </a:solidFill>
@@ -6415,7 +6591,7 @@
           <a:sym typeface="Arial"/>
         </a:defRPr>
       </a:lvl7pPr>
-      <a:lvl8pPr lvl="7" marR="0" rtl="0" algn="l">
+      <a:lvl8pPr marR="0" lvl="7" algn="l" rtl="0">
         <a:lnSpc>
           <a:spcPct val="100000"/>
         </a:lnSpc>
@@ -6429,7 +6605,7 @@
           <a:srgbClr val="000000"/>
         </a:buClr>
         <a:buFont typeface="Arial"/>
-        <a:defRPr b="0" i="0" sz="1400" u="none" cap="none" strike="noStrike">
+        <a:defRPr sz="1400" b="0" i="0" u="none" strike="noStrike" cap="none">
           <a:solidFill>
             <a:srgbClr val="000000"/>
           </a:solidFill>
@@ -6439,7 +6615,7 @@
           <a:sym typeface="Arial"/>
         </a:defRPr>
       </a:lvl8pPr>
-      <a:lvl9pPr lvl="8" marR="0" rtl="0" algn="l">
+      <a:lvl9pPr marR="0" lvl="8" algn="l" rtl="0">
         <a:lnSpc>
           <a:spcPct val="100000"/>
         </a:lnSpc>
@@ -6453,7 +6629,7 @@
           <a:srgbClr val="000000"/>
         </a:buClr>
         <a:buFont typeface="Arial"/>
-        <a:defRPr b="0" i="0" sz="1400" u="none" cap="none" strike="noStrike">
+        <a:defRPr sz="1400" b="0" i="0" u="none" strike="noStrike" cap="none">
           <a:solidFill>
             <a:srgbClr val="000000"/>
           </a:solidFill>
@@ -6465,7 +6641,7 @@
       </a:lvl9pPr>
     </p:titleStyle>
     <p:bodyStyle>
-      <a:defPPr lvl="0" marR="0" rtl="0" algn="l">
+      <a:defPPr marR="0" lvl="0" algn="l" rtl="0">
         <a:lnSpc>
           <a:spcPct val="100000"/>
         </a:lnSpc>
@@ -6476,7 +6652,7 @@
           <a:spcPts val="0"/>
         </a:spcAft>
       </a:defPPr>
-      <a:lvl1pPr lvl="0" marR="0" rtl="0" algn="l">
+      <a:lvl1pPr marR="0" lvl="0" algn="l" rtl="0">
         <a:lnSpc>
           <a:spcPct val="100000"/>
         </a:lnSpc>
@@ -6490,7 +6666,7 @@
           <a:srgbClr val="000000"/>
         </a:buClr>
         <a:buFont typeface="Arial"/>
-        <a:defRPr b="0" i="0" sz="1400" u="none" cap="none" strike="noStrike">
+        <a:defRPr sz="1400" b="0" i="0" u="none" strike="noStrike" cap="none">
           <a:solidFill>
             <a:srgbClr val="000000"/>
           </a:solidFill>
@@ -6500,7 +6676,7 @@
           <a:sym typeface="Arial"/>
         </a:defRPr>
       </a:lvl1pPr>
-      <a:lvl2pPr lvl="1" marR="0" rtl="0" algn="l">
+      <a:lvl2pPr marR="0" lvl="1" algn="l" rtl="0">
         <a:lnSpc>
           <a:spcPct val="100000"/>
         </a:lnSpc>
@@ -6514,7 +6690,7 @@
           <a:srgbClr val="000000"/>
         </a:buClr>
         <a:buFont typeface="Arial"/>
-        <a:defRPr b="0" i="0" sz="1400" u="none" cap="none" strike="noStrike">
+        <a:defRPr sz="1400" b="0" i="0" u="none" strike="noStrike" cap="none">
           <a:solidFill>
             <a:srgbClr val="000000"/>
           </a:solidFill>
@@ -6524,7 +6700,7 @@
           <a:sym typeface="Arial"/>
         </a:defRPr>
       </a:lvl2pPr>
-      <a:lvl3pPr lvl="2" marR="0" rtl="0" algn="l">
+      <a:lvl3pPr marR="0" lvl="2" algn="l" rtl="0">
         <a:lnSpc>
           <a:spcPct val="100000"/>
         </a:lnSpc>
@@ -6538,7 +6714,7 @@
           <a:srgbClr val="000000"/>
         </a:buClr>
         <a:buFont typeface="Arial"/>
-        <a:defRPr b="0" i="0" sz="1400" u="none" cap="none" strike="noStrike">
+        <a:defRPr sz="1400" b="0" i="0" u="none" strike="noStrike" cap="none">
           <a:solidFill>
             <a:srgbClr val="000000"/>
           </a:solidFill>
@@ -6548,7 +6724,7 @@
           <a:sym typeface="Arial"/>
         </a:defRPr>
       </a:lvl3pPr>
-      <a:lvl4pPr lvl="3" marR="0" rtl="0" algn="l">
+      <a:lvl4pPr marR="0" lvl="3" algn="l" rtl="0">
         <a:lnSpc>
           <a:spcPct val="100000"/>
         </a:lnSpc>
@@ -6562,7 +6738,7 @@
           <a:srgbClr val="000000"/>
         </a:buClr>
         <a:buFont typeface="Arial"/>
-        <a:defRPr b="0" i="0" sz="1400" u="none" cap="none" strike="noStrike">
+        <a:defRPr sz="1400" b="0" i="0" u="none" strike="noStrike" cap="none">
           <a:solidFill>
             <a:srgbClr val="000000"/>
           </a:solidFill>
@@ -6572,7 +6748,7 @@
           <a:sym typeface="Arial"/>
         </a:defRPr>
       </a:lvl4pPr>
-      <a:lvl5pPr lvl="4" marR="0" rtl="0" algn="l">
+      <a:lvl5pPr marR="0" lvl="4" algn="l" rtl="0">
         <a:lnSpc>
           <a:spcPct val="100000"/>
         </a:lnSpc>
@@ -6586,7 +6762,7 @@
           <a:srgbClr val="000000"/>
         </a:buClr>
         <a:buFont typeface="Arial"/>
-        <a:defRPr b="0" i="0" sz="1400" u="none" cap="none" strike="noStrike">
+        <a:defRPr sz="1400" b="0" i="0" u="none" strike="noStrike" cap="none">
           <a:solidFill>
             <a:srgbClr val="000000"/>
           </a:solidFill>
@@ -6596,7 +6772,7 @@
           <a:sym typeface="Arial"/>
         </a:defRPr>
       </a:lvl5pPr>
-      <a:lvl6pPr lvl="5" marR="0" rtl="0" algn="l">
+      <a:lvl6pPr marR="0" lvl="5" algn="l" rtl="0">
         <a:lnSpc>
           <a:spcPct val="100000"/>
         </a:lnSpc>
@@ -6610,7 +6786,7 @@
           <a:srgbClr val="000000"/>
         </a:buClr>
         <a:buFont typeface="Arial"/>
-        <a:defRPr b="0" i="0" sz="1400" u="none" cap="none" strike="noStrike">
+        <a:defRPr sz="1400" b="0" i="0" u="none" strike="noStrike" cap="none">
           <a:solidFill>
             <a:srgbClr val="000000"/>
           </a:solidFill>
@@ -6620,7 +6796,7 @@
           <a:sym typeface="Arial"/>
         </a:defRPr>
       </a:lvl6pPr>
-      <a:lvl7pPr lvl="6" marR="0" rtl="0" algn="l">
+      <a:lvl7pPr marR="0" lvl="6" algn="l" rtl="0">
         <a:lnSpc>
           <a:spcPct val="100000"/>
         </a:lnSpc>
@@ -6634,7 +6810,7 @@
           <a:srgbClr val="000000"/>
         </a:buClr>
         <a:buFont typeface="Arial"/>
-        <a:defRPr b="0" i="0" sz="1400" u="none" cap="none" strike="noStrike">
+        <a:defRPr sz="1400" b="0" i="0" u="none" strike="noStrike" cap="none">
           <a:solidFill>
             <a:srgbClr val="000000"/>
           </a:solidFill>
@@ -6644,7 +6820,7 @@
           <a:sym typeface="Arial"/>
         </a:defRPr>
       </a:lvl7pPr>
-      <a:lvl8pPr lvl="7" marR="0" rtl="0" algn="l">
+      <a:lvl8pPr marR="0" lvl="7" algn="l" rtl="0">
         <a:lnSpc>
           <a:spcPct val="100000"/>
         </a:lnSpc>
@@ -6658,7 +6834,7 @@
           <a:srgbClr val="000000"/>
         </a:buClr>
         <a:buFont typeface="Arial"/>
-        <a:defRPr b="0" i="0" sz="1400" u="none" cap="none" strike="noStrike">
+        <a:defRPr sz="1400" b="0" i="0" u="none" strike="noStrike" cap="none">
           <a:solidFill>
             <a:srgbClr val="000000"/>
           </a:solidFill>
@@ -6668,7 +6844,7 @@
           <a:sym typeface="Arial"/>
         </a:defRPr>
       </a:lvl8pPr>
-      <a:lvl9pPr lvl="8" marR="0" rtl="0" algn="l">
+      <a:lvl9pPr marR="0" lvl="8" algn="l" rtl="0">
         <a:lnSpc>
           <a:spcPct val="100000"/>
         </a:lnSpc>
@@ -6682,7 +6858,7 @@
           <a:srgbClr val="000000"/>
         </a:buClr>
         <a:buFont typeface="Arial"/>
-        <a:defRPr b="0" i="0" sz="1400" u="none" cap="none" strike="noStrike">
+        <a:defRPr sz="1400" b="0" i="0" u="none" strike="noStrike" cap="none">
           <a:solidFill>
             <a:srgbClr val="000000"/>
           </a:solidFill>
@@ -6694,7 +6870,7 @@
       </a:lvl9pPr>
     </p:bodyStyle>
     <p:otherStyle>
-      <a:defPPr lvl="0" marR="0" rtl="0" algn="l">
+      <a:defPPr marR="0" lvl="0" algn="l" rtl="0">
         <a:lnSpc>
           <a:spcPct val="100000"/>
         </a:lnSpc>
@@ -6705,7 +6881,7 @@
           <a:spcPts val="0"/>
         </a:spcAft>
       </a:defPPr>
-      <a:lvl1pPr lvl="0" marR="0" rtl="0" algn="l">
+      <a:lvl1pPr marR="0" lvl="0" algn="l" rtl="0">
         <a:lnSpc>
           <a:spcPct val="100000"/>
         </a:lnSpc>
@@ -6719,7 +6895,7 @@
           <a:srgbClr val="000000"/>
         </a:buClr>
         <a:buFont typeface="Arial"/>
-        <a:defRPr b="0" i="0" sz="1400" u="none" cap="none" strike="noStrike">
+        <a:defRPr sz="1400" b="0" i="0" u="none" strike="noStrike" cap="none">
           <a:solidFill>
             <a:srgbClr val="000000"/>
           </a:solidFill>
@@ -6729,7 +6905,7 @@
           <a:sym typeface="Arial"/>
         </a:defRPr>
       </a:lvl1pPr>
-      <a:lvl2pPr lvl="1" marR="0" rtl="0" algn="l">
+      <a:lvl2pPr marR="0" lvl="1" algn="l" rtl="0">
         <a:lnSpc>
           <a:spcPct val="100000"/>
         </a:lnSpc>
@@ -6743,7 +6919,7 @@
           <a:srgbClr val="000000"/>
         </a:buClr>
         <a:buFont typeface="Arial"/>
-        <a:defRPr b="0" i="0" sz="1400" u="none" cap="none" strike="noStrike">
+        <a:defRPr sz="1400" b="0" i="0" u="none" strike="noStrike" cap="none">
           <a:solidFill>
             <a:srgbClr val="000000"/>
           </a:solidFill>
@@ -6753,7 +6929,7 @@
           <a:sym typeface="Arial"/>
         </a:defRPr>
       </a:lvl2pPr>
-      <a:lvl3pPr lvl="2" marR="0" rtl="0" algn="l">
+      <a:lvl3pPr marR="0" lvl="2" algn="l" rtl="0">
         <a:lnSpc>
           <a:spcPct val="100000"/>
         </a:lnSpc>
@@ -6767,7 +6943,7 @@
           <a:srgbClr val="000000"/>
         </a:buClr>
         <a:buFont typeface="Arial"/>
-        <a:defRPr b="0" i="0" sz="1400" u="none" cap="none" strike="noStrike">
+        <a:defRPr sz="1400" b="0" i="0" u="none" strike="noStrike" cap="none">
           <a:solidFill>
             <a:srgbClr val="000000"/>
           </a:solidFill>
@@ -6777,7 +6953,7 @@
           <a:sym typeface="Arial"/>
         </a:defRPr>
       </a:lvl3pPr>
-      <a:lvl4pPr lvl="3" marR="0" rtl="0" algn="l">
+      <a:lvl4pPr marR="0" lvl="3" algn="l" rtl="0">
         <a:lnSpc>
           <a:spcPct val="100000"/>
         </a:lnSpc>
@@ -6791,7 +6967,7 @@
           <a:srgbClr val="000000"/>
         </a:buClr>
         <a:buFont typeface="Arial"/>
-        <a:defRPr b="0" i="0" sz="1400" u="none" cap="none" strike="noStrike">
+        <a:defRPr sz="1400" b="0" i="0" u="none" strike="noStrike" cap="none">
           <a:solidFill>
             <a:srgbClr val="000000"/>
           </a:solidFill>
@@ -6801,7 +6977,7 @@
           <a:sym typeface="Arial"/>
         </a:defRPr>
       </a:lvl4pPr>
-      <a:lvl5pPr lvl="4" marR="0" rtl="0" algn="l">
+      <a:lvl5pPr marR="0" lvl="4" algn="l" rtl="0">
         <a:lnSpc>
           <a:spcPct val="100000"/>
         </a:lnSpc>
@@ -6815,7 +6991,7 @@
           <a:srgbClr val="000000"/>
         </a:buClr>
         <a:buFont typeface="Arial"/>
-        <a:defRPr b="0" i="0" sz="1400" u="none" cap="none" strike="noStrike">
+        <a:defRPr sz="1400" b="0" i="0" u="none" strike="noStrike" cap="none">
           <a:solidFill>
             <a:srgbClr val="000000"/>
           </a:solidFill>
@@ -6825,7 +7001,7 @@
           <a:sym typeface="Arial"/>
         </a:defRPr>
       </a:lvl5pPr>
-      <a:lvl6pPr lvl="5" marR="0" rtl="0" algn="l">
+      <a:lvl6pPr marR="0" lvl="5" algn="l" rtl="0">
         <a:lnSpc>
           <a:spcPct val="100000"/>
         </a:lnSpc>
@@ -6839,7 +7015,7 @@
           <a:srgbClr val="000000"/>
         </a:buClr>
         <a:buFont typeface="Arial"/>
-        <a:defRPr b="0" i="0" sz="1400" u="none" cap="none" strike="noStrike">
+        <a:defRPr sz="1400" b="0" i="0" u="none" strike="noStrike" cap="none">
           <a:solidFill>
             <a:srgbClr val="000000"/>
           </a:solidFill>
@@ -6849,7 +7025,7 @@
           <a:sym typeface="Arial"/>
         </a:defRPr>
       </a:lvl6pPr>
-      <a:lvl7pPr lvl="6" marR="0" rtl="0" algn="l">
+      <a:lvl7pPr marR="0" lvl="6" algn="l" rtl="0">
         <a:lnSpc>
           <a:spcPct val="100000"/>
         </a:lnSpc>
@@ -6863,7 +7039,7 @@
           <a:srgbClr val="000000"/>
         </a:buClr>
         <a:buFont typeface="Arial"/>
-        <a:defRPr b="0" i="0" sz="1400" u="none" cap="none" strike="noStrike">
+        <a:defRPr sz="1400" b="0" i="0" u="none" strike="noStrike" cap="none">
           <a:solidFill>
             <a:srgbClr val="000000"/>
           </a:solidFill>
@@ -6873,7 +7049,7 @@
           <a:sym typeface="Arial"/>
         </a:defRPr>
       </a:lvl7pPr>
-      <a:lvl8pPr lvl="7" marR="0" rtl="0" algn="l">
+      <a:lvl8pPr marR="0" lvl="7" algn="l" rtl="0">
         <a:lnSpc>
           <a:spcPct val="100000"/>
         </a:lnSpc>
@@ -6887,7 +7063,7 @@
           <a:srgbClr val="000000"/>
         </a:buClr>
         <a:buFont typeface="Arial"/>
-        <a:defRPr b="0" i="0" sz="1400" u="none" cap="none" strike="noStrike">
+        <a:defRPr sz="1400" b="0" i="0" u="none" strike="noStrike" cap="none">
           <a:solidFill>
             <a:srgbClr val="000000"/>
           </a:solidFill>
@@ -6897,7 +7073,7 @@
           <a:sym typeface="Arial"/>
         </a:defRPr>
       </a:lvl8pPr>
-      <a:lvl9pPr lvl="8" marR="0" rtl="0" algn="l">
+      <a:lvl9pPr marR="0" lvl="8" algn="l" rtl="0">
         <a:lnSpc>
           <a:spcPct val="100000"/>
         </a:lnSpc>
@@ -6911,7 +7087,7 @@
           <a:srgbClr val="000000"/>
         </a:buClr>
         <a:buFont typeface="Arial"/>
-        <a:defRPr b="0" i="0" sz="1400" u="none" cap="none" strike="noStrike">
+        <a:defRPr sz="1400" b="0" i="0" u="none" strike="noStrike" cap="none">
           <a:solidFill>
             <a:srgbClr val="000000"/>
           </a:solidFill>
@@ -6927,11 +7103,11 @@
 </file>
 
 <file path=ppt/slides/slide1.xml><?xml version="1.0" encoding="utf-8"?>
-<p:sld xmlns:a="http://schemas.openxmlformats.org/drawingml/2006/main" xmlns:r="http://schemas.openxmlformats.org/officeDocument/2006/relationships" xmlns:mc="http://schemas.openxmlformats.org/markup-compatibility/2006" xmlns:mv="urn:schemas-microsoft-com:mac:vml" xmlns:p="http://schemas.openxmlformats.org/presentationml/2006/main" xmlns:c="http://schemas.openxmlformats.org/drawingml/2006/chart" xmlns:dgm="http://schemas.openxmlformats.org/drawingml/2006/diagram" xmlns:o="urn:schemas-microsoft-com:office:office" xmlns:v="urn:schemas-microsoft-com:vml" xmlns:pvml="urn:schemas-microsoft-com:office:powerpoint" xmlns:com="http://schemas.openxmlformats.org/drawingml/2006/compatibility" xmlns:p14="http://schemas.microsoft.com/office/powerpoint/2010/main" xmlns:p15="http://schemas.microsoft.com/office/powerpoint/2012/main" xmlns:ahyp="http://schemas.microsoft.com/office/drawing/2018/hyperlinkcolor">
+<p:sld xmlns:a="http://schemas.openxmlformats.org/drawingml/2006/main" xmlns:r="http://schemas.openxmlformats.org/officeDocument/2006/relationships" xmlns:p="http://schemas.openxmlformats.org/presentationml/2006/main">
   <p:cSld>
     <p:spTree>
       <p:nvGrpSpPr>
-        <p:cNvPr id="61" name="Shape 61"/>
+        <p:cNvPr id="1" name="Shape 61"/>
         <p:cNvGrpSpPr/>
         <p:nvPr/>
       </p:nvGrpSpPr>
@@ -6946,7 +7122,9 @@
       <p:sp>
         <p:nvSpPr>
           <p:cNvPr id="62" name="Google Shape;62;p13"/>
-          <p:cNvSpPr txBox="1"/>
+          <p:cNvSpPr txBox="1">
+            <a:spLocks noGrp="1"/>
+          </p:cNvSpPr>
           <p:nvPr>
             <p:ph type="ctrTitle"/>
           </p:nvPr>
@@ -6961,12 +7139,12 @@
           </a:prstGeom>
         </p:spPr>
         <p:txBody>
-          <a:bodyPr anchorCtr="0" anchor="b" bIns="91425" lIns="91425" spcFirstLastPara="1" rIns="91425" wrap="square" tIns="91425">
+          <a:bodyPr spcFirstLastPara="1" wrap="square" lIns="91425" tIns="91425" rIns="91425" bIns="91425" anchor="b" anchorCtr="0">
             <a:normAutofit/>
           </a:bodyPr>
           <a:lstStyle/>
           <a:p>
-            <a:pPr indent="0" lvl="0" marL="0" rtl="0" algn="ctr">
+            <a:pPr marL="0" lvl="0" indent="0" algn="ctr" rtl="0">
               <a:spcBef>
                 <a:spcPts val="0"/>
               </a:spcBef>
@@ -6977,11 +7155,7 @@
             </a:pPr>
             <a:r>
               <a:rPr lang="es" sz="4500"/>
-              <a:t>Consecuencias</a:t>
-            </a:r>
-            <a:r>
-              <a:rPr lang="es" sz="4500"/>
-              <a:t> de la IA en las personas</a:t>
+              <a:t>Consecuencias de la IA en las personas</a:t>
             </a:r>
             <a:endParaRPr sz="4500"/>
           </a:p>
@@ -6990,9 +7164,11 @@
       <p:sp>
         <p:nvSpPr>
           <p:cNvPr id="63" name="Google Shape;63;p13"/>
-          <p:cNvSpPr txBox="1"/>
+          <p:cNvSpPr txBox="1">
+            <a:spLocks noGrp="1"/>
+          </p:cNvSpPr>
           <p:nvPr>
-            <p:ph idx="1" type="subTitle"/>
+            <p:ph type="subTitle" idx="1"/>
           </p:nvPr>
         </p:nvSpPr>
         <p:spPr>
@@ -7005,12 +7181,12 @@
           </a:prstGeom>
         </p:spPr>
         <p:txBody>
-          <a:bodyPr anchorCtr="0" anchor="t" bIns="91425" lIns="91425" spcFirstLastPara="1" rIns="91425" wrap="square" tIns="91425">
+          <a:bodyPr spcFirstLastPara="1" wrap="square" lIns="91425" tIns="91425" rIns="91425" bIns="91425" anchor="t" anchorCtr="0">
             <a:noAutofit/>
           </a:bodyPr>
           <a:lstStyle/>
           <a:p>
-            <a:pPr indent="0" lvl="0" marL="0" rtl="0" algn="ctr">
+            <a:pPr marL="0" lvl="0" indent="0" algn="ctr" rtl="0">
               <a:spcBef>
                 <a:spcPts val="0"/>
               </a:spcBef>
@@ -7022,20 +7198,12 @@
             </a:pPr>
             <a:r>
               <a:rPr lang="es" sz="1280"/>
-              <a:t>I</a:t>
-            </a:r>
-            <a:r>
-              <a:rPr lang="es" sz="1280"/>
-              <a:t>ntegrantes</a:t>
-            </a:r>
-            <a:r>
-              <a:rPr lang="es" sz="1280"/>
-              <a:t>: Martin Arrigo, Nicolas Toro, Benjamin Neira, Diego Mora</a:t>
+              <a:t>Integrantes: Martin Arrigo, Nicolas Toro, Benjamin Neira, Diego Mora</a:t>
             </a:r>
             <a:endParaRPr sz="1280"/>
           </a:p>
           <a:p>
-            <a:pPr indent="0" lvl="0" marL="0" rtl="0" algn="ctr">
+            <a:pPr marL="0" lvl="0" indent="0" algn="ctr" rtl="0">
               <a:spcBef>
                 <a:spcPts val="0"/>
               </a:spcBef>
@@ -7052,7 +7220,7 @@
             <a:endParaRPr sz="1280"/>
           </a:p>
           <a:p>
-            <a:pPr indent="0" lvl="0" marL="0" rtl="0" algn="ctr">
+            <a:pPr marL="0" lvl="0" indent="0" algn="ctr" rtl="0">
               <a:spcBef>
                 <a:spcPts val="0"/>
               </a:spcBef>
@@ -7064,15 +7232,7 @@
             </a:pPr>
             <a:r>
               <a:rPr lang="es" sz="1280"/>
-              <a:t>Fecha de </a:t>
-            </a:r>
-            <a:r>
-              <a:rPr lang="es" sz="1280"/>
-              <a:t>presentación</a:t>
-            </a:r>
-            <a:r>
-              <a:rPr lang="es" sz="1280"/>
-              <a:t>: 11/05/2026</a:t>
+              <a:t>Fecha de presentación: 11/05/2026</a:t>
             </a:r>
             <a:endParaRPr sz="1280"/>
           </a:p>
@@ -7109,9 +7269,11 @@
       <p:sp>
         <p:nvSpPr>
           <p:cNvPr id="65" name="Google Shape;65;p13"/>
-          <p:cNvSpPr txBox="1"/>
+          <p:cNvSpPr txBox="1">
+            <a:spLocks noGrp="1"/>
+          </p:cNvSpPr>
           <p:nvPr>
-            <p:ph idx="12" type="sldNum"/>
+            <p:ph type="sldNum" idx="12"/>
           </p:nvPr>
         </p:nvSpPr>
         <p:spPr>
@@ -7124,12 +7286,12 @@
           </a:prstGeom>
         </p:spPr>
         <p:txBody>
-          <a:bodyPr anchorCtr="0" anchor="ctr" bIns="91425" lIns="91425" spcFirstLastPara="1" rIns="91425" wrap="square" tIns="91425">
+          <a:bodyPr spcFirstLastPara="1" wrap="square" lIns="91425" tIns="91425" rIns="91425" bIns="91425" anchor="ctr" anchorCtr="0">
             <a:normAutofit/>
           </a:bodyPr>
           <a:lstStyle/>
           <a:p>
-            <a:pPr indent="0" lvl="0" marL="0" rtl="0" algn="r">
+            <a:pPr marL="0" lvl="0" indent="0" algn="r" rtl="0">
               <a:spcBef>
                 <a:spcPts val="0"/>
               </a:spcBef>
@@ -7155,11 +7317,11 @@
 </file>
 
 <file path=ppt/slides/slide2.xml><?xml version="1.0" encoding="utf-8"?>
-<p:sld xmlns:a="http://schemas.openxmlformats.org/drawingml/2006/main" xmlns:r="http://schemas.openxmlformats.org/officeDocument/2006/relationships" xmlns:mc="http://schemas.openxmlformats.org/markup-compatibility/2006" xmlns:mv="urn:schemas-microsoft-com:mac:vml" xmlns:p="http://schemas.openxmlformats.org/presentationml/2006/main" xmlns:c="http://schemas.openxmlformats.org/drawingml/2006/chart" xmlns:dgm="http://schemas.openxmlformats.org/drawingml/2006/diagram" xmlns:o="urn:schemas-microsoft-com:office:office" xmlns:v="urn:schemas-microsoft-com:vml" xmlns:pvml="urn:schemas-microsoft-com:office:powerpoint" xmlns:com="http://schemas.openxmlformats.org/drawingml/2006/compatibility" xmlns:p14="http://schemas.microsoft.com/office/powerpoint/2010/main" xmlns:p15="http://schemas.microsoft.com/office/powerpoint/2012/main" xmlns:ahyp="http://schemas.microsoft.com/office/drawing/2018/hyperlinkcolor">
+<p:sld xmlns:a="http://schemas.openxmlformats.org/drawingml/2006/main" xmlns:r="http://schemas.openxmlformats.org/officeDocument/2006/relationships" xmlns:p="http://schemas.openxmlformats.org/presentationml/2006/main">
   <p:cSld>
     <p:spTree>
       <p:nvGrpSpPr>
-        <p:cNvPr id="69" name="Shape 69"/>
+        <p:cNvPr id="1" name="Shape 69"/>
         <p:cNvGrpSpPr/>
         <p:nvPr/>
       </p:nvGrpSpPr>
@@ -7174,7 +7336,9 @@
       <p:sp>
         <p:nvSpPr>
           <p:cNvPr id="70" name="Google Shape;70;p14"/>
-          <p:cNvSpPr txBox="1"/>
+          <p:cNvSpPr txBox="1">
+            <a:spLocks noGrp="1"/>
+          </p:cNvSpPr>
           <p:nvPr>
             <p:ph type="title"/>
           </p:nvPr>
@@ -7189,12 +7353,12 @@
           </a:prstGeom>
         </p:spPr>
         <p:txBody>
-          <a:bodyPr anchorCtr="0" anchor="b" bIns="91425" lIns="91425" spcFirstLastPara="1" rIns="91425" wrap="square" tIns="91425">
+          <a:bodyPr spcFirstLastPara="1" wrap="square" lIns="91425" tIns="91425" rIns="91425" bIns="91425" anchor="b" anchorCtr="0">
             <a:normAutofit/>
           </a:bodyPr>
           <a:lstStyle/>
           <a:p>
-            <a:pPr indent="0" lvl="0" marL="0" rtl="0" algn="ctr">
+            <a:pPr marL="0" lvl="0" indent="0" algn="ctr" rtl="0">
               <a:spcBef>
                 <a:spcPts val="0"/>
               </a:spcBef>
@@ -7205,11 +7369,7 @@
             </a:pPr>
             <a:r>
               <a:rPr lang="es"/>
-              <a:t>I</a:t>
-            </a:r>
-            <a:r>
-              <a:rPr lang="es"/>
-              <a:t>ntroducción</a:t>
+              <a:t>Introducción</a:t>
             </a:r>
             <a:endParaRPr/>
           </a:p>
@@ -7218,9 +7378,11 @@
       <p:sp>
         <p:nvSpPr>
           <p:cNvPr id="71" name="Google Shape;71;p14"/>
-          <p:cNvSpPr txBox="1"/>
+          <p:cNvSpPr txBox="1">
+            <a:spLocks noGrp="1"/>
+          </p:cNvSpPr>
           <p:nvPr>
-            <p:ph idx="1" type="body"/>
+            <p:ph type="body" idx="1"/>
           </p:nvPr>
         </p:nvSpPr>
         <p:spPr>
@@ -7233,12 +7395,12 @@
           </a:prstGeom>
         </p:spPr>
         <p:txBody>
-          <a:bodyPr anchorCtr="0" anchor="t" bIns="91425" lIns="91425" spcFirstLastPara="1" rIns="91425" wrap="square" tIns="91425">
+          <a:bodyPr spcFirstLastPara="1" wrap="square" lIns="91425" tIns="91425" rIns="91425" bIns="91425" anchor="t" anchorCtr="0">
             <a:normAutofit/>
           </a:bodyPr>
           <a:lstStyle/>
           <a:p>
-            <a:pPr indent="0" lvl="0" marL="0" rtl="0" algn="l">
+            <a:pPr marL="0" lvl="0" indent="0" algn="l" rtl="0">
               <a:spcBef>
                 <a:spcPts val="0"/>
               </a:spcBef>
@@ -7254,43 +7416,7 @@
                 <a:cs typeface="Economica"/>
                 <a:sym typeface="Economica"/>
               </a:rPr>
-              <a:t>En el presente trabajo abordaremos el impacto de la inteligencia artificial desde </a:t>
-            </a:r>
-            <a:r>
-              <a:rPr lang="es" sz="1100">
-                <a:latin typeface="Economica"/>
-                <a:ea typeface="Economica"/>
-                <a:cs typeface="Economica"/>
-                <a:sym typeface="Economica"/>
-              </a:rPr>
-              <a:t>temáticas</a:t>
-            </a:r>
-            <a:r>
-              <a:rPr lang="es" sz="1100">
-                <a:latin typeface="Economica"/>
-                <a:ea typeface="Economica"/>
-                <a:cs typeface="Economica"/>
-                <a:sym typeface="Economica"/>
-              </a:rPr>
-              <a:t> ya establecidas, como lo son </a:t>
-            </a:r>
-            <a:r>
-              <a:rPr lang="es" sz="1100">
-                <a:latin typeface="Economica"/>
-                <a:ea typeface="Economica"/>
-                <a:cs typeface="Economica"/>
-                <a:sym typeface="Economica"/>
-              </a:rPr>
-              <a:t>educación</a:t>
-            </a:r>
-            <a:r>
-              <a:rPr lang="es" sz="1100">
-                <a:latin typeface="Economica"/>
-                <a:ea typeface="Economica"/>
-                <a:cs typeface="Economica"/>
-                <a:sym typeface="Economica"/>
-              </a:rPr>
-              <a:t>, salud, empleo y seguridad.</a:t>
+              <a:t>En el presente trabajo abordaremos el impacto de la inteligencia artificial desde temáticas ya establecidas, como lo son educación, salud, empleo y seguridad.</a:t>
             </a:r>
             <a:endParaRPr sz="1100">
               <a:latin typeface="Economica"/>
@@ -7395,7 +7521,7 @@
           <a:blip r:embed="rId6">
             <a:alphaModFix/>
           </a:blip>
-          <a:srcRect b="5606" l="2271" r="2328" t="2651"/>
+          <a:srcRect l="2271" t="2651" r="2328" b="5606"/>
           <a:stretch/>
         </p:blipFill>
         <p:spPr>
@@ -7443,9 +7569,11 @@
       <p:sp>
         <p:nvSpPr>
           <p:cNvPr id="77" name="Google Shape;77;p14"/>
-          <p:cNvSpPr txBox="1"/>
+          <p:cNvSpPr txBox="1">
+            <a:spLocks noGrp="1"/>
+          </p:cNvSpPr>
           <p:nvPr>
-            <p:ph idx="12" type="sldNum"/>
+            <p:ph type="sldNum" idx="12"/>
           </p:nvPr>
         </p:nvSpPr>
         <p:spPr>
@@ -7458,12 +7586,12 @@
           </a:prstGeom>
         </p:spPr>
         <p:txBody>
-          <a:bodyPr anchorCtr="0" anchor="ctr" bIns="91425" lIns="91425" spcFirstLastPara="1" rIns="91425" wrap="square" tIns="91425">
+          <a:bodyPr spcFirstLastPara="1" wrap="square" lIns="91425" tIns="91425" rIns="91425" bIns="91425" anchor="ctr" anchorCtr="0">
             <a:normAutofit/>
           </a:bodyPr>
           <a:lstStyle/>
           <a:p>
-            <a:pPr indent="0" lvl="0" marL="0" rtl="0" algn="r">
+            <a:pPr marL="0" lvl="0" indent="0" algn="r" rtl="0">
               <a:spcBef>
                 <a:spcPts val="0"/>
               </a:spcBef>
@@ -7474,7 +7602,7 @@
             </a:pPr>
             <a:fld id="{00000000-1234-1234-1234-123412341234}" type="slidenum">
               <a:rPr lang="es"/>
-              <a:t>‹#›</a:t>
+              <a:t>2</a:t>
             </a:fld>
             <a:r>
               <a:rPr lang="es"/>
@@ -7493,11 +7621,11 @@
 </file>
 
 <file path=ppt/slides/slide3.xml><?xml version="1.0" encoding="utf-8"?>
-<p:sld xmlns:a="http://schemas.openxmlformats.org/drawingml/2006/main" xmlns:r="http://schemas.openxmlformats.org/officeDocument/2006/relationships" xmlns:mc="http://schemas.openxmlformats.org/markup-compatibility/2006" xmlns:mv="urn:schemas-microsoft-com:mac:vml" xmlns:p="http://schemas.openxmlformats.org/presentationml/2006/main" xmlns:c="http://schemas.openxmlformats.org/drawingml/2006/chart" xmlns:dgm="http://schemas.openxmlformats.org/drawingml/2006/diagram" xmlns:o="urn:schemas-microsoft-com:office:office" xmlns:v="urn:schemas-microsoft-com:vml" xmlns:pvml="urn:schemas-microsoft-com:office:powerpoint" xmlns:com="http://schemas.openxmlformats.org/drawingml/2006/compatibility" xmlns:p14="http://schemas.microsoft.com/office/powerpoint/2010/main" xmlns:p15="http://schemas.microsoft.com/office/powerpoint/2012/main" xmlns:ahyp="http://schemas.microsoft.com/office/drawing/2018/hyperlinkcolor">
+<p:sld xmlns:a="http://schemas.openxmlformats.org/drawingml/2006/main" xmlns:r="http://schemas.openxmlformats.org/officeDocument/2006/relationships" xmlns:p="http://schemas.openxmlformats.org/presentationml/2006/main">
   <p:cSld>
     <p:spTree>
       <p:nvGrpSpPr>
-        <p:cNvPr id="81" name="Shape 81"/>
+        <p:cNvPr id="1" name="Shape 81"/>
         <p:cNvGrpSpPr/>
         <p:nvPr/>
       </p:nvGrpSpPr>
@@ -7512,7 +7640,9 @@
       <p:sp>
         <p:nvSpPr>
           <p:cNvPr id="82" name="Google Shape;82;p15"/>
-          <p:cNvSpPr txBox="1"/>
+          <p:cNvSpPr txBox="1">
+            <a:spLocks noGrp="1"/>
+          </p:cNvSpPr>
           <p:nvPr>
             <p:ph type="title"/>
           </p:nvPr>
@@ -7527,12 +7657,12 @@
           </a:prstGeom>
         </p:spPr>
         <p:txBody>
-          <a:bodyPr anchorCtr="0" anchor="b" bIns="91425" lIns="91425" spcFirstLastPara="1" rIns="91425" wrap="square" tIns="91425">
+          <a:bodyPr spcFirstLastPara="1" wrap="square" lIns="91425" tIns="91425" rIns="91425" bIns="91425" anchor="b" anchorCtr="0">
             <a:normAutofit/>
           </a:bodyPr>
           <a:lstStyle/>
           <a:p>
-            <a:pPr indent="0" lvl="0" marL="0" rtl="0" algn="ctr">
+            <a:pPr marL="0" lvl="0" indent="0" algn="ctr" rtl="0">
               <a:spcBef>
                 <a:spcPts val="0"/>
               </a:spcBef>
@@ -7543,11 +7673,7 @@
             </a:pPr>
             <a:r>
               <a:rPr lang="es"/>
-              <a:t>M</a:t>
-            </a:r>
-            <a:r>
-              <a:rPr lang="es"/>
-              <a:t>etodología</a:t>
+              <a:t>Metodología</a:t>
             </a:r>
             <a:endParaRPr/>
           </a:p>
@@ -7696,9 +7822,11 @@
       <p:sp>
         <p:nvSpPr>
           <p:cNvPr id="88" name="Google Shape;88;p15"/>
-          <p:cNvSpPr txBox="1"/>
+          <p:cNvSpPr txBox="1">
+            <a:spLocks noGrp="1"/>
+          </p:cNvSpPr>
           <p:nvPr>
-            <p:ph idx="12" type="sldNum"/>
+            <p:ph type="sldNum" idx="12"/>
           </p:nvPr>
         </p:nvSpPr>
         <p:spPr>
@@ -7711,12 +7839,12 @@
           </a:prstGeom>
         </p:spPr>
         <p:txBody>
-          <a:bodyPr anchorCtr="0" anchor="ctr" bIns="91425" lIns="91425" spcFirstLastPara="1" rIns="91425" wrap="square" tIns="91425">
+          <a:bodyPr spcFirstLastPara="1" wrap="square" lIns="91425" tIns="91425" rIns="91425" bIns="91425" anchor="ctr" anchorCtr="0">
             <a:normAutofit/>
           </a:bodyPr>
           <a:lstStyle/>
           <a:p>
-            <a:pPr indent="0" lvl="0" marL="0" rtl="0" algn="r">
+            <a:pPr marL="0" lvl="0" indent="0" algn="r" rtl="0">
               <a:spcBef>
                 <a:spcPts val="0"/>
               </a:spcBef>
@@ -7727,7 +7855,7 @@
             </a:pPr>
             <a:fld id="{00000000-1234-1234-1234-123412341234}" type="slidenum">
               <a:rPr lang="es"/>
-              <a:t>‹#›</a:t>
+              <a:t>3</a:t>
             </a:fld>
             <a:r>
               <a:rPr lang="es"/>
@@ -7746,11 +7874,11 @@
 </file>
 
 <file path=ppt/slides/slide4.xml><?xml version="1.0" encoding="utf-8"?>
-<p:sld xmlns:a="http://schemas.openxmlformats.org/drawingml/2006/main" xmlns:r="http://schemas.openxmlformats.org/officeDocument/2006/relationships" xmlns:mc="http://schemas.openxmlformats.org/markup-compatibility/2006" xmlns:mv="urn:schemas-microsoft-com:mac:vml" xmlns:p="http://schemas.openxmlformats.org/presentationml/2006/main" xmlns:c="http://schemas.openxmlformats.org/drawingml/2006/chart" xmlns:dgm="http://schemas.openxmlformats.org/drawingml/2006/diagram" xmlns:o="urn:schemas-microsoft-com:office:office" xmlns:v="urn:schemas-microsoft-com:vml" xmlns:pvml="urn:schemas-microsoft-com:office:powerpoint" xmlns:com="http://schemas.openxmlformats.org/drawingml/2006/compatibility" xmlns:p14="http://schemas.microsoft.com/office/powerpoint/2010/main" xmlns:p15="http://schemas.microsoft.com/office/powerpoint/2012/main" xmlns:ahyp="http://schemas.microsoft.com/office/drawing/2018/hyperlinkcolor">
+<p:sld xmlns:a="http://schemas.openxmlformats.org/drawingml/2006/main" xmlns:r="http://schemas.openxmlformats.org/officeDocument/2006/relationships" xmlns:p="http://schemas.openxmlformats.org/presentationml/2006/main">
   <p:cSld>
     <p:spTree>
       <p:nvGrpSpPr>
-        <p:cNvPr id="92" name="Shape 92"/>
+        <p:cNvPr id="1" name="Shape 92"/>
         <p:cNvGrpSpPr/>
         <p:nvPr/>
       </p:nvGrpSpPr>
@@ -7772,7 +7900,7 @@
           <a:blip r:embed="rId3">
             <a:alphaModFix/>
           </a:blip>
-          <a:srcRect b="0" l="0" r="0" t="19942"/>
+          <a:srcRect t="19942"/>
           <a:stretch/>
         </p:blipFill>
         <p:spPr>
@@ -7865,12 +7993,12 @@
           </a:ln>
         </p:spPr>
         <p:txBody>
-          <a:bodyPr anchorCtr="0" anchor="t" bIns="91425" lIns="91425" spcFirstLastPara="1" rIns="91425" wrap="square" tIns="91425">
+          <a:bodyPr spcFirstLastPara="1" wrap="square" lIns="91425" tIns="91425" rIns="91425" bIns="91425" anchor="t" anchorCtr="0">
             <a:spAutoFit/>
           </a:bodyPr>
           <a:lstStyle/>
           <a:p>
-            <a:pPr indent="0" lvl="0" marL="0" rtl="0" algn="ctr">
+            <a:pPr marL="0" lvl="0" indent="0" algn="ctr" rtl="0">
               <a:lnSpc>
                 <a:spcPct val="115000"/>
               </a:lnSpc>
@@ -7909,9 +8037,11 @@
       <p:sp>
         <p:nvSpPr>
           <p:cNvPr id="97" name="Google Shape;97;p16"/>
-          <p:cNvSpPr txBox="1"/>
+          <p:cNvSpPr txBox="1">
+            <a:spLocks noGrp="1"/>
+          </p:cNvSpPr>
           <p:nvPr>
-            <p:ph idx="12" type="sldNum"/>
+            <p:ph type="sldNum" idx="12"/>
           </p:nvPr>
         </p:nvSpPr>
         <p:spPr>
@@ -7924,12 +8054,12 @@
           </a:prstGeom>
         </p:spPr>
         <p:txBody>
-          <a:bodyPr anchorCtr="0" anchor="ctr" bIns="91425" lIns="91425" spcFirstLastPara="1" rIns="91425" wrap="square" tIns="91425">
+          <a:bodyPr spcFirstLastPara="1" wrap="square" lIns="91425" tIns="91425" rIns="91425" bIns="91425" anchor="ctr" anchorCtr="0">
             <a:normAutofit/>
           </a:bodyPr>
           <a:lstStyle/>
           <a:p>
-            <a:pPr indent="0" lvl="0" marL="0" rtl="0" algn="r">
+            <a:pPr marL="0" lvl="0" indent="0" algn="r" rtl="0">
               <a:spcBef>
                 <a:spcPts val="0"/>
               </a:spcBef>
@@ -7940,7 +8070,7 @@
             </a:pPr>
             <a:fld id="{00000000-1234-1234-1234-123412341234}" type="slidenum">
               <a:rPr lang="es"/>
-              <a:t>‹#›</a:t>
+              <a:t>4</a:t>
             </a:fld>
             <a:r>
               <a:rPr lang="es"/>
@@ -7959,11 +8089,11 @@
 </file>
 
 <file path=ppt/slides/slide5.xml><?xml version="1.0" encoding="utf-8"?>
-<p:sld xmlns:a="http://schemas.openxmlformats.org/drawingml/2006/main" xmlns:r="http://schemas.openxmlformats.org/officeDocument/2006/relationships" xmlns:mc="http://schemas.openxmlformats.org/markup-compatibility/2006" xmlns:mv="urn:schemas-microsoft-com:mac:vml" xmlns:p="http://schemas.openxmlformats.org/presentationml/2006/main" xmlns:c="http://schemas.openxmlformats.org/drawingml/2006/chart" xmlns:dgm="http://schemas.openxmlformats.org/drawingml/2006/diagram" xmlns:o="urn:schemas-microsoft-com:office:office" xmlns:v="urn:schemas-microsoft-com:vml" xmlns:pvml="urn:schemas-microsoft-com:office:powerpoint" xmlns:com="http://schemas.openxmlformats.org/drawingml/2006/compatibility" xmlns:p14="http://schemas.microsoft.com/office/powerpoint/2010/main" xmlns:p15="http://schemas.microsoft.com/office/powerpoint/2012/main" xmlns:ahyp="http://schemas.microsoft.com/office/drawing/2018/hyperlinkcolor">
+<p:sld xmlns:a="http://schemas.openxmlformats.org/drawingml/2006/main" xmlns:r="http://schemas.openxmlformats.org/officeDocument/2006/relationships" xmlns:p="http://schemas.openxmlformats.org/presentationml/2006/main">
   <p:cSld>
     <p:spTree>
       <p:nvGrpSpPr>
-        <p:cNvPr id="101" name="Shape 101"/>
+        <p:cNvPr id="1" name="Shape 101"/>
         <p:cNvGrpSpPr/>
         <p:nvPr/>
       </p:nvGrpSpPr>
@@ -8039,8 +8169,8 @@
         </p:nvSpPr>
         <p:spPr>
           <a:xfrm>
-            <a:off x="2170675" y="293950"/>
-            <a:ext cx="4123200" cy="1022700"/>
+            <a:off x="2636989" y="357010"/>
+            <a:ext cx="3434671" cy="1152593"/>
           </a:xfrm>
           <a:prstGeom prst="rect">
             <a:avLst/>
@@ -8051,12 +8181,12 @@
           </a:ln>
         </p:spPr>
         <p:txBody>
-          <a:bodyPr anchorCtr="0" anchor="t" bIns="91425" lIns="91425" spcFirstLastPara="1" rIns="91425" wrap="square" tIns="91425">
+          <a:bodyPr spcFirstLastPara="1" wrap="square" lIns="91425" tIns="91425" rIns="91425" bIns="91425" anchor="t" anchorCtr="0">
             <a:spAutoFit/>
           </a:bodyPr>
           <a:lstStyle/>
           <a:p>
-            <a:pPr indent="0" lvl="0" marL="0" rtl="0" algn="l">
+            <a:pPr marL="0" lvl="0" indent="0" algn="l" rtl="0">
               <a:lnSpc>
                 <a:spcPct val="115000"/>
               </a:lnSpc>
@@ -8069,7 +8199,7 @@
               <a:buNone/>
             </a:pPr>
             <a:r>
-              <a:rPr lang="es" sz="2300">
+              <a:rPr lang="es" sz="2300" dirty="0">
                 <a:solidFill>
                   <a:schemeClr val="dk1"/>
                 </a:solidFill>
@@ -8080,7 +8210,7 @@
               </a:rPr>
               <a:t>Educación y rendimiento académico</a:t>
             </a:r>
-            <a:endParaRPr sz="2300">
+            <a:endParaRPr sz="2300" dirty="0">
               <a:solidFill>
                 <a:schemeClr val="dk1"/>
               </a:solidFill>
@@ -8091,7 +8221,7 @@
             </a:endParaRPr>
           </a:p>
           <a:p>
-            <a:pPr indent="0" lvl="0" marL="0" rtl="0" algn="l">
+            <a:pPr marL="0" lvl="0" indent="0" algn="l" rtl="0">
               <a:lnSpc>
                 <a:spcPct val="115000"/>
               </a:lnSpc>
@@ -8103,10 +8233,7 @@
               </a:spcAft>
               <a:buNone/>
             </a:pPr>
-            <a:r>
-              <a:t/>
-            </a:r>
-            <a:endParaRPr b="1" sz="2300">
+            <a:endParaRPr sz="2300" b="1" dirty="0">
               <a:solidFill>
                 <a:schemeClr val="dk1"/>
               </a:solidFill>
@@ -8117,9 +8244,11 @@
       <p:sp>
         <p:nvSpPr>
           <p:cNvPr id="105" name="Google Shape;105;p17"/>
-          <p:cNvSpPr txBox="1"/>
+          <p:cNvSpPr txBox="1">
+            <a:spLocks noGrp="1"/>
+          </p:cNvSpPr>
           <p:nvPr>
-            <p:ph idx="12" type="sldNum"/>
+            <p:ph type="sldNum" idx="12"/>
           </p:nvPr>
         </p:nvSpPr>
         <p:spPr>
@@ -8132,12 +8261,12 @@
           </a:prstGeom>
         </p:spPr>
         <p:txBody>
-          <a:bodyPr anchorCtr="0" anchor="ctr" bIns="91425" lIns="91425" spcFirstLastPara="1" rIns="91425" wrap="square" tIns="91425">
+          <a:bodyPr spcFirstLastPara="1" wrap="square" lIns="91425" tIns="91425" rIns="91425" bIns="91425" anchor="ctr" anchorCtr="0">
             <a:normAutofit/>
           </a:bodyPr>
           <a:lstStyle/>
           <a:p>
-            <a:pPr indent="0" lvl="0" marL="0" rtl="0" algn="r">
+            <a:pPr marL="0" lvl="0" indent="0" algn="r" rtl="0">
               <a:spcBef>
                 <a:spcPts val="0"/>
               </a:spcBef>
@@ -8148,7 +8277,7 @@
             </a:pPr>
             <a:fld id="{00000000-1234-1234-1234-123412341234}" type="slidenum">
               <a:rPr lang="es"/>
-              <a:t>‹#›</a:t>
+              <a:t>5</a:t>
             </a:fld>
             <a:r>
               <a:rPr lang="es"/>
@@ -8167,11 +8296,11 @@
 </file>
 
 <file path=ppt/slides/slide6.xml><?xml version="1.0" encoding="utf-8"?>
-<p:sld xmlns:a="http://schemas.openxmlformats.org/drawingml/2006/main" xmlns:r="http://schemas.openxmlformats.org/officeDocument/2006/relationships" xmlns:mc="http://schemas.openxmlformats.org/markup-compatibility/2006" xmlns:mv="urn:schemas-microsoft-com:mac:vml" xmlns:p="http://schemas.openxmlformats.org/presentationml/2006/main" xmlns:c="http://schemas.openxmlformats.org/drawingml/2006/chart" xmlns:dgm="http://schemas.openxmlformats.org/drawingml/2006/diagram" xmlns:o="urn:schemas-microsoft-com:office:office" xmlns:v="urn:schemas-microsoft-com:vml" xmlns:pvml="urn:schemas-microsoft-com:office:powerpoint" xmlns:com="http://schemas.openxmlformats.org/drawingml/2006/compatibility" xmlns:p14="http://schemas.microsoft.com/office/powerpoint/2010/main" xmlns:p15="http://schemas.microsoft.com/office/powerpoint/2012/main" xmlns:ahyp="http://schemas.microsoft.com/office/drawing/2018/hyperlinkcolor">
+<p:sld xmlns:a="http://schemas.openxmlformats.org/drawingml/2006/main" xmlns:r="http://schemas.openxmlformats.org/officeDocument/2006/relationships" xmlns:p="http://schemas.openxmlformats.org/presentationml/2006/main">
   <p:cSld>
     <p:spTree>
       <p:nvGrpSpPr>
-        <p:cNvPr id="109" name="Shape 109"/>
+        <p:cNvPr id="1" name="Shape 109"/>
         <p:cNvGrpSpPr/>
         <p:nvPr/>
       </p:nvGrpSpPr>
@@ -8191,7 +8320,7 @@
         </p:nvSpPr>
         <p:spPr>
           <a:xfrm>
-            <a:off x="1123200" y="111000"/>
+            <a:off x="953225" y="-198612"/>
             <a:ext cx="6897600" cy="538800"/>
           </a:xfrm>
           <a:prstGeom prst="rect">
@@ -8203,12 +8332,12 @@
           </a:ln>
         </p:spPr>
         <p:txBody>
-          <a:bodyPr anchorCtr="0" anchor="t" bIns="91425" lIns="91425" spcFirstLastPara="1" rIns="91425" wrap="square" tIns="91425">
+          <a:bodyPr spcFirstLastPara="1" wrap="square" lIns="91425" tIns="91425" rIns="91425" bIns="91425" anchor="t" anchorCtr="0">
             <a:spAutoFit/>
           </a:bodyPr>
           <a:lstStyle/>
           <a:p>
-            <a:pPr indent="0" lvl="0" marL="0" rtl="0" algn="ctr">
+            <a:pPr marL="0" lvl="0" indent="0" algn="ctr" rtl="0">
               <a:lnSpc>
                 <a:spcPct val="115000"/>
               </a:lnSpc>
@@ -8221,23 +8350,25 @@
               <a:buNone/>
             </a:pPr>
             <a:r>
-              <a:rPr b="1" lang="es" sz="2300">
+              <a:rPr lang="es" sz="2300" b="1" dirty="0">
                 <a:solidFill>
                   <a:schemeClr val="dk1"/>
                 </a:solidFill>
               </a:rPr>
               <a:t>Preocupaciones frente a la IA</a:t>
             </a:r>
-            <a:endParaRPr/>
+            <a:endParaRPr dirty="0"/>
           </a:p>
         </p:txBody>
       </p:sp>
       <p:sp>
         <p:nvSpPr>
           <p:cNvPr id="111" name="Google Shape;111;p18"/>
-          <p:cNvSpPr txBox="1"/>
+          <p:cNvSpPr txBox="1">
+            <a:spLocks noGrp="1"/>
+          </p:cNvSpPr>
           <p:nvPr>
-            <p:ph idx="12" type="sldNum"/>
+            <p:ph type="sldNum" idx="12"/>
           </p:nvPr>
         </p:nvSpPr>
         <p:spPr>
@@ -8250,12 +8381,12 @@
           </a:prstGeom>
         </p:spPr>
         <p:txBody>
-          <a:bodyPr anchorCtr="0" anchor="ctr" bIns="91425" lIns="91425" spcFirstLastPara="1" rIns="91425" wrap="square" tIns="91425">
+          <a:bodyPr spcFirstLastPara="1" wrap="square" lIns="91425" tIns="91425" rIns="91425" bIns="91425" anchor="ctr" anchorCtr="0">
             <a:normAutofit/>
           </a:bodyPr>
           <a:lstStyle/>
           <a:p>
-            <a:pPr indent="0" lvl="0" marL="0" rtl="0" algn="r">
+            <a:pPr marL="0" lvl="0" indent="0" algn="r" rtl="0">
               <a:spcBef>
                 <a:spcPts val="0"/>
               </a:spcBef>
@@ -8266,7 +8397,7 @@
             </a:pPr>
             <a:fld id="{00000000-1234-1234-1234-123412341234}" type="slidenum">
               <a:rPr lang="es"/>
-              <a:t>‹#›</a:t>
+              <a:t>6</a:t>
             </a:fld>
             <a:r>
               <a:rPr lang="es"/>
@@ -8292,7 +8423,7 @@
         </p:blipFill>
         <p:spPr>
           <a:xfrm>
-            <a:off x="93700" y="689525"/>
+            <a:off x="56530" y="689525"/>
             <a:ext cx="4206475" cy="2246850"/>
           </a:xfrm>
           <a:prstGeom prst="rect">
@@ -8369,11 +8500,11 @@
 </file>
 
 <file path=ppt/slides/slide7.xml><?xml version="1.0" encoding="utf-8"?>
-<p:sld xmlns:a="http://schemas.openxmlformats.org/drawingml/2006/main" xmlns:r="http://schemas.openxmlformats.org/officeDocument/2006/relationships" xmlns:mc="http://schemas.openxmlformats.org/markup-compatibility/2006" xmlns:mv="urn:schemas-microsoft-com:mac:vml" xmlns:p="http://schemas.openxmlformats.org/presentationml/2006/main" xmlns:c="http://schemas.openxmlformats.org/drawingml/2006/chart" xmlns:dgm="http://schemas.openxmlformats.org/drawingml/2006/diagram" xmlns:o="urn:schemas-microsoft-com:office:office" xmlns:v="urn:schemas-microsoft-com:vml" xmlns:pvml="urn:schemas-microsoft-com:office:powerpoint" xmlns:com="http://schemas.openxmlformats.org/drawingml/2006/compatibility" xmlns:p14="http://schemas.microsoft.com/office/powerpoint/2010/main" xmlns:p15="http://schemas.microsoft.com/office/powerpoint/2012/main" xmlns:ahyp="http://schemas.microsoft.com/office/drawing/2018/hyperlinkcolor">
+<p:sld xmlns:a="http://schemas.openxmlformats.org/drawingml/2006/main" xmlns:r="http://schemas.openxmlformats.org/officeDocument/2006/relationships" xmlns:p="http://schemas.openxmlformats.org/presentationml/2006/main">
   <p:cSld>
     <p:spTree>
       <p:nvGrpSpPr>
-        <p:cNvPr id="118" name="Shape 118"/>
+        <p:cNvPr id="1" name="Shape 118"/>
         <p:cNvGrpSpPr/>
         <p:nvPr/>
       </p:nvGrpSpPr>
@@ -8395,7 +8526,7 @@
           <a:blip r:embed="rId3">
             <a:alphaModFix/>
           </a:blip>
-          <a:srcRect b="2916" l="2520" r="1667" t="1482"/>
+          <a:srcRect l="2520" t="1482" r="1667" b="2916"/>
           <a:stretch/>
         </p:blipFill>
         <p:spPr>
@@ -8415,9 +8546,11 @@
       <p:sp>
         <p:nvSpPr>
           <p:cNvPr id="120" name="Google Shape;120;p19"/>
-          <p:cNvSpPr txBox="1"/>
+          <p:cNvSpPr txBox="1">
+            <a:spLocks noGrp="1"/>
+          </p:cNvSpPr>
           <p:nvPr>
-            <p:ph idx="12" type="sldNum"/>
+            <p:ph type="sldNum" idx="12"/>
           </p:nvPr>
         </p:nvSpPr>
         <p:spPr>
@@ -8430,12 +8563,12 @@
           </a:prstGeom>
         </p:spPr>
         <p:txBody>
-          <a:bodyPr anchorCtr="0" anchor="ctr" bIns="91425" lIns="91425" spcFirstLastPara="1" rIns="91425" wrap="square" tIns="91425">
+          <a:bodyPr spcFirstLastPara="1" wrap="square" lIns="91425" tIns="91425" rIns="91425" bIns="91425" anchor="ctr" anchorCtr="0">
             <a:normAutofit/>
           </a:bodyPr>
           <a:lstStyle/>
           <a:p>
-            <a:pPr indent="0" lvl="0" marL="0" rtl="0" algn="r">
+            <a:pPr marL="0" lvl="0" indent="0" algn="r" rtl="0">
               <a:spcBef>
                 <a:spcPts val="0"/>
               </a:spcBef>
@@ -8446,7 +8579,7 @@
             </a:pPr>
             <a:fld id="{00000000-1234-1234-1234-123412341234}" type="slidenum">
               <a:rPr lang="es"/>
-              <a:t>‹#›</a:t>
+              <a:t>7</a:t>
             </a:fld>
             <a:r>
               <a:rPr lang="es"/>
@@ -8476,12 +8609,12 @@
           </a:ln>
         </p:spPr>
         <p:txBody>
-          <a:bodyPr anchorCtr="0" anchor="t" bIns="91425" lIns="91425" spcFirstLastPara="1" rIns="91425" wrap="square" tIns="91425">
+          <a:bodyPr spcFirstLastPara="1" wrap="square" lIns="91425" tIns="91425" rIns="91425" bIns="91425" anchor="t" anchorCtr="0">
             <a:spAutoFit/>
           </a:bodyPr>
           <a:lstStyle/>
           <a:p>
-            <a:pPr indent="0" lvl="0" marL="0" rtl="0" algn="ctr">
+            <a:pPr marL="0" lvl="0" indent="0" algn="ctr" rtl="0">
               <a:lnSpc>
                 <a:spcPct val="115000"/>
               </a:lnSpc>
@@ -8494,28 +8627,12 @@
               <a:buNone/>
             </a:pPr>
             <a:r>
-              <a:rPr b="1" lang="es" sz="2300">
+              <a:rPr lang="es" sz="2300" b="1">
                 <a:solidFill>
                   <a:schemeClr val="dk1"/>
                 </a:solidFill>
               </a:rPr>
-              <a:t>Producción de </a:t>
-            </a:r>
-            <a:r>
-              <a:rPr b="1" lang="es" sz="2300">
-                <a:solidFill>
-                  <a:schemeClr val="dk1"/>
-                </a:solidFill>
-              </a:rPr>
-              <a:t>publicación</a:t>
-            </a:r>
-            <a:r>
-              <a:rPr b="1" lang="es" sz="2300">
-                <a:solidFill>
-                  <a:schemeClr val="dk1"/>
-                </a:solidFill>
-              </a:rPr>
-              <a:t> científica de IA</a:t>
+              <a:t>Producción de publicación científica de IA</a:t>
             </a:r>
             <a:endParaRPr/>
           </a:p>
@@ -8530,11 +8647,11 @@
 </file>
 
 <file path=ppt/slides/slide8.xml><?xml version="1.0" encoding="utf-8"?>
-<p:sld xmlns:a="http://schemas.openxmlformats.org/drawingml/2006/main" xmlns:r="http://schemas.openxmlformats.org/officeDocument/2006/relationships" xmlns:mc="http://schemas.openxmlformats.org/markup-compatibility/2006" xmlns:mv="urn:schemas-microsoft-com:mac:vml" xmlns:p="http://schemas.openxmlformats.org/presentationml/2006/main" xmlns:c="http://schemas.openxmlformats.org/drawingml/2006/chart" xmlns:dgm="http://schemas.openxmlformats.org/drawingml/2006/diagram" xmlns:o="urn:schemas-microsoft-com:office:office" xmlns:v="urn:schemas-microsoft-com:vml" xmlns:pvml="urn:schemas-microsoft-com:office:powerpoint" xmlns:com="http://schemas.openxmlformats.org/drawingml/2006/compatibility" xmlns:p14="http://schemas.microsoft.com/office/powerpoint/2010/main" xmlns:p15="http://schemas.microsoft.com/office/powerpoint/2012/main" xmlns:ahyp="http://schemas.microsoft.com/office/drawing/2018/hyperlinkcolor">
+<p:sld xmlns:a="http://schemas.openxmlformats.org/drawingml/2006/main" xmlns:r="http://schemas.openxmlformats.org/officeDocument/2006/relationships" xmlns:p="http://schemas.openxmlformats.org/presentationml/2006/main">
   <p:cSld>
     <p:spTree>
       <p:nvGrpSpPr>
-        <p:cNvPr id="125" name="Shape 125"/>
+        <p:cNvPr id="1" name="Shape 125"/>
         <p:cNvGrpSpPr/>
         <p:nvPr/>
       </p:nvGrpSpPr>
@@ -8549,7 +8666,9 @@
       <p:sp>
         <p:nvSpPr>
           <p:cNvPr id="126" name="Google Shape;126;p20"/>
-          <p:cNvSpPr txBox="1"/>
+          <p:cNvSpPr txBox="1">
+            <a:spLocks noGrp="1"/>
+          </p:cNvSpPr>
           <p:nvPr>
             <p:ph type="title"/>
           </p:nvPr>
@@ -8564,12 +8683,12 @@
           </a:prstGeom>
         </p:spPr>
         <p:txBody>
-          <a:bodyPr anchorCtr="0" anchor="b" bIns="91425" lIns="91425" spcFirstLastPara="1" rIns="91425" wrap="square" tIns="91425">
+          <a:bodyPr spcFirstLastPara="1" wrap="square" lIns="91425" tIns="91425" rIns="91425" bIns="91425" anchor="b" anchorCtr="0">
             <a:noAutofit/>
           </a:bodyPr>
           <a:lstStyle/>
           <a:p>
-            <a:pPr indent="0" lvl="0" marL="0" rtl="0" algn="ctr">
+            <a:pPr marL="0" lvl="0" indent="0" algn="ctr" rtl="0">
               <a:spcBef>
                 <a:spcPts val="0"/>
               </a:spcBef>
@@ -8606,12 +8725,12 @@
           </a:ln>
         </p:spPr>
         <p:txBody>
-          <a:bodyPr anchorCtr="0" anchor="t" bIns="91425" lIns="91425" spcFirstLastPara="1" rIns="91425" wrap="square" tIns="91425">
+          <a:bodyPr spcFirstLastPara="1" wrap="square" lIns="91425" tIns="91425" rIns="91425" bIns="91425" anchor="t" anchorCtr="0">
             <a:spAutoFit/>
           </a:bodyPr>
           <a:lstStyle/>
           <a:p>
-            <a:pPr indent="0" lvl="0" marL="0" rtl="0" algn="l">
+            <a:pPr marL="0" lvl="0" indent="0" algn="l" rtl="0">
               <a:lnSpc>
                 <a:spcPct val="115000"/>
               </a:lnSpc>
@@ -8638,7 +8757,7 @@
             </a:endParaRPr>
           </a:p>
           <a:p>
-            <a:pPr indent="-317500" lvl="0" marL="457200" rtl="0" algn="l">
+            <a:pPr marL="457200" lvl="0" indent="-317500" algn="l" rtl="0">
               <a:lnSpc>
                 <a:spcPct val="115000"/>
               </a:lnSpc>
@@ -8655,7 +8774,7 @@
               <a:buChar char="●"/>
             </a:pPr>
             <a:r>
-              <a:rPr b="1" lang="es">
+              <a:rPr lang="es" b="1">
                 <a:solidFill>
                   <a:schemeClr val="dk1"/>
                 </a:solidFill>
@@ -8669,7 +8788,7 @@
             </a:endParaRPr>
           </a:p>
           <a:p>
-            <a:pPr indent="-298450" lvl="0" marL="457200" rtl="0" algn="l">
+            <a:pPr marL="457200" lvl="0" indent="-298450" algn="l" rtl="0">
               <a:lnSpc>
                 <a:spcPct val="115000"/>
               </a:lnSpc>
@@ -8686,7 +8805,7 @@
               <a:buChar char="●"/>
             </a:pPr>
             <a:r>
-              <a:rPr b="1" lang="es">
+              <a:rPr lang="es" b="1">
                 <a:solidFill>
                   <a:schemeClr val="dk1"/>
                 </a:solidFill>
@@ -8700,7 +8819,7 @@
             </a:endParaRPr>
           </a:p>
           <a:p>
-            <a:pPr indent="-317500" lvl="0" marL="457200" rtl="0" algn="l">
+            <a:pPr marL="457200" lvl="0" indent="-317500" algn="l" rtl="0">
               <a:lnSpc>
                 <a:spcPct val="115000"/>
               </a:lnSpc>
@@ -8717,7 +8836,7 @@
               <a:buChar char="●"/>
             </a:pPr>
             <a:r>
-              <a:rPr b="1" lang="es">
+              <a:rPr lang="es" b="1">
                 <a:solidFill>
                   <a:schemeClr val="dk1"/>
                 </a:solidFill>
@@ -8731,7 +8850,7 @@
             </a:endParaRPr>
           </a:p>
           <a:p>
-            <a:pPr indent="-317500" lvl="0" marL="457200" rtl="0" algn="l">
+            <a:pPr marL="457200" lvl="0" indent="-317500" algn="l" rtl="0">
               <a:lnSpc>
                 <a:spcPct val="115000"/>
               </a:lnSpc>
@@ -8748,7 +8867,7 @@
               <a:buChar char="●"/>
             </a:pPr>
             <a:r>
-              <a:rPr b="1" lang="es">
+              <a:rPr lang="es" b="1">
                 <a:solidFill>
                   <a:schemeClr val="dk1"/>
                 </a:solidFill>
@@ -8766,9 +8885,11 @@
       <p:sp>
         <p:nvSpPr>
           <p:cNvPr id="128" name="Google Shape;128;p20"/>
-          <p:cNvSpPr txBox="1"/>
+          <p:cNvSpPr txBox="1">
+            <a:spLocks noGrp="1"/>
+          </p:cNvSpPr>
           <p:nvPr>
-            <p:ph idx="12" type="sldNum"/>
+            <p:ph type="sldNum" idx="12"/>
           </p:nvPr>
         </p:nvSpPr>
         <p:spPr>
@@ -8781,12 +8902,12 @@
           </a:prstGeom>
         </p:spPr>
         <p:txBody>
-          <a:bodyPr anchorCtr="0" anchor="ctr" bIns="91425" lIns="91425" spcFirstLastPara="1" rIns="91425" wrap="square" tIns="91425">
+          <a:bodyPr spcFirstLastPara="1" wrap="square" lIns="91425" tIns="91425" rIns="91425" bIns="91425" anchor="ctr" anchorCtr="0">
             <a:normAutofit/>
           </a:bodyPr>
           <a:lstStyle/>
           <a:p>
-            <a:pPr indent="0" lvl="0" marL="0" rtl="0" algn="r">
+            <a:pPr marL="0" lvl="0" indent="0" algn="r" rtl="0">
               <a:spcBef>
                 <a:spcPts val="0"/>
               </a:spcBef>
@@ -8797,7 +8918,7 @@
             </a:pPr>
             <a:fld id="{00000000-1234-1234-1234-123412341234}" type="slidenum">
               <a:rPr lang="es"/>
-              <a:t>‹#›</a:t>
+              <a:t>8</a:t>
             </a:fld>
             <a:r>
               <a:rPr lang="es"/>
@@ -8816,7 +8937,7 @@
 </file>
 
 <file path=ppt/theme/theme1.xml><?xml version="1.0" encoding="utf-8"?>
-<a:theme xmlns:a="http://schemas.openxmlformats.org/drawingml/2006/main" xmlns:r="http://schemas.openxmlformats.org/officeDocument/2006/relationships" name="Luxe">
+<a:theme xmlns:a="http://schemas.openxmlformats.org/drawingml/2006/main" name="Luxe">
   <a:themeElements>
     <a:clrScheme name="Luxe">
       <a:dk1>
@@ -9091,11 +9212,13 @@
       </a:bgFillStyleLst>
     </a:fmtScheme>
   </a:themeElements>
+  <a:objectDefaults/>
+  <a:extraClrSchemeLst/>
 </a:theme>
 </file>
 
 <file path=ppt/theme/theme2.xml><?xml version="1.0" encoding="utf-8"?>
-<a:theme xmlns:a="http://schemas.openxmlformats.org/drawingml/2006/main" xmlns:r="http://schemas.openxmlformats.org/officeDocument/2006/relationships">
+<a:theme xmlns:a="http://schemas.openxmlformats.org/drawingml/2006/main">
   <a:themeElements>
     <a:clrScheme name="Default">
       <a:dk1>
@@ -9370,5 +9493,7 @@
       </a:bgFillStyleLst>
     </a:fmtScheme>
   </a:themeElements>
+  <a:objectDefaults/>
+  <a:extraClrSchemeLst/>
 </a:theme>
 </file>
--- a/Presentacion_entrega_2.pptx
+++ b/Presentacion_entrega_2.pptx
@@ -8320,8 +8320,8 @@
         </p:nvSpPr>
         <p:spPr>
           <a:xfrm>
-            <a:off x="953225" y="-198612"/>
-            <a:ext cx="6897600" cy="538800"/>
+            <a:off x="1885326" y="-148782"/>
+            <a:ext cx="5063867" cy="976391"/>
           </a:xfrm>
           <a:prstGeom prst="rect">
             <a:avLst/>
@@ -8423,8 +8423,8 @@
         </p:blipFill>
         <p:spPr>
           <a:xfrm>
-            <a:off x="56530" y="689525"/>
-            <a:ext cx="4206475" cy="2246850"/>
+            <a:off x="173774" y="1036421"/>
+            <a:ext cx="3553522" cy="2246850"/>
           </a:xfrm>
           <a:prstGeom prst="rect">
             <a:avLst/>
@@ -8451,8 +8451,8 @@
         </p:blipFill>
         <p:spPr>
           <a:xfrm>
-            <a:off x="4402025" y="789325"/>
-            <a:ext cx="4568201" cy="2047250"/>
+            <a:off x="4417260" y="1136221"/>
+            <a:ext cx="4444609" cy="2047250"/>
           </a:xfrm>
           <a:prstGeom prst="rect">
             <a:avLst/>
@@ -8479,8 +8479,8 @@
         </p:blipFill>
         <p:spPr>
           <a:xfrm>
-            <a:off x="2446475" y="3096250"/>
-            <a:ext cx="3921275" cy="1921300"/>
+            <a:off x="2389349" y="3283271"/>
+            <a:ext cx="3468759" cy="1773546"/>
           </a:xfrm>
           <a:prstGeom prst="rect">
             <a:avLst/>

--- a/Presentacion_entrega_2.pptx
+++ b/Presentacion_entrega_2.pptx
@@ -1377,7 +1377,7 @@
         </p:nvSpPr>
         <p:spPr>
           <a:xfrm>
-            <a:off x="381300" y="685800"/>
+            <a:off x="381000" y="685800"/>
             <a:ext cx="6096000" cy="3429000"/>
           </a:xfrm>
           <a:custGeom>
@@ -8598,7 +8598,7 @@
         <p:spPr>
           <a:xfrm>
             <a:off x="2330250" y="285175"/>
-            <a:ext cx="4483500" cy="945900"/>
+            <a:ext cx="4483500" cy="1075649"/>
           </a:xfrm>
           <a:prstGeom prst="rect">
             <a:avLst/>
@@ -8627,14 +8627,14 @@
               <a:buNone/>
             </a:pPr>
             <a:r>
-              <a:rPr lang="es" sz="2300" b="1">
+              <a:rPr lang="es" sz="2300" b="1" dirty="0">
                 <a:solidFill>
                   <a:schemeClr val="dk1"/>
                 </a:solidFill>
               </a:rPr>
-              <a:t>Producción de publicación científica de IA</a:t>
+              <a:t>Producción de publicaciones científicas de IA</a:t>
             </a:r>
-            <a:endParaRPr/>
+            <a:endParaRPr dirty="0"/>
           </a:p>
         </p:txBody>
       </p:sp>

--- a/Presentacion_entrega_2.pptx
+++ b/Presentacion_entrega_2.pptx
@@ -1481,7 +1481,7 @@
         </p:nvSpPr>
         <p:spPr>
           <a:xfrm>
-            <a:off x="381300" y="685800"/>
+            <a:off x="381000" y="685800"/>
             <a:ext cx="6096000" cy="3429000"/>
           </a:xfrm>
           <a:custGeom>
@@ -7154,10 +7154,10 @@
               <a:buNone/>
             </a:pPr>
             <a:r>
-              <a:rPr lang="es" sz="4500"/>
+              <a:rPr lang="es" sz="4500" dirty="0"/>
               <a:t>Consecuencias de la IA en las personas</a:t>
             </a:r>
-            <a:endParaRPr sz="4500"/>
+            <a:endParaRPr sz="4500" dirty="0"/>
           </a:p>
         </p:txBody>
       </p:sp>
@@ -8350,14 +8350,17 @@
               <a:buNone/>
             </a:pPr>
             <a:r>
-              <a:rPr lang="es" sz="2300" b="1" dirty="0">
+              <a:rPr lang="es" sz="2300" dirty="0">
                 <a:solidFill>
                   <a:schemeClr val="dk1"/>
                 </a:solidFill>
+                <a:latin typeface="Economica" panose="020B0604020202020204" charset="0"/>
               </a:rPr>
               <a:t>Preocupaciones frente a la IA</a:t>
             </a:r>
-            <a:endParaRPr dirty="0"/>
+            <a:endParaRPr dirty="0">
+              <a:latin typeface="Economica" panose="020B0604020202020204" charset="0"/>
+            </a:endParaRPr>
           </a:p>
         </p:txBody>
       </p:sp>
@@ -8598,7 +8601,7 @@
         <p:spPr>
           <a:xfrm>
             <a:off x="2330250" y="285175"/>
-            <a:ext cx="4483500" cy="1075649"/>
+            <a:ext cx="4483500" cy="668614"/>
           </a:xfrm>
           <a:prstGeom prst="rect">
             <a:avLst/>
@@ -8627,14 +8630,17 @@
               <a:buNone/>
             </a:pPr>
             <a:r>
-              <a:rPr lang="es" sz="2300" b="1" dirty="0">
+              <a:rPr lang="es" sz="2300" dirty="0">
                 <a:solidFill>
                   <a:schemeClr val="dk1"/>
                 </a:solidFill>
+                <a:latin typeface="Economica" panose="020B0604020202020204" charset="0"/>
               </a:rPr>
               <a:t>Producción de publicaciones científicas de IA</a:t>
             </a:r>
-            <a:endParaRPr dirty="0"/>
+            <a:endParaRPr dirty="0">
+              <a:latin typeface="Economica" panose="020B0604020202020204" charset="0"/>
+            </a:endParaRPr>
           </a:p>
         </p:txBody>
       </p:sp>
@@ -8698,10 +8704,10 @@
               <a:buNone/>
             </a:pPr>
             <a:r>
-              <a:rPr lang="es" sz="4600"/>
+              <a:rPr lang="es" sz="4600" dirty="0"/>
               <a:t>Discusión</a:t>
             </a:r>
-            <a:endParaRPr sz="4600"/>
+            <a:endParaRPr sz="4600" dirty="0"/>
           </a:p>
         </p:txBody>
       </p:sp>
@@ -8714,7 +8720,7 @@
         <p:spPr>
           <a:xfrm>
             <a:off x="486525" y="1466125"/>
-            <a:ext cx="8274600" cy="1545300"/>
+            <a:ext cx="8274600" cy="1731213"/>
           </a:xfrm>
           <a:prstGeom prst="rect">
             <a:avLst/>
@@ -8743,17 +8749,19 @@
               <a:buNone/>
             </a:pPr>
             <a:r>
-              <a:rPr lang="es">
+              <a:rPr lang="es" dirty="0">
                 <a:solidFill>
                   <a:schemeClr val="dk1"/>
                 </a:solidFill>
+                <a:latin typeface="Economica" panose="020B0604020202020204" charset="0"/>
               </a:rPr>
               <a:t>Para concluir el análisis de esta entrega, destacamos los siguientes hallazgos reveladores:</a:t>
             </a:r>
-            <a:endParaRPr>
+            <a:endParaRPr dirty="0">
               <a:solidFill>
                 <a:schemeClr val="dk1"/>
               </a:solidFill>
+              <a:latin typeface="Economica" panose="020B0604020202020204" charset="0"/>
             </a:endParaRPr>
           </a:p>
           <a:p>
@@ -8774,17 +8782,19 @@
               <a:buChar char="●"/>
             </a:pPr>
             <a:r>
-              <a:rPr lang="es" b="1">
+              <a:rPr lang="es" b="1" dirty="0">
                 <a:solidFill>
                   <a:schemeClr val="dk1"/>
                 </a:solidFill>
+                <a:latin typeface="Economica" panose="020B0604020202020204" charset="0"/>
               </a:rPr>
               <a:t>Percepción </a:t>
             </a:r>
-            <a:endParaRPr b="1">
+            <a:endParaRPr b="1" dirty="0">
               <a:solidFill>
                 <a:schemeClr val="dk1"/>
               </a:solidFill>
+              <a:latin typeface="Economica" panose="020B0604020202020204" charset="0"/>
             </a:endParaRPr>
           </a:p>
           <a:p>
@@ -8805,17 +8815,19 @@
               <a:buChar char="●"/>
             </a:pPr>
             <a:r>
-              <a:rPr lang="es" b="1">
+              <a:rPr lang="es" b="1" dirty="0">
                 <a:solidFill>
                   <a:schemeClr val="dk1"/>
                 </a:solidFill>
+                <a:latin typeface="Economica" panose="020B0604020202020204" charset="0"/>
               </a:rPr>
               <a:t>Impacto laboral</a:t>
             </a:r>
-            <a:endParaRPr b="1">
+            <a:endParaRPr b="1" dirty="0">
               <a:solidFill>
                 <a:schemeClr val="dk1"/>
               </a:solidFill>
+              <a:latin typeface="Economica" panose="020B0604020202020204" charset="0"/>
             </a:endParaRPr>
           </a:p>
           <a:p>
@@ -8836,17 +8848,19 @@
               <a:buChar char="●"/>
             </a:pPr>
             <a:r>
-              <a:rPr lang="es" b="1">
+              <a:rPr lang="es" b="1" dirty="0">
                 <a:solidFill>
                   <a:schemeClr val="dk1"/>
                 </a:solidFill>
+                <a:latin typeface="Economica" panose="020B0604020202020204" charset="0"/>
               </a:rPr>
               <a:t>Efecto en la educación</a:t>
             </a:r>
-            <a:endParaRPr>
+            <a:endParaRPr dirty="0">
               <a:solidFill>
                 <a:schemeClr val="dk1"/>
               </a:solidFill>
+              <a:latin typeface="Economica" panose="020B0604020202020204" charset="0"/>
             </a:endParaRPr>
           </a:p>
           <a:p>
@@ -8867,17 +8881,19 @@
               <a:buChar char="●"/>
             </a:pPr>
             <a:r>
-              <a:rPr lang="es" b="1">
+              <a:rPr lang="es" b="1" dirty="0">
                 <a:solidFill>
                   <a:schemeClr val="dk1"/>
                 </a:solidFill>
+                <a:latin typeface="Economica" panose="020B0604020202020204" charset="0"/>
               </a:rPr>
               <a:t>Hegemonía tecnológica global</a:t>
             </a:r>
-            <a:endParaRPr>
+            <a:endParaRPr dirty="0">
               <a:solidFill>
                 <a:schemeClr val="dk1"/>
               </a:solidFill>
+              <a:latin typeface="Economica" panose="020B0604020202020204" charset="0"/>
             </a:endParaRPr>
           </a:p>
         </p:txBody>
